--- a/115年度蘆洲區公園廣場基礎設施整建工程_完工成果說明.pptx
+++ b/115年度蘆洲區公園廣場基礎設施整建工程_完工成果說明.pptx
@@ -113,29 +113,29 @@
   <p:extLst>
     <p:ext uri="{521415D9-36F7-43E2-AB2F-B90AF26B5E84}">
       <p14:sectionLst xmlns:p14="http://schemas.microsoft.com/office/powerpoint/2010/main">
-        <p14:section name="封面" id="{184b102e-45fe-6db8-d19b-34fc14b082da}">
+        <p14:section name="封面" id="{d98df7e3-dd71-b9cc-719a-fcab97e81bb2}">
           <p14:sldIdLst>
             <p14:sldId id="256"/>
           </p14:sldIdLst>
         </p14:section>
-        <p14:section name="工程概要" id="{22e87643-cfcf-0428-48e1-19c3c5af2218}">
+        <p14:section name="工程概要" id="{c1275d01-8318-0df9-0d52-050ff7517cac}">
           <p14:sldIdLst>
             <p14:sldId id="257"/>
           </p14:sldIdLst>
         </p14:section>
-        <p14:section name="工區一 永安兒童公園" id="{462c718e-b74f-e149-ab1f-e62e42ecdde9}">
+        <p14:section name="工區一 永安兒童公園" id="{d6509b20-f59d-81c5-995a-afbf06ed9450}">
           <p14:sldIdLst>
             <p14:sldId id="258"/>
             <p14:sldId id="259"/>
           </p14:sldIdLst>
         </p14:section>
-        <p14:section name="工區二 兒一公園" id="{f13dc26b-7def-5315-0830-d25c9cbc5b1a}">
+        <p14:section name="工區二 兒一公園" id="{01ffd536-1f0d-e1b0-3b79-07ba9bcfe710}">
           <p14:sldIdLst>
             <p14:sldId id="260"/>
             <p14:sldId id="261"/>
           </p14:sldIdLst>
         </p14:section>
-        <p14:section name="完工效益" id="{6639e7be-1746-8658-58b2-4a8caf0a47f8}">
+        <p14:section name="完工效益" id="{abc3890e-5567-450b-e9ea-7bd77c353745}">
           <p14:sldIdLst>
             <p14:sldId id="262"/>
           </p14:sldIdLst>
@@ -1146,11 +1146,11 @@
 
 <file path=ppt/slideLayouts/slideLayout2.xml><?xml version="1.0" encoding="utf-8"?>
 <p:sldLayout xmlns:a="http://schemas.openxmlformats.org/drawingml/2006/main" xmlns:r="http://schemas.openxmlformats.org/officeDocument/2006/relationships" xmlns:p="http://schemas.openxmlformats.org/presentationml/2006/main" preserve="1">
-  <p:cSld name="TITLE_DARK">
+  <p:cSld name="COVER">
     <p:bg>
       <p:bgPr>
         <a:solidFill>
-          <a:schemeClr val="tx2"/>
+          <a:schemeClr val="bg2"/>
         </a:solidFill>
       </p:bgPr>
     </p:bg>
@@ -1194,7 +1194,7 @@
               <a:buNone/>
               <a:defRPr lang="en-US" sz="3600" b="1" dirty="0">
                 <a:solidFill>
-                  <a:schemeClr val="bg1"/>
+                  <a:schemeClr val="tx2"/>
                 </a:solidFill>
               </a:defRPr>
             </a:lvl1pPr>
@@ -1233,7 +1233,7 @@
               <a:buNone/>
               <a:defRPr lang="en-US" sz="1800" dirty="0">
                 <a:solidFill>
-                  <a:schemeClr val="accent5"/>
+                  <a:schemeClr val="tx1"/>
                 </a:solidFill>
               </a:defRPr>
             </a:lvl1pPr>
@@ -1347,7 +1347,7 @@
             <a:lvl1pPr>
               <a:defRPr sz="1000">
                 <a:solidFill>
-                  <a:schemeClr val="accent4"/>
+                  <a:schemeClr val="tx1"/>
                 </a:solidFill>
               </a:defRPr>
             </a:lvl1pPr>
@@ -1417,7 +1417,7 @@
             <a:lvl1pPr>
               <a:defRPr sz="1000">
                 <a:solidFill>
-                  <a:schemeClr val="accent4"/>
+                  <a:schemeClr val="tx1"/>
                 </a:solidFill>
               </a:defRPr>
             </a:lvl1pPr>
@@ -1711,9 +1711,82 @@
           <a:chExt cx="0" cy="0"/>
         </a:xfrm>
       </p:grpSpPr>
+      <p:sp>
+        <p:nvSpPr>
+          <p:cNvPr id="2" name="bubble 1"/>
+          <p:cNvSpPr/>
+          <p:nvPr/>
+        </p:nvSpPr>
+        <p:spPr>
+          <a:xfrm>
+            <a:off x="6949440" y="-731520"/>
+            <a:ext cx="2377440" cy="2377440"/>
+          </a:xfrm>
+          <a:prstGeom prst="ellipse">
+            <a:avLst/>
+          </a:prstGeom>
+          <a:solidFill>
+            <a:schemeClr val="accent2">
+              <a:alpha val="80000"/>
+            </a:schemeClr>
+          </a:solidFill>
+          <a:ln/>
+        </p:spPr>
+      </p:sp>
+      <p:sp>
+        <p:nvSpPr>
+          <p:cNvPr id="3" name="bubble 2"/>
+          <p:cNvSpPr/>
+          <p:nvPr/>
+        </p:nvSpPr>
+        <p:spPr>
+          <a:xfrm>
+            <a:off x="6309360" y="5120640"/>
+            <a:ext cx="1645920" cy="1645920"/>
+          </a:xfrm>
+          <a:prstGeom prst="ellipse">
+            <a:avLst/>
+          </a:prstGeom>
+          <a:solidFill>
+            <a:schemeClr val="accent3">
+              <a:alpha val="80000"/>
+            </a:schemeClr>
+          </a:solidFill>
+          <a:ln/>
+        </p:spPr>
+      </p:sp>
+      <p:sp>
+        <p:nvSpPr>
+          <p:cNvPr id="4" name="photo frame"/>
+          <p:cNvSpPr/>
+          <p:nvPr/>
+        </p:nvSpPr>
+        <p:spPr>
+          <a:xfrm>
+            <a:off x="7498080" y="822960"/>
+            <a:ext cx="4114800" cy="5212080"/>
+          </a:xfrm>
+          <a:prstGeom prst="roundRect">
+            <a:avLst>
+              <a:gd name="adj" fmla="val 6667"/>
+            </a:avLst>
+          </a:prstGeom>
+          <a:solidFill>
+            <a:schemeClr val="bg1"/>
+          </a:solidFill>
+          <a:ln/>
+          <a:effectLst>
+            <a:outerShdw sx="100000" sy="100000" kx="0" ky="0" algn="bl" rotWithShape="0" blurRad="152400" dist="50800" dir="5400000">
+              <a:srgbClr val="C3A6FF">
+                <a:alpha val="35000"/>
+              </a:srgbClr>
+            </a:outerShdw>
+          </a:effectLst>
+        </p:spPr>
+      </p:sp>
       <p:pic>
         <p:nvPicPr>
-          <p:cNvPr id="2" name="cover photo" descr="/tmp/claude-0/-home-user-WORK/17061699-df28-586b-9ead-2ea441853089/scratchpad/img/photo1.jpg">    </p:cNvPr>
+          <p:cNvPr id="5" name="photo" descr="/tmp/claude-0/-home-user-WORK/17061699-df28-586b-9ead-2ea441853089/scratchpad/img/photo1.jpg">    </p:cNvPr>
           <p:cNvPicPr>
             <a:picLocks noChangeAspect="1"/>
           </p:cNvPicPr>
@@ -1726,8 +1799,8 @@
         </p:blipFill>
         <p:spPr>
           <a:xfrm>
-            <a:off x="7680960" y="0"/>
-            <a:ext cx="4507992" cy="6858000"/>
+            <a:off x="7680960" y="1005840"/>
+            <a:ext cx="3749040" cy="4846320"/>
           </a:xfrm>
           <a:prstGeom prst="rect">
             <a:avLst/>
@@ -1736,7 +1809,51 @@
       </p:pic>
       <p:sp>
         <p:nvSpPr>
-          <p:cNvPr id="3" name="Text 0"/>
+          <p:cNvPr id="6" name="bubble 1"/>
+          <p:cNvSpPr/>
+          <p:nvPr/>
+        </p:nvSpPr>
+        <p:spPr>
+          <a:xfrm>
+            <a:off x="-548640" y="-548640"/>
+            <a:ext cx="1645920" cy="1645920"/>
+          </a:xfrm>
+          <a:prstGeom prst="ellipse">
+            <a:avLst/>
+          </a:prstGeom>
+          <a:solidFill>
+            <a:schemeClr val="accent1">
+              <a:alpha val="70000"/>
+            </a:schemeClr>
+          </a:solidFill>
+          <a:ln/>
+        </p:spPr>
+      </p:sp>
+      <p:sp>
+        <p:nvSpPr>
+          <p:cNvPr id="7" name="bubble 2"/>
+          <p:cNvSpPr/>
+          <p:nvPr/>
+        </p:nvSpPr>
+        <p:spPr>
+          <a:xfrm>
+            <a:off x="5303520" y="5852160"/>
+            <a:ext cx="1097280" cy="1097280"/>
+          </a:xfrm>
+          <a:prstGeom prst="ellipse">
+            <a:avLst/>
+          </a:prstGeom>
+          <a:solidFill>
+            <a:schemeClr val="accent5">
+              <a:alpha val="70000"/>
+            </a:schemeClr>
+          </a:solidFill>
+          <a:ln/>
+        </p:spPr>
+      </p:sp>
+      <p:sp>
+        <p:nvSpPr>
+          <p:cNvPr id="8" name="kicker"/>
           <p:cNvSpPr txBox="1"/>
           <p:nvPr/>
         </p:nvSpPr>
@@ -1761,7 +1878,7 @@
             <a:r>
               <a:rPr lang="en-US" sz="1800" b="1" dirty="0">
                 <a:solidFill>
-                  <a:schemeClr val="accent3"/>
+                  <a:schemeClr val="tx1"/>
                 </a:solidFill>
               </a:rPr>
               <a:t>完工成果說明</a:t>
@@ -1772,7 +1889,7 @@
       </p:sp>
       <p:sp>
         <p:nvSpPr>
-          <p:cNvPr id="4" name="Text 0"/>
+          <p:cNvPr id="9" name="Text 0"/>
           <p:cNvSpPr/>
           <p:nvPr>
             <p:ph idx="100" type="title" hasCustomPrompt="1"/>
@@ -1799,7 +1916,7 @@
             <a:r>
               <a:rPr lang="en-US" sz="3600" b="1" dirty="0">
                 <a:solidFill>
-                  <a:schemeClr val="bg1"/>
+                  <a:schemeClr val="tx2"/>
                 </a:solidFill>
               </a:rPr>
               <a:t>115年度蘆洲區公園廣場</a:t>
@@ -1813,7 +1930,7 @@
             <a:r>
               <a:rPr lang="en-US" sz="3600" b="1" dirty="0">
                 <a:solidFill>
-                  <a:schemeClr val="bg1"/>
+                  <a:schemeClr val="tx2"/>
                 </a:solidFill>
               </a:rPr>
               <a:t>基礎設施整建工程</a:t>
@@ -1824,7 +1941,7 @@
       </p:sp>
       <p:sp>
         <p:nvSpPr>
-          <p:cNvPr id="5" name="Text 0"/>
+          <p:cNvPr id="10" name="Text 0"/>
           <p:cNvSpPr/>
           <p:nvPr>
             <p:ph idx="101" type="body" hasCustomPrompt="1"/>
@@ -1851,7 +1968,7 @@
             <a:r>
               <a:rPr lang="en-US" sz="1800" dirty="0">
                 <a:solidFill>
-                  <a:schemeClr val="accent5"/>
+                  <a:schemeClr val="tx1"/>
                 </a:solidFill>
               </a:rPr>
               <a:t>永安兒童公園、兒一公園及仁愛廣場</a:t>
@@ -1865,7 +1982,7 @@
             <a:r>
               <a:rPr lang="en-US" sz="1800" dirty="0">
                 <a:solidFill>
-                  <a:schemeClr val="accent5"/>
+                  <a:schemeClr val="tx1"/>
                 </a:solidFill>
               </a:rPr>
               <a:t>主辦機關｜新北市蘆洲區公所</a:t>
@@ -1950,11 +2067,13 @@
           </a:xfrm>
           <a:prstGeom prst="roundRect">
             <a:avLst>
-              <a:gd name="adj" fmla="val 2264"/>
+              <a:gd name="adj" fmla="val 3774"/>
             </a:avLst>
           </a:prstGeom>
           <a:solidFill>
-            <a:schemeClr val="bg2"/>
+            <a:schemeClr val="accent1">
+              <a:alpha val="22000"/>
+            </a:schemeClr>
           </a:solidFill>
           <a:ln/>
         </p:spPr>
@@ -1984,14 +2103,36 @@
       </p:pic>
       <p:sp>
         <p:nvSpPr>
-          <p:cNvPr id="5" name="工區一 name"/>
-          <p:cNvSpPr txBox="1"/>
-          <p:nvPr/>
-        </p:nvSpPr>
-        <p:spPr>
-          <a:xfrm>
-            <a:off x="777240" y="4526280"/>
-            <a:ext cx="4892040" cy="457200"/>
+          <p:cNvPr id="5" name="工區一 pill"/>
+          <p:cNvSpPr/>
+          <p:nvPr/>
+        </p:nvSpPr>
+        <p:spPr>
+          <a:xfrm>
+            <a:off x="777240" y="4553712"/>
+            <a:ext cx="868680" cy="384048"/>
+          </a:xfrm>
+          <a:prstGeom prst="roundRect">
+            <a:avLst>
+              <a:gd name="adj" fmla="val 50000"/>
+            </a:avLst>
+          </a:prstGeom>
+          <a:solidFill>
+            <a:schemeClr val="accent1"/>
+          </a:solidFill>
+          <a:ln/>
+        </p:spPr>
+      </p:sp>
+      <p:sp>
+        <p:nvSpPr>
+          <p:cNvPr id="6" name="工區一 tag"/>
+          <p:cNvSpPr txBox="1"/>
+          <p:nvPr/>
+        </p:nvSpPr>
+        <p:spPr>
+          <a:xfrm>
+            <a:off x="777240" y="4553712"/>
+            <a:ext cx="868680" cy="384048"/>
           </a:xfrm>
           <a:prstGeom prst="rect">
             <a:avLst/>
@@ -2003,98 +2144,123 @@
           <a:bodyPr wrap="square" lIns="0" tIns="0" rIns="0" bIns="0" rtlCol="0" anchor="ctr"/>
           <a:lstStyle/>
           <a:p>
+            <a:pPr algn="ctr" indent="0" marL="0">
+              <a:buNone/>
+            </a:pPr>
+            <a:r>
+              <a:rPr lang="en-US" sz="1400" b="1" dirty="0">
+                <a:solidFill>
+                  <a:schemeClr val="tx1"/>
+                </a:solidFill>
+              </a:rPr>
+              <a:t>工區一</a:t>
+            </a:r>
+            <a:endParaRPr lang="en-US" sz="1400" dirty="0"/>
+          </a:p>
+        </p:txBody>
+      </p:sp>
+      <p:sp>
+        <p:nvSpPr>
+          <p:cNvPr id="7" name="工區一 name"/>
+          <p:cNvSpPr txBox="1"/>
+          <p:nvPr/>
+        </p:nvSpPr>
+        <p:spPr>
+          <a:xfrm>
+            <a:off x="1783080" y="4526280"/>
+            <a:ext cx="3840480" cy="457200"/>
+          </a:xfrm>
+          <a:prstGeom prst="rect">
+            <a:avLst/>
+          </a:prstGeom>
+          <a:noFill/>
+          <a:ln/>
+        </p:spPr>
+        <p:txBody>
+          <a:bodyPr wrap="square" lIns="0" tIns="0" rIns="0" bIns="0" rtlCol="0" anchor="ctr"/>
+          <a:lstStyle/>
+          <a:p>
             <a:pPr indent="0" marL="0">
               <a:buNone/>
             </a:pPr>
             <a:r>
-              <a:rPr lang="en-US" sz="1600" b="1" dirty="0">
-                <a:solidFill>
-                  <a:schemeClr val="accent3"/>
-                </a:solidFill>
-              </a:rPr>
-              <a:t>工區一  </a:t>
-            </a:r>
+              <a:rPr lang="en-US" sz="2200" b="1" dirty="0">
+                <a:solidFill>
+                  <a:schemeClr val="tx2"/>
+                </a:solidFill>
+              </a:rPr>
+              <a:t>永安兒童公園</a:t>
+            </a:r>
+            <a:endParaRPr lang="en-US" sz="2200" dirty="0"/>
+          </a:p>
+        </p:txBody>
+      </p:sp>
+      <p:sp>
+        <p:nvSpPr>
+          <p:cNvPr id="8" name="工區一 items"/>
+          <p:cNvSpPr txBox="1"/>
+          <p:nvPr/>
+        </p:nvSpPr>
+        <p:spPr>
+          <a:xfrm>
+            <a:off x="777240" y="5120640"/>
+            <a:ext cx="4892040" cy="685800"/>
+          </a:xfrm>
+          <a:prstGeom prst="rect">
+            <a:avLst/>
+          </a:prstGeom>
+          <a:noFill/>
+          <a:ln/>
+        </p:spPr>
+        <p:txBody>
+          <a:bodyPr wrap="square" lIns="0" tIns="0" rIns="0" bIns="0" rtlCol="0" anchor="t"/>
+          <a:lstStyle/>
+          <a:p>
             <a:pPr indent="0" marL="0">
               <a:buNone/>
             </a:pPr>
             <a:r>
-              <a:rPr lang="en-US" sz="2200" b="1" dirty="0">
+              <a:rPr lang="en-US" sz="1400" dirty="0">
+                <a:solidFill>
+                  <a:schemeClr val="tx1"/>
+                </a:solidFill>
+              </a:rPr>
+              <a:t>排水改善、新設休憩廣場、拓寬人行步道、增設及更新體健設施、綠地整地鋪設草皮</a:t>
+            </a:r>
+            <a:endParaRPr lang="en-US" sz="1400" dirty="0"/>
+          </a:p>
+        </p:txBody>
+      </p:sp>
+      <p:sp>
+        <p:nvSpPr>
+          <p:cNvPr id="9" name="工區一 duration"/>
+          <p:cNvSpPr txBox="1"/>
+          <p:nvPr/>
+        </p:nvSpPr>
+        <p:spPr>
+          <a:xfrm>
+            <a:off x="777240" y="5806440"/>
+            <a:ext cx="4892040" cy="274320"/>
+          </a:xfrm>
+          <a:prstGeom prst="rect">
+            <a:avLst/>
+          </a:prstGeom>
+          <a:noFill/>
+          <a:ln/>
+        </p:spPr>
+        <p:txBody>
+          <a:bodyPr wrap="square" lIns="0" tIns="0" rIns="0" bIns="0" rtlCol="0" anchor="ctr"/>
+          <a:lstStyle/>
+          <a:p>
+            <a:pPr indent="0" marL="0">
+              <a:buNone/>
+            </a:pPr>
+            <a:r>
+              <a:rPr lang="en-US" sz="1200" dirty="0">
                 <a:solidFill>
                   <a:schemeClr val="tx2"/>
                 </a:solidFill>
               </a:rPr>
-              <a:t>永安兒童公園</a:t>
-            </a:r>
-            <a:endParaRPr lang="en-US" sz="1600" dirty="0"/>
-          </a:p>
-        </p:txBody>
-      </p:sp>
-      <p:sp>
-        <p:nvSpPr>
-          <p:cNvPr id="6" name="工區一 items"/>
-          <p:cNvSpPr txBox="1"/>
-          <p:nvPr/>
-        </p:nvSpPr>
-        <p:spPr>
-          <a:xfrm>
-            <a:off x="777240" y="5029200"/>
-            <a:ext cx="4892040" cy="731520"/>
-          </a:xfrm>
-          <a:prstGeom prst="rect">
-            <a:avLst/>
-          </a:prstGeom>
-          <a:noFill/>
-          <a:ln/>
-        </p:spPr>
-        <p:txBody>
-          <a:bodyPr wrap="square" lIns="0" tIns="0" rIns="0" bIns="0" rtlCol="0" anchor="t"/>
-          <a:lstStyle/>
-          <a:p>
-            <a:pPr indent="0" marL="0">
-              <a:buNone/>
-            </a:pPr>
-            <a:r>
-              <a:rPr lang="en-US" sz="1400" dirty="0">
-                <a:solidFill>
-                  <a:schemeClr val="tx1"/>
-                </a:solidFill>
-              </a:rPr>
-              <a:t>排水改善、新設休憩廣場、拓寬人行步道、增設及更新體健設施、綠地整地鋪設草皮</a:t>
-            </a:r>
-            <a:endParaRPr lang="en-US" sz="1400" dirty="0"/>
-          </a:p>
-        </p:txBody>
-      </p:sp>
-      <p:sp>
-        <p:nvSpPr>
-          <p:cNvPr id="7" name="工區一 duration"/>
-          <p:cNvSpPr txBox="1"/>
-          <p:nvPr/>
-        </p:nvSpPr>
-        <p:spPr>
-          <a:xfrm>
-            <a:off x="777240" y="5760720"/>
-            <a:ext cx="4892040" cy="320040"/>
-          </a:xfrm>
-          <a:prstGeom prst="rect">
-            <a:avLst/>
-          </a:prstGeom>
-          <a:noFill/>
-          <a:ln/>
-        </p:spPr>
-        <p:txBody>
-          <a:bodyPr wrap="square" lIns="0" tIns="0" rIns="0" bIns="0" rtlCol="0" anchor="ctr"/>
-          <a:lstStyle/>
-          <a:p>
-            <a:pPr indent="0" marL="0">
-              <a:buNone/>
-            </a:pPr>
-            <a:r>
-              <a:rPr lang="en-US" sz="1200" dirty="0">
-                <a:solidFill>
-                  <a:schemeClr val="accent4"/>
-                </a:solidFill>
-              </a:rPr>
               <a:t>工期 45 日曆天</a:t>
             </a:r>
             <a:endParaRPr lang="en-US" sz="1200" dirty="0"/>
@@ -2103,7 +2269,7 @@
       </p:sp>
       <p:sp>
         <p:nvSpPr>
-          <p:cNvPr id="8" name="工區二 card"/>
+          <p:cNvPr id="10" name="工區二 card"/>
           <p:cNvSpPr/>
           <p:nvPr/>
         </p:nvSpPr>
@@ -2114,18 +2280,20 @@
           </a:xfrm>
           <a:prstGeom prst="roundRect">
             <a:avLst>
-              <a:gd name="adj" fmla="val 2264"/>
+              <a:gd name="adj" fmla="val 3774"/>
             </a:avLst>
           </a:prstGeom>
           <a:solidFill>
-            <a:schemeClr val="bg2"/>
+            <a:schemeClr val="accent4">
+              <a:alpha val="22000"/>
+            </a:schemeClr>
           </a:solidFill>
           <a:ln/>
         </p:spPr>
       </p:sp>
       <p:pic>
         <p:nvPicPr>
-          <p:cNvPr id="9" name="工區二 photo" descr="/tmp/claude-0/-home-user-WORK/17061699-df28-586b-9ead-2ea441853089/scratchpad/img/photo2.jpg">    </p:cNvPr>
+          <p:cNvPr id="11" name="工區二 photo" descr="/tmp/claude-0/-home-user-WORK/17061699-df28-586b-9ead-2ea441853089/scratchpad/img/photo2.jpg">    </p:cNvPr>
           <p:cNvPicPr>
             <a:picLocks noChangeAspect="1"/>
           </p:cNvPicPr>
@@ -2148,14 +2316,36 @@
       </p:pic>
       <p:sp>
         <p:nvSpPr>
-          <p:cNvPr id="10" name="工區二 name"/>
-          <p:cNvSpPr txBox="1"/>
-          <p:nvPr/>
-        </p:nvSpPr>
-        <p:spPr>
-          <a:xfrm>
-            <a:off x="6492240" y="4526280"/>
-            <a:ext cx="4892040" cy="457200"/>
+          <p:cNvPr id="12" name="工區二 pill"/>
+          <p:cNvSpPr/>
+          <p:nvPr/>
+        </p:nvSpPr>
+        <p:spPr>
+          <a:xfrm>
+            <a:off x="6492240" y="4553712"/>
+            <a:ext cx="868680" cy="384048"/>
+          </a:xfrm>
+          <a:prstGeom prst="roundRect">
+            <a:avLst>
+              <a:gd name="adj" fmla="val 50000"/>
+            </a:avLst>
+          </a:prstGeom>
+          <a:solidFill>
+            <a:schemeClr val="accent4"/>
+          </a:solidFill>
+          <a:ln/>
+        </p:spPr>
+      </p:sp>
+      <p:sp>
+        <p:nvSpPr>
+          <p:cNvPr id="13" name="工區二 tag"/>
+          <p:cNvSpPr txBox="1"/>
+          <p:nvPr/>
+        </p:nvSpPr>
+        <p:spPr>
+          <a:xfrm>
+            <a:off x="6492240" y="4553712"/>
+            <a:ext cx="868680" cy="384048"/>
           </a:xfrm>
           <a:prstGeom prst="rect">
             <a:avLst/>
@@ -2167,96 +2357,121 @@
           <a:bodyPr wrap="square" lIns="0" tIns="0" rIns="0" bIns="0" rtlCol="0" anchor="ctr"/>
           <a:lstStyle/>
           <a:p>
+            <a:pPr algn="ctr" indent="0" marL="0">
+              <a:buNone/>
+            </a:pPr>
+            <a:r>
+              <a:rPr lang="en-US" sz="1400" b="1" dirty="0">
+                <a:solidFill>
+                  <a:schemeClr val="tx1"/>
+                </a:solidFill>
+              </a:rPr>
+              <a:t>工區二</a:t>
+            </a:r>
+            <a:endParaRPr lang="en-US" sz="1400" dirty="0"/>
+          </a:p>
+        </p:txBody>
+      </p:sp>
+      <p:sp>
+        <p:nvSpPr>
+          <p:cNvPr id="14" name="工區二 name"/>
+          <p:cNvSpPr txBox="1"/>
+          <p:nvPr/>
+        </p:nvSpPr>
+        <p:spPr>
+          <a:xfrm>
+            <a:off x="7498080" y="4526280"/>
+            <a:ext cx="3840480" cy="457200"/>
+          </a:xfrm>
+          <a:prstGeom prst="rect">
+            <a:avLst/>
+          </a:prstGeom>
+          <a:noFill/>
+          <a:ln/>
+        </p:spPr>
+        <p:txBody>
+          <a:bodyPr wrap="square" lIns="0" tIns="0" rIns="0" bIns="0" rtlCol="0" anchor="ctr"/>
+          <a:lstStyle/>
+          <a:p>
             <a:pPr indent="0" marL="0">
               <a:buNone/>
             </a:pPr>
             <a:r>
-              <a:rPr lang="en-US" sz="1600" b="1" dirty="0">
-                <a:solidFill>
-                  <a:schemeClr val="accent3"/>
-                </a:solidFill>
-              </a:rPr>
-              <a:t>工區二  </a:t>
-            </a:r>
+              <a:rPr lang="en-US" sz="2200" b="1" dirty="0">
+                <a:solidFill>
+                  <a:schemeClr val="tx2"/>
+                </a:solidFill>
+              </a:rPr>
+              <a:t>兒一公園</a:t>
+            </a:r>
+            <a:endParaRPr lang="en-US" sz="2200" dirty="0"/>
+          </a:p>
+        </p:txBody>
+      </p:sp>
+      <p:sp>
+        <p:nvSpPr>
+          <p:cNvPr id="15" name="工區二 items"/>
+          <p:cNvSpPr txBox="1"/>
+          <p:nvPr/>
+        </p:nvSpPr>
+        <p:spPr>
+          <a:xfrm>
+            <a:off x="6492240" y="5120640"/>
+            <a:ext cx="4892040" cy="685800"/>
+          </a:xfrm>
+          <a:prstGeom prst="rect">
+            <a:avLst/>
+          </a:prstGeom>
+          <a:noFill/>
+          <a:ln/>
+        </p:spPr>
+        <p:txBody>
+          <a:bodyPr wrap="square" lIns="0" tIns="0" rIns="0" bIns="0" rtlCol="0" anchor="t"/>
+          <a:lstStyle/>
+          <a:p>
             <a:pPr indent="0" marL="0">
               <a:buNone/>
             </a:pPr>
             <a:r>
-              <a:rPr lang="en-US" sz="2200" b="1" dirty="0">
+              <a:rPr lang="en-US" sz="1400" dirty="0">
+                <a:solidFill>
+                  <a:schemeClr val="tx1"/>
+                </a:solidFill>
+              </a:rPr>
+              <a:t>排水改善、新設休憩廣場、增設人行步道、綠地整地鋪設草皮、新植喬木</a:t>
+            </a:r>
+            <a:endParaRPr lang="en-US" sz="1400" dirty="0"/>
+          </a:p>
+        </p:txBody>
+      </p:sp>
+      <p:sp>
+        <p:nvSpPr>
+          <p:cNvPr id="16" name="工區二 duration"/>
+          <p:cNvSpPr txBox="1"/>
+          <p:nvPr/>
+        </p:nvSpPr>
+        <p:spPr>
+          <a:xfrm>
+            <a:off x="6492240" y="5806440"/>
+            <a:ext cx="4892040" cy="274320"/>
+          </a:xfrm>
+          <a:prstGeom prst="rect">
+            <a:avLst/>
+          </a:prstGeom>
+          <a:noFill/>
+          <a:ln/>
+        </p:spPr>
+        <p:txBody>
+          <a:bodyPr wrap="square" lIns="0" tIns="0" rIns="0" bIns="0" rtlCol="0" anchor="ctr"/>
+          <a:lstStyle/>
+          <a:p>
+            <a:pPr indent="0" marL="0">
+              <a:buNone/>
+            </a:pPr>
+            <a:r>
+              <a:rPr lang="en-US" sz="1200" dirty="0">
                 <a:solidFill>
                   <a:schemeClr val="tx2"/>
-                </a:solidFill>
-              </a:rPr>
-              <a:t>兒一公園</a:t>
-            </a:r>
-            <a:endParaRPr lang="en-US" sz="1600" dirty="0"/>
-          </a:p>
-        </p:txBody>
-      </p:sp>
-      <p:sp>
-        <p:nvSpPr>
-          <p:cNvPr id="11" name="工區二 items"/>
-          <p:cNvSpPr txBox="1"/>
-          <p:nvPr/>
-        </p:nvSpPr>
-        <p:spPr>
-          <a:xfrm>
-            <a:off x="6492240" y="5029200"/>
-            <a:ext cx="4892040" cy="731520"/>
-          </a:xfrm>
-          <a:prstGeom prst="rect">
-            <a:avLst/>
-          </a:prstGeom>
-          <a:noFill/>
-          <a:ln/>
-        </p:spPr>
-        <p:txBody>
-          <a:bodyPr wrap="square" lIns="0" tIns="0" rIns="0" bIns="0" rtlCol="0" anchor="t"/>
-          <a:lstStyle/>
-          <a:p>
-            <a:pPr indent="0" marL="0">
-              <a:buNone/>
-            </a:pPr>
-            <a:r>
-              <a:rPr lang="en-US" sz="1400" dirty="0">
-                <a:solidFill>
-                  <a:schemeClr val="tx1"/>
-                </a:solidFill>
-              </a:rPr>
-              <a:t>排水改善、新設休憩廣場、增設人行步道、綠地整地鋪設草皮</a:t>
-            </a:r>
-            <a:endParaRPr lang="en-US" sz="1400" dirty="0"/>
-          </a:p>
-        </p:txBody>
-      </p:sp>
-      <p:sp>
-        <p:nvSpPr>
-          <p:cNvPr id="12" name="工區二 duration"/>
-          <p:cNvSpPr txBox="1"/>
-          <p:nvPr/>
-        </p:nvSpPr>
-        <p:spPr>
-          <a:xfrm>
-            <a:off x="6492240" y="5760720"/>
-            <a:ext cx="4892040" cy="320040"/>
-          </a:xfrm>
-          <a:prstGeom prst="rect">
-            <a:avLst/>
-          </a:prstGeom>
-          <a:noFill/>
-          <a:ln/>
-        </p:spPr>
-        <p:txBody>
-          <a:bodyPr wrap="square" lIns="0" tIns="0" rIns="0" bIns="0" rtlCol="0" anchor="ctr"/>
-          <a:lstStyle/>
-          <a:p>
-            <a:pPr indent="0" marL="0">
-              <a:buNone/>
-            </a:pPr>
-            <a:r>
-              <a:rPr lang="en-US" sz="1200" dirty="0">
-                <a:solidFill>
-                  <a:schemeClr val="accent4"/>
                 </a:solidFill>
               </a:rPr>
               <a:t>工期 45 日曆天</a:t>
@@ -2295,7 +2510,7 @@
             <a:lvl1pPr>
               <a:defRPr sz="1000">
                 <a:solidFill>
-                  <a:schemeClr val="accent4"/>
+                  <a:schemeClr val="tx1"/>
                 </a:solidFill>
               </a:defRPr>
             </a:lvl1pPr>
@@ -2424,7 +2639,7 @@
             <a:r>
               <a:rPr lang="en-US" sz="1200" dirty="0">
                 <a:solidFill>
-                  <a:schemeClr val="accent4"/>
+                  <a:schemeClr val="tx1"/>
                 </a:solidFill>
               </a:rPr>
               <a:t>完工空拍</a:t>
@@ -2435,14 +2650,38 @@
       </p:sp>
       <p:sp>
         <p:nvSpPr>
-          <p:cNvPr id="5" name="works header"/>
-          <p:cNvSpPr txBox="1"/>
-          <p:nvPr/>
-        </p:nvSpPr>
-        <p:spPr>
-          <a:xfrm>
-            <a:off x="7955280" y="1371600"/>
-            <a:ext cx="3657600" cy="411480"/>
+          <p:cNvPr id="5" name="works card"/>
+          <p:cNvSpPr/>
+          <p:nvPr/>
+        </p:nvSpPr>
+        <p:spPr>
+          <a:xfrm>
+            <a:off x="7772400" y="1371600"/>
+            <a:ext cx="3840480" cy="3922776"/>
+          </a:xfrm>
+          <a:prstGeom prst="roundRect">
+            <a:avLst>
+              <a:gd name="adj" fmla="val 4762"/>
+            </a:avLst>
+          </a:prstGeom>
+          <a:solidFill>
+            <a:schemeClr val="accent1">
+              <a:alpha val="20000"/>
+            </a:schemeClr>
+          </a:solidFill>
+          <a:ln/>
+        </p:spPr>
+      </p:sp>
+      <p:sp>
+        <p:nvSpPr>
+          <p:cNvPr id="6" name="works header"/>
+          <p:cNvSpPr txBox="1"/>
+          <p:nvPr/>
+        </p:nvSpPr>
+        <p:spPr>
+          <a:xfrm>
+            <a:off x="8046720" y="1600200"/>
+            <a:ext cx="3383280" cy="411480"/>
           </a:xfrm>
           <a:prstGeom prst="rect">
             <a:avLst/>
@@ -2471,14 +2710,14 @@
       </p:sp>
       <p:sp>
         <p:nvSpPr>
-          <p:cNvPr id="6" name="num circle 1"/>
+          <p:cNvPr id="7" name="num circle 1"/>
           <p:cNvSpPr/>
           <p:nvPr/>
         </p:nvSpPr>
         <p:spPr>
           <a:xfrm>
-            <a:off x="7955280" y="1965960"/>
-            <a:ext cx="457200" cy="457200"/>
+            <a:off x="8046720" y="2103120"/>
+            <a:ext cx="420624" cy="420624"/>
           </a:xfrm>
           <a:prstGeom prst="ellipse">
             <a:avLst/>
@@ -2491,14 +2730,14 @@
       </p:sp>
       <p:sp>
         <p:nvSpPr>
-          <p:cNvPr id="7" name="num 1"/>
-          <p:cNvSpPr txBox="1"/>
-          <p:nvPr/>
-        </p:nvSpPr>
-        <p:spPr>
-          <a:xfrm>
-            <a:off x="7955280" y="1965960"/>
-            <a:ext cx="457200" cy="457200"/>
+          <p:cNvPr id="8" name="num 1"/>
+          <p:cNvSpPr txBox="1"/>
+          <p:nvPr/>
+        </p:nvSpPr>
+        <p:spPr>
+          <a:xfrm>
+            <a:off x="8046720" y="2103120"/>
+            <a:ext cx="420624" cy="420624"/>
           </a:xfrm>
           <a:prstGeom prst="rect">
             <a:avLst/>
@@ -2514,27 +2753,27 @@
               <a:buNone/>
             </a:pPr>
             <a:r>
-              <a:rPr lang="en-US" sz="1600" b="1" dirty="0">
-                <a:solidFill>
-                  <a:schemeClr val="bg1"/>
+              <a:rPr lang="en-US" sz="1500" b="1" dirty="0">
+                <a:solidFill>
+                  <a:schemeClr val="tx1"/>
                 </a:solidFill>
               </a:rPr>
               <a:t>1</a:t>
             </a:r>
-            <a:endParaRPr lang="en-US" sz="1600" dirty="0"/>
-          </a:p>
-        </p:txBody>
-      </p:sp>
-      <p:sp>
-        <p:nvSpPr>
-          <p:cNvPr id="8" name="work 1"/>
-          <p:cNvSpPr txBox="1"/>
-          <p:nvPr/>
-        </p:nvSpPr>
-        <p:spPr>
-          <a:xfrm>
-            <a:off x="8595360" y="1965960"/>
-            <a:ext cx="3108960" cy="457200"/>
+            <a:endParaRPr lang="en-US" sz="1500" dirty="0"/>
+          </a:p>
+        </p:txBody>
+      </p:sp>
+      <p:sp>
+        <p:nvSpPr>
+          <p:cNvPr id="9" name="work 1"/>
+          <p:cNvSpPr txBox="1"/>
+          <p:nvPr/>
+        </p:nvSpPr>
+        <p:spPr>
+          <a:xfrm>
+            <a:off x="8641080" y="2103120"/>
+            <a:ext cx="2880360" cy="420624"/>
           </a:xfrm>
           <a:prstGeom prst="rect">
             <a:avLst/>
@@ -2550,47 +2789,47 @@
               <a:buNone/>
             </a:pPr>
             <a:r>
-              <a:rPr lang="en-US" sz="1600" dirty="0">
+              <a:rPr lang="en-US" sz="1500" dirty="0">
                 <a:solidFill>
                   <a:schemeClr val="tx1"/>
                 </a:solidFill>
               </a:rPr>
               <a:t>排水改善</a:t>
             </a:r>
-            <a:endParaRPr lang="en-US" sz="1600" dirty="0"/>
-          </a:p>
-        </p:txBody>
-      </p:sp>
-      <p:sp>
-        <p:nvSpPr>
-          <p:cNvPr id="9" name="num circle 2"/>
+            <a:endParaRPr lang="en-US" sz="1500" dirty="0"/>
+          </a:p>
+        </p:txBody>
+      </p:sp>
+      <p:sp>
+        <p:nvSpPr>
+          <p:cNvPr id="10" name="num circle 2"/>
           <p:cNvSpPr/>
           <p:nvPr/>
         </p:nvSpPr>
         <p:spPr>
           <a:xfrm>
-            <a:off x="7955280" y="2679192"/>
-            <a:ext cx="457200" cy="457200"/>
+            <a:off x="8046720" y="2624328"/>
+            <a:ext cx="420624" cy="420624"/>
           </a:xfrm>
           <a:prstGeom prst="ellipse">
             <a:avLst/>
           </a:prstGeom>
           <a:solidFill>
-            <a:schemeClr val="accent1"/>
+            <a:schemeClr val="accent2"/>
           </a:solidFill>
           <a:ln/>
         </p:spPr>
       </p:sp>
       <p:sp>
         <p:nvSpPr>
-          <p:cNvPr id="10" name="num 2"/>
-          <p:cNvSpPr txBox="1"/>
-          <p:nvPr/>
-        </p:nvSpPr>
-        <p:spPr>
-          <a:xfrm>
-            <a:off x="7955280" y="2679192"/>
-            <a:ext cx="457200" cy="457200"/>
+          <p:cNvPr id="11" name="num 2"/>
+          <p:cNvSpPr txBox="1"/>
+          <p:nvPr/>
+        </p:nvSpPr>
+        <p:spPr>
+          <a:xfrm>
+            <a:off x="8046720" y="2624328"/>
+            <a:ext cx="420624" cy="420624"/>
           </a:xfrm>
           <a:prstGeom prst="rect">
             <a:avLst/>
@@ -2606,27 +2845,27 @@
               <a:buNone/>
             </a:pPr>
             <a:r>
-              <a:rPr lang="en-US" sz="1600" b="1" dirty="0">
-                <a:solidFill>
-                  <a:schemeClr val="bg1"/>
+              <a:rPr lang="en-US" sz="1500" b="1" dirty="0">
+                <a:solidFill>
+                  <a:schemeClr val="tx1"/>
                 </a:solidFill>
               </a:rPr>
               <a:t>2</a:t>
             </a:r>
-            <a:endParaRPr lang="en-US" sz="1600" dirty="0"/>
-          </a:p>
-        </p:txBody>
-      </p:sp>
-      <p:sp>
-        <p:nvSpPr>
-          <p:cNvPr id="11" name="work 2"/>
-          <p:cNvSpPr txBox="1"/>
-          <p:nvPr/>
-        </p:nvSpPr>
-        <p:spPr>
-          <a:xfrm>
-            <a:off x="8595360" y="2679192"/>
-            <a:ext cx="3108960" cy="457200"/>
+            <a:endParaRPr lang="en-US" sz="1500" dirty="0"/>
+          </a:p>
+        </p:txBody>
+      </p:sp>
+      <p:sp>
+        <p:nvSpPr>
+          <p:cNvPr id="12" name="work 2"/>
+          <p:cNvSpPr txBox="1"/>
+          <p:nvPr/>
+        </p:nvSpPr>
+        <p:spPr>
+          <a:xfrm>
+            <a:off x="8641080" y="2624328"/>
+            <a:ext cx="2880360" cy="420624"/>
           </a:xfrm>
           <a:prstGeom prst="rect">
             <a:avLst/>
@@ -2642,47 +2881,47 @@
               <a:buNone/>
             </a:pPr>
             <a:r>
-              <a:rPr lang="en-US" sz="1600" dirty="0">
+              <a:rPr lang="en-US" sz="1500" dirty="0">
                 <a:solidFill>
                   <a:schemeClr val="tx1"/>
                 </a:solidFill>
               </a:rPr>
               <a:t>新設休憩廣場</a:t>
             </a:r>
-            <a:endParaRPr lang="en-US" sz="1600" dirty="0"/>
-          </a:p>
-        </p:txBody>
-      </p:sp>
-      <p:sp>
-        <p:nvSpPr>
-          <p:cNvPr id="12" name="num circle 3"/>
+            <a:endParaRPr lang="en-US" sz="1500" dirty="0"/>
+          </a:p>
+        </p:txBody>
+      </p:sp>
+      <p:sp>
+        <p:nvSpPr>
+          <p:cNvPr id="13" name="num circle 3"/>
           <p:cNvSpPr/>
           <p:nvPr/>
         </p:nvSpPr>
         <p:spPr>
           <a:xfrm>
-            <a:off x="7955280" y="3392424"/>
-            <a:ext cx="457200" cy="457200"/>
+            <a:off x="8046720" y="3145536"/>
+            <a:ext cx="420624" cy="420624"/>
           </a:xfrm>
           <a:prstGeom prst="ellipse">
             <a:avLst/>
           </a:prstGeom>
           <a:solidFill>
-            <a:schemeClr val="accent1"/>
+            <a:schemeClr val="accent3"/>
           </a:solidFill>
           <a:ln/>
         </p:spPr>
       </p:sp>
       <p:sp>
         <p:nvSpPr>
-          <p:cNvPr id="13" name="num 3"/>
-          <p:cNvSpPr txBox="1"/>
-          <p:nvPr/>
-        </p:nvSpPr>
-        <p:spPr>
-          <a:xfrm>
-            <a:off x="7955280" y="3392424"/>
-            <a:ext cx="457200" cy="457200"/>
+          <p:cNvPr id="14" name="num 3"/>
+          <p:cNvSpPr txBox="1"/>
+          <p:nvPr/>
+        </p:nvSpPr>
+        <p:spPr>
+          <a:xfrm>
+            <a:off x="8046720" y="3145536"/>
+            <a:ext cx="420624" cy="420624"/>
           </a:xfrm>
           <a:prstGeom prst="rect">
             <a:avLst/>
@@ -2698,27 +2937,27 @@
               <a:buNone/>
             </a:pPr>
             <a:r>
-              <a:rPr lang="en-US" sz="1600" b="1" dirty="0">
-                <a:solidFill>
-                  <a:schemeClr val="bg1"/>
+              <a:rPr lang="en-US" sz="1500" b="1" dirty="0">
+                <a:solidFill>
+                  <a:schemeClr val="tx1"/>
                 </a:solidFill>
               </a:rPr>
               <a:t>3</a:t>
             </a:r>
-            <a:endParaRPr lang="en-US" sz="1600" dirty="0"/>
-          </a:p>
-        </p:txBody>
-      </p:sp>
-      <p:sp>
-        <p:nvSpPr>
-          <p:cNvPr id="14" name="work 3"/>
-          <p:cNvSpPr txBox="1"/>
-          <p:nvPr/>
-        </p:nvSpPr>
-        <p:spPr>
-          <a:xfrm>
-            <a:off x="8595360" y="3392424"/>
-            <a:ext cx="3108960" cy="457200"/>
+            <a:endParaRPr lang="en-US" sz="1500" dirty="0"/>
+          </a:p>
+        </p:txBody>
+      </p:sp>
+      <p:sp>
+        <p:nvSpPr>
+          <p:cNvPr id="15" name="work 3"/>
+          <p:cNvSpPr txBox="1"/>
+          <p:nvPr/>
+        </p:nvSpPr>
+        <p:spPr>
+          <a:xfrm>
+            <a:off x="8641080" y="3145536"/>
+            <a:ext cx="2880360" cy="420624"/>
           </a:xfrm>
           <a:prstGeom prst="rect">
             <a:avLst/>
@@ -2734,47 +2973,47 @@
               <a:buNone/>
             </a:pPr>
             <a:r>
-              <a:rPr lang="en-US" sz="1600" dirty="0">
+              <a:rPr lang="en-US" sz="1500" dirty="0">
                 <a:solidFill>
                   <a:schemeClr val="tx1"/>
                 </a:solidFill>
               </a:rPr>
               <a:t>拓寬園內人行步道</a:t>
             </a:r>
-            <a:endParaRPr lang="en-US" sz="1600" dirty="0"/>
-          </a:p>
-        </p:txBody>
-      </p:sp>
-      <p:sp>
-        <p:nvSpPr>
-          <p:cNvPr id="15" name="num circle 4"/>
+            <a:endParaRPr lang="en-US" sz="1500" dirty="0"/>
+          </a:p>
+        </p:txBody>
+      </p:sp>
+      <p:sp>
+        <p:nvSpPr>
+          <p:cNvPr id="16" name="num circle 4"/>
           <p:cNvSpPr/>
           <p:nvPr/>
         </p:nvSpPr>
         <p:spPr>
           <a:xfrm>
-            <a:off x="7955280" y="4105656"/>
-            <a:ext cx="457200" cy="457200"/>
+            <a:off x="8046720" y="3666744"/>
+            <a:ext cx="420624" cy="420624"/>
           </a:xfrm>
           <a:prstGeom prst="ellipse">
             <a:avLst/>
           </a:prstGeom>
           <a:solidFill>
-            <a:schemeClr val="accent1"/>
+            <a:schemeClr val="accent4"/>
           </a:solidFill>
           <a:ln/>
         </p:spPr>
       </p:sp>
       <p:sp>
         <p:nvSpPr>
-          <p:cNvPr id="16" name="num 4"/>
-          <p:cNvSpPr txBox="1"/>
-          <p:nvPr/>
-        </p:nvSpPr>
-        <p:spPr>
-          <a:xfrm>
-            <a:off x="7955280" y="4105656"/>
-            <a:ext cx="457200" cy="457200"/>
+          <p:cNvPr id="17" name="num 4"/>
+          <p:cNvSpPr txBox="1"/>
+          <p:nvPr/>
+        </p:nvSpPr>
+        <p:spPr>
+          <a:xfrm>
+            <a:off x="8046720" y="3666744"/>
+            <a:ext cx="420624" cy="420624"/>
           </a:xfrm>
           <a:prstGeom prst="rect">
             <a:avLst/>
@@ -2790,27 +3029,27 @@
               <a:buNone/>
             </a:pPr>
             <a:r>
-              <a:rPr lang="en-US" sz="1600" b="1" dirty="0">
-                <a:solidFill>
-                  <a:schemeClr val="bg1"/>
+              <a:rPr lang="en-US" sz="1500" b="1" dirty="0">
+                <a:solidFill>
+                  <a:schemeClr val="tx1"/>
                 </a:solidFill>
               </a:rPr>
               <a:t>4</a:t>
             </a:r>
-            <a:endParaRPr lang="en-US" sz="1600" dirty="0"/>
-          </a:p>
-        </p:txBody>
-      </p:sp>
-      <p:sp>
-        <p:nvSpPr>
-          <p:cNvPr id="17" name="work 4"/>
-          <p:cNvSpPr txBox="1"/>
-          <p:nvPr/>
-        </p:nvSpPr>
-        <p:spPr>
-          <a:xfrm>
-            <a:off x="8595360" y="4105656"/>
-            <a:ext cx="3108960" cy="457200"/>
+            <a:endParaRPr lang="en-US" sz="1500" dirty="0"/>
+          </a:p>
+        </p:txBody>
+      </p:sp>
+      <p:sp>
+        <p:nvSpPr>
+          <p:cNvPr id="18" name="work 4"/>
+          <p:cNvSpPr txBox="1"/>
+          <p:nvPr/>
+        </p:nvSpPr>
+        <p:spPr>
+          <a:xfrm>
+            <a:off x="8641080" y="3666744"/>
+            <a:ext cx="2880360" cy="420624"/>
           </a:xfrm>
           <a:prstGeom prst="rect">
             <a:avLst/>
@@ -2826,47 +3065,47 @@
               <a:buNone/>
             </a:pPr>
             <a:r>
-              <a:rPr lang="en-US" sz="1600" dirty="0">
+              <a:rPr lang="en-US" sz="1500" dirty="0">
                 <a:solidFill>
                   <a:schemeClr val="tx1"/>
                 </a:solidFill>
               </a:rPr>
-              <a:t>增設及更新既有體健設施</a:t>
-            </a:r>
-            <a:endParaRPr lang="en-US" sz="1600" dirty="0"/>
-          </a:p>
-        </p:txBody>
-      </p:sp>
-      <p:sp>
-        <p:nvSpPr>
-          <p:cNvPr id="18" name="num circle 5"/>
+              <a:t>增設及更新體健設施</a:t>
+            </a:r>
+            <a:endParaRPr lang="en-US" sz="1500" dirty="0"/>
+          </a:p>
+        </p:txBody>
+      </p:sp>
+      <p:sp>
+        <p:nvSpPr>
+          <p:cNvPr id="19" name="num circle 5"/>
           <p:cNvSpPr/>
           <p:nvPr/>
         </p:nvSpPr>
         <p:spPr>
           <a:xfrm>
-            <a:off x="7955280" y="4818888"/>
-            <a:ext cx="457200" cy="457200"/>
+            <a:off x="8046720" y="4187952"/>
+            <a:ext cx="420624" cy="420624"/>
           </a:xfrm>
           <a:prstGeom prst="ellipse">
             <a:avLst/>
           </a:prstGeom>
           <a:solidFill>
-            <a:schemeClr val="accent1"/>
+            <a:schemeClr val="accent5"/>
           </a:solidFill>
           <a:ln/>
         </p:spPr>
       </p:sp>
       <p:sp>
         <p:nvSpPr>
-          <p:cNvPr id="19" name="num 5"/>
-          <p:cNvSpPr txBox="1"/>
-          <p:nvPr/>
-        </p:nvSpPr>
-        <p:spPr>
-          <a:xfrm>
-            <a:off x="7955280" y="4818888"/>
-            <a:ext cx="457200" cy="457200"/>
+          <p:cNvPr id="20" name="num 5"/>
+          <p:cNvSpPr txBox="1"/>
+          <p:nvPr/>
+        </p:nvSpPr>
+        <p:spPr>
+          <a:xfrm>
+            <a:off x="8046720" y="4187952"/>
+            <a:ext cx="420624" cy="420624"/>
           </a:xfrm>
           <a:prstGeom prst="rect">
             <a:avLst/>
@@ -2882,27 +3121,27 @@
               <a:buNone/>
             </a:pPr>
             <a:r>
-              <a:rPr lang="en-US" sz="1600" b="1" dirty="0">
-                <a:solidFill>
-                  <a:schemeClr val="bg1"/>
+              <a:rPr lang="en-US" sz="1500" b="1" dirty="0">
+                <a:solidFill>
+                  <a:schemeClr val="tx1"/>
                 </a:solidFill>
               </a:rPr>
               <a:t>5</a:t>
             </a:r>
-            <a:endParaRPr lang="en-US" sz="1600" dirty="0"/>
-          </a:p>
-        </p:txBody>
-      </p:sp>
-      <p:sp>
-        <p:nvSpPr>
-          <p:cNvPr id="20" name="work 5"/>
-          <p:cNvSpPr txBox="1"/>
-          <p:nvPr/>
-        </p:nvSpPr>
-        <p:spPr>
-          <a:xfrm>
-            <a:off x="8595360" y="4818888"/>
-            <a:ext cx="3108960" cy="457200"/>
+            <a:endParaRPr lang="en-US" sz="1500" dirty="0"/>
+          </a:p>
+        </p:txBody>
+      </p:sp>
+      <p:sp>
+        <p:nvSpPr>
+          <p:cNvPr id="21" name="work 5"/>
+          <p:cNvSpPr txBox="1"/>
+          <p:nvPr/>
+        </p:nvSpPr>
+        <p:spPr>
+          <a:xfrm>
+            <a:off x="8641080" y="4187952"/>
+            <a:ext cx="2880360" cy="420624"/>
           </a:xfrm>
           <a:prstGeom prst="rect">
             <a:avLst/>
@@ -2918,14 +3157,106 @@
               <a:buNone/>
             </a:pPr>
             <a:r>
-              <a:rPr lang="en-US" sz="1600" dirty="0">
+              <a:rPr lang="en-US" sz="1500" dirty="0">
                 <a:solidFill>
                   <a:schemeClr val="tx1"/>
                 </a:solidFill>
               </a:rPr>
               <a:t>既有綠地整地鋪設草皮</a:t>
             </a:r>
-            <a:endParaRPr lang="en-US" sz="1600" dirty="0"/>
+            <a:endParaRPr lang="en-US" sz="1500" dirty="0"/>
+          </a:p>
+        </p:txBody>
+      </p:sp>
+      <p:sp>
+        <p:nvSpPr>
+          <p:cNvPr id="22" name="num circle 6"/>
+          <p:cNvSpPr/>
+          <p:nvPr/>
+        </p:nvSpPr>
+        <p:spPr>
+          <a:xfrm>
+            <a:off x="8046720" y="4709160"/>
+            <a:ext cx="420624" cy="420624"/>
+          </a:xfrm>
+          <a:prstGeom prst="ellipse">
+            <a:avLst/>
+          </a:prstGeom>
+          <a:solidFill>
+            <a:schemeClr val="accent6"/>
+          </a:solidFill>
+          <a:ln/>
+        </p:spPr>
+      </p:sp>
+      <p:sp>
+        <p:nvSpPr>
+          <p:cNvPr id="23" name="num 6"/>
+          <p:cNvSpPr txBox="1"/>
+          <p:nvPr/>
+        </p:nvSpPr>
+        <p:spPr>
+          <a:xfrm>
+            <a:off x="8046720" y="4709160"/>
+            <a:ext cx="420624" cy="420624"/>
+          </a:xfrm>
+          <a:prstGeom prst="rect">
+            <a:avLst/>
+          </a:prstGeom>
+          <a:noFill/>
+          <a:ln/>
+        </p:spPr>
+        <p:txBody>
+          <a:bodyPr wrap="square" lIns="0" tIns="0" rIns="0" bIns="0" rtlCol="0" anchor="ctr"/>
+          <a:lstStyle/>
+          <a:p>
+            <a:pPr algn="ctr" indent="0" marL="0">
+              <a:buNone/>
+            </a:pPr>
+            <a:r>
+              <a:rPr lang="en-US" sz="1500" b="1" dirty="0">
+                <a:solidFill>
+                  <a:schemeClr val="tx1"/>
+                </a:solidFill>
+              </a:rPr>
+              <a:t>6</a:t>
+            </a:r>
+            <a:endParaRPr lang="en-US" sz="1500" dirty="0"/>
+          </a:p>
+        </p:txBody>
+      </p:sp>
+      <p:sp>
+        <p:nvSpPr>
+          <p:cNvPr id="24" name="work 6"/>
+          <p:cNvSpPr txBox="1"/>
+          <p:nvPr/>
+        </p:nvSpPr>
+        <p:spPr>
+          <a:xfrm>
+            <a:off x="8641080" y="4709160"/>
+            <a:ext cx="2880360" cy="420624"/>
+          </a:xfrm>
+          <a:prstGeom prst="rect">
+            <a:avLst/>
+          </a:prstGeom>
+          <a:noFill/>
+          <a:ln/>
+        </p:spPr>
+        <p:txBody>
+          <a:bodyPr wrap="square" lIns="0" tIns="0" rIns="0" bIns="0" rtlCol="0" anchor="ctr"/>
+          <a:lstStyle/>
+          <a:p>
+            <a:pPr indent="0" marL="0">
+              <a:buNone/>
+            </a:pPr>
+            <a:r>
+              <a:rPr lang="en-US" sz="1500" dirty="0">
+                <a:solidFill>
+                  <a:schemeClr val="tx1"/>
+                </a:solidFill>
+              </a:rPr>
+              <a:t>廁所外牆重新粉刷</a:t>
+            </a:r>
+            <a:endParaRPr lang="en-US" sz="1500" dirty="0"/>
           </a:p>
         </p:txBody>
       </p:sp>
@@ -2959,7 +3290,7 @@
             <a:lvl1pPr>
               <a:defRPr sz="1000">
                 <a:solidFill>
-                  <a:schemeClr val="accent4"/>
+                  <a:schemeClr val="tx1"/>
                 </a:solidFill>
               </a:defRPr>
             </a:lvl1pPr>
@@ -3031,7 +3362,7 @@
                   <a:schemeClr val="tx2"/>
                 </a:solidFill>
               </a:rPr>
-              <a:t>工區一 永安兒童公園｜平面配置與施作數量</a:t>
+              <a:t>工區一 永安兒童公園｜平面配置與施作項目</a:t>
             </a:r>
             <a:endParaRPr lang="en-US" sz="3200" dirty="0"/>
           </a:p>
@@ -3046,25 +3377,63 @@
         <p:spPr>
           <a:xfrm>
             <a:off x="548640" y="1371600"/>
-            <a:ext cx="7498080" cy="4846320"/>
-          </a:xfrm>
-          <a:prstGeom prst="rect">
-            <a:avLst/>
+            <a:ext cx="7680960" cy="4846320"/>
+          </a:xfrm>
+          <a:prstGeom prst="roundRect">
+            <a:avLst>
+              <a:gd name="adj" fmla="val 2830"/>
+            </a:avLst>
           </a:prstGeom>
           <a:solidFill>
             <a:schemeClr val="bg1"/>
           </a:solidFill>
-          <a:ln w="12700">
+          <a:ln w="19050">
             <a:solidFill>
-              <a:schemeClr val="accent5"/>
+              <a:schemeClr val="accent1"/>
             </a:solidFill>
             <a:prstDash val="solid"/>
           </a:ln>
         </p:spPr>
       </p:sp>
+      <p:sp>
+        <p:nvSpPr>
+          <p:cNvPr id="4" name="plan caption"/>
+          <p:cNvSpPr txBox="1"/>
+          <p:nvPr/>
+        </p:nvSpPr>
+        <p:spPr>
+          <a:xfrm>
+            <a:off x="731520" y="1481328"/>
+            <a:ext cx="3657600" cy="320040"/>
+          </a:xfrm>
+          <a:prstGeom prst="rect">
+            <a:avLst/>
+          </a:prstGeom>
+          <a:noFill/>
+          <a:ln/>
+        </p:spPr>
+        <p:txBody>
+          <a:bodyPr wrap="square" lIns="0" tIns="0" rIns="0" bIns="0" rtlCol="0" anchor="ctr"/>
+          <a:lstStyle/>
+          <a:p>
+            <a:pPr indent="0" marL="0">
+              <a:buNone/>
+            </a:pPr>
+            <a:r>
+              <a:rPr lang="en-US" sz="1200" b="1" dirty="0">
+                <a:solidFill>
+                  <a:schemeClr val="tx2"/>
+                </a:solidFill>
+              </a:rPr>
+              <a:t>平面配置圖（修正版）</a:t>
+            </a:r>
+            <a:endParaRPr lang="en-US" sz="1200" dirty="0"/>
+          </a:p>
+        </p:txBody>
+      </p:sp>
       <p:pic>
         <p:nvPicPr>
-          <p:cNvPr id="4" name="plan drawing" descr="/tmp/claude-0/-home-user-WORK/17061699-df28-586b-9ead-2ea441853089/scratchpad/img/d-1-plan.jpg">    </p:cNvPr>
+          <p:cNvPr id="5" name="plan drawing" descr="/tmp/claude-0/-home-user-WORK/17061699-df28-586b-9ead-2ea441853089/scratchpad/img/rev-1-plan.png">    </p:cNvPr>
           <p:cNvPicPr>
             <a:picLocks noChangeAspect="1"/>
           </p:cNvPicPr>
@@ -3078,50 +3447,14 @@
         </p:blipFill>
         <p:spPr>
           <a:xfrm>
-            <a:off x="640080" y="2194560"/>
-            <a:ext cx="7315200" cy="3310128"/>
+            <a:off x="930283" y="1828800"/>
+            <a:ext cx="6917673" cy="4251960"/>
           </a:xfrm>
           <a:prstGeom prst="rect">
             <a:avLst/>
           </a:prstGeom>
         </p:spPr>
       </p:pic>
-      <p:sp>
-        <p:nvSpPr>
-          <p:cNvPr id="5" name="plan caption"/>
-          <p:cNvSpPr txBox="1"/>
-          <p:nvPr/>
-        </p:nvSpPr>
-        <p:spPr>
-          <a:xfrm>
-            <a:off x="685800" y="1463040"/>
-            <a:ext cx="3657600" cy="320040"/>
-          </a:xfrm>
-          <a:prstGeom prst="rect">
-            <a:avLst/>
-          </a:prstGeom>
-          <a:noFill/>
-          <a:ln/>
-        </p:spPr>
-        <p:txBody>
-          <a:bodyPr wrap="square" lIns="0" tIns="0" rIns="0" bIns="0" rtlCol="0" anchor="ctr"/>
-          <a:lstStyle/>
-          <a:p>
-            <a:pPr indent="0" marL="0">
-              <a:buNone/>
-            </a:pPr>
-            <a:r>
-              <a:rPr lang="en-US" sz="1200" dirty="0">
-                <a:solidFill>
-                  <a:schemeClr val="accent4"/>
-                </a:solidFill>
-              </a:rPr>
-              <a:t>平面配置示意圖</a:t>
-            </a:r>
-            <a:endParaRPr lang="en-US" sz="1200" dirty="0"/>
-          </a:p>
-        </p:txBody>
-      </p:sp>
       <p:sp>
         <p:nvSpPr>
           <p:cNvPr id="6" name="stat card 1"/>
@@ -3130,16 +3463,18 @@
         </p:nvSpPr>
         <p:spPr>
           <a:xfrm>
-            <a:off x="8412480" y="1371600"/>
-            <a:ext cx="1554480" cy="1115568"/>
+            <a:off x="8503920" y="1371600"/>
+            <a:ext cx="1463040" cy="1481328"/>
           </a:xfrm>
           <a:prstGeom prst="roundRect">
             <a:avLst>
-              <a:gd name="adj" fmla="val 6557"/>
+              <a:gd name="adj" fmla="val 9375"/>
             </a:avLst>
           </a:prstGeom>
           <a:solidFill>
-            <a:schemeClr val="bg2"/>
+            <a:schemeClr val="accent1">
+              <a:alpha val="35000"/>
+            </a:schemeClr>
           </a:solidFill>
           <a:ln/>
         </p:spPr>
@@ -3152,8 +3487,8 @@
         </p:nvSpPr>
         <p:spPr>
           <a:xfrm>
-            <a:off x="8522208" y="1481328"/>
-            <a:ext cx="1371600" cy="502920"/>
+            <a:off x="8641080" y="1536192"/>
+            <a:ext cx="1234440" cy="548640"/>
           </a:xfrm>
           <a:prstGeom prst="rect">
             <a:avLst/>
@@ -3169,59 +3504,59 @@
               <a:buNone/>
             </a:pPr>
             <a:r>
-              <a:rPr lang="en-US" sz="2600" b="1" dirty="0">
-                <a:solidFill>
-                  <a:schemeClr val="accent1"/>
-                </a:solidFill>
-              </a:rPr>
-              <a:t>247.2</a:t>
+              <a:rPr lang="en-US" sz="3000" b="1" dirty="0">
+                <a:solidFill>
+                  <a:schemeClr val="tx2"/>
+                </a:solidFill>
+              </a:rPr>
+              <a:t>4</a:t>
             </a:r>
             <a:pPr indent="0" marL="0">
               <a:buNone/>
             </a:pPr>
             <a:r>
+              <a:rPr lang="en-US" sz="1300" dirty="0">
+                <a:solidFill>
+                  <a:schemeClr val="tx2"/>
+                </a:solidFill>
+              </a:rPr>
+              <a:t> 組</a:t>
+            </a:r>
+            <a:endParaRPr lang="en-US" sz="3000" dirty="0"/>
+          </a:p>
+        </p:txBody>
+      </p:sp>
+      <p:sp>
+        <p:nvSpPr>
+          <p:cNvPr id="8" name="stat label 1"/>
+          <p:cNvSpPr txBox="1"/>
+          <p:nvPr/>
+        </p:nvSpPr>
+        <p:spPr>
+          <a:xfrm>
+            <a:off x="8641080" y="2148840"/>
+            <a:ext cx="1234440" cy="594360"/>
+          </a:xfrm>
+          <a:prstGeom prst="rect">
+            <a:avLst/>
+          </a:prstGeom>
+          <a:noFill/>
+          <a:ln/>
+        </p:spPr>
+        <p:txBody>
+          <a:bodyPr wrap="square" lIns="0" tIns="0" rIns="0" bIns="0" rtlCol="0" anchor="t"/>
+          <a:lstStyle/>
+          <a:p>
+            <a:pPr indent="0" marL="0">
+              <a:buNone/>
+            </a:pPr>
+            <a:r>
               <a:rPr lang="en-US" sz="1200" dirty="0">
                 <a:solidFill>
-                  <a:schemeClr val="accent1"/>
-                </a:solidFill>
-              </a:rPr>
-              <a:t> m²</a:t>
-            </a:r>
-            <a:endParaRPr lang="en-US" sz="2600" dirty="0"/>
-          </a:p>
-        </p:txBody>
-      </p:sp>
-      <p:sp>
-        <p:nvSpPr>
-          <p:cNvPr id="8" name="stat label 1"/>
-          <p:cNvSpPr txBox="1"/>
-          <p:nvPr/>
-        </p:nvSpPr>
-        <p:spPr>
-          <a:xfrm>
-            <a:off x="8522208" y="2011680"/>
-            <a:ext cx="1371600" cy="365760"/>
-          </a:xfrm>
-          <a:prstGeom prst="rect">
-            <a:avLst/>
-          </a:prstGeom>
-          <a:noFill/>
-          <a:ln/>
-        </p:spPr>
-        <p:txBody>
-          <a:bodyPr wrap="square" lIns="0" tIns="0" rIns="0" bIns="0" rtlCol="0" anchor="t"/>
-          <a:lstStyle/>
-          <a:p>
-            <a:pPr indent="0" marL="0">
-              <a:buNone/>
-            </a:pPr>
-            <a:r>
-              <a:rPr lang="en-US" sz="1200" dirty="0">
-                <a:solidFill>
                   <a:schemeClr val="tx1"/>
                 </a:solidFill>
               </a:rPr>
-              <a:t>混凝土地坪</a:t>
+              <a:t>體健設施新設</a:t>
             </a:r>
             <a:endParaRPr lang="en-US" sz="1200" dirty="0"/>
           </a:p>
@@ -3236,15 +3571,17 @@
         <p:spPr>
           <a:xfrm>
             <a:off x="10104120" y="1371600"/>
-            <a:ext cx="1554480" cy="1115568"/>
+            <a:ext cx="1463040" cy="1481328"/>
           </a:xfrm>
           <a:prstGeom prst="roundRect">
             <a:avLst>
-              <a:gd name="adj" fmla="val 6557"/>
+              <a:gd name="adj" fmla="val 9375"/>
             </a:avLst>
           </a:prstGeom>
           <a:solidFill>
-            <a:schemeClr val="bg2"/>
+            <a:schemeClr val="accent2">
+              <a:alpha val="35000"/>
+            </a:schemeClr>
           </a:solidFill>
           <a:ln/>
         </p:spPr>
@@ -3257,8 +3594,8 @@
         </p:nvSpPr>
         <p:spPr>
           <a:xfrm>
-            <a:off x="10213848" y="1481328"/>
-            <a:ext cx="1371600" cy="502920"/>
+            <a:off x="10241280" y="1536192"/>
+            <a:ext cx="1234440" cy="548640"/>
           </a:xfrm>
           <a:prstGeom prst="rect">
             <a:avLst/>
@@ -3274,59 +3611,59 @@
               <a:buNone/>
             </a:pPr>
             <a:r>
-              <a:rPr lang="en-US" sz="2600" b="1" dirty="0">
-                <a:solidFill>
-                  <a:schemeClr val="accent1"/>
-                </a:solidFill>
-              </a:rPr>
-              <a:t>204.6</a:t>
+              <a:rPr lang="en-US" sz="3000" b="1" dirty="0">
+                <a:solidFill>
+                  <a:schemeClr val="tx2"/>
+                </a:solidFill>
+              </a:rPr>
+              <a:t>3</a:t>
             </a:r>
             <a:pPr indent="0" marL="0">
               <a:buNone/>
             </a:pPr>
             <a:r>
+              <a:rPr lang="en-US" sz="1300" dirty="0">
+                <a:solidFill>
+                  <a:schemeClr val="tx2"/>
+                </a:solidFill>
+              </a:rPr>
+              <a:t> 組</a:t>
+            </a:r>
+            <a:endParaRPr lang="en-US" sz="3000" dirty="0"/>
+          </a:p>
+        </p:txBody>
+      </p:sp>
+      <p:sp>
+        <p:nvSpPr>
+          <p:cNvPr id="11" name="stat label 2"/>
+          <p:cNvSpPr txBox="1"/>
+          <p:nvPr/>
+        </p:nvSpPr>
+        <p:spPr>
+          <a:xfrm>
+            <a:off x="10241280" y="2148840"/>
+            <a:ext cx="1234440" cy="594360"/>
+          </a:xfrm>
+          <a:prstGeom prst="rect">
+            <a:avLst/>
+          </a:prstGeom>
+          <a:noFill/>
+          <a:ln/>
+        </p:spPr>
+        <p:txBody>
+          <a:bodyPr wrap="square" lIns="0" tIns="0" rIns="0" bIns="0" rtlCol="0" anchor="t"/>
+          <a:lstStyle/>
+          <a:p>
+            <a:pPr indent="0" marL="0">
+              <a:buNone/>
+            </a:pPr>
+            <a:r>
               <a:rPr lang="en-US" sz="1200" dirty="0">
                 <a:solidFill>
-                  <a:schemeClr val="accent1"/>
-                </a:solidFill>
-              </a:rPr>
-              <a:t> m²</a:t>
-            </a:r>
-            <a:endParaRPr lang="en-US" sz="2600" dirty="0"/>
-          </a:p>
-        </p:txBody>
-      </p:sp>
-      <p:sp>
-        <p:nvSpPr>
-          <p:cNvPr id="11" name="stat label 2"/>
-          <p:cNvSpPr txBox="1"/>
-          <p:nvPr/>
-        </p:nvSpPr>
-        <p:spPr>
-          <a:xfrm>
-            <a:off x="10213848" y="2011680"/>
-            <a:ext cx="1371600" cy="365760"/>
-          </a:xfrm>
-          <a:prstGeom prst="rect">
-            <a:avLst/>
-          </a:prstGeom>
-          <a:noFill/>
-          <a:ln/>
-        </p:spPr>
-        <p:txBody>
-          <a:bodyPr wrap="square" lIns="0" tIns="0" rIns="0" bIns="0" rtlCol="0" anchor="t"/>
-          <a:lstStyle/>
-          <a:p>
-            <a:pPr indent="0" marL="0">
-              <a:buNone/>
-            </a:pPr>
-            <a:r>
-              <a:rPr lang="en-US" sz="1200" dirty="0">
-                <a:solidFill>
                   <a:schemeClr val="tx1"/>
                 </a:solidFill>
               </a:rPr>
-              <a:t>鋪設草皮</a:t>
+              <a:t>體健設施更新</a:t>
             </a:r>
             <a:endParaRPr lang="en-US" sz="1200" dirty="0"/>
           </a:p>
@@ -3340,16 +3677,18 @@
         </p:nvSpPr>
         <p:spPr>
           <a:xfrm>
-            <a:off x="8412480" y="2633472"/>
-            <a:ext cx="1554480" cy="1115568"/>
+            <a:off x="8503920" y="3035808"/>
+            <a:ext cx="1463040" cy="1481328"/>
           </a:xfrm>
           <a:prstGeom prst="roundRect">
             <a:avLst>
-              <a:gd name="adj" fmla="val 6557"/>
+              <a:gd name="adj" fmla="val 9375"/>
             </a:avLst>
           </a:prstGeom>
           <a:solidFill>
-            <a:schemeClr val="bg2"/>
+            <a:schemeClr val="accent3">
+              <a:alpha val="35000"/>
+            </a:schemeClr>
           </a:solidFill>
           <a:ln/>
         </p:spPr>
@@ -3362,8 +3701,8 @@
         </p:nvSpPr>
         <p:spPr>
           <a:xfrm>
-            <a:off x="8522208" y="2743200"/>
-            <a:ext cx="1371600" cy="502920"/>
+            <a:off x="8641080" y="3200400"/>
+            <a:ext cx="1234440" cy="548640"/>
           </a:xfrm>
           <a:prstGeom prst="rect">
             <a:avLst/>
@@ -3379,59 +3718,59 @@
               <a:buNone/>
             </a:pPr>
             <a:r>
-              <a:rPr lang="en-US" sz="2600" b="1" dirty="0">
-                <a:solidFill>
-                  <a:schemeClr val="accent1"/>
-                </a:solidFill>
-              </a:rPr>
-              <a:t>190.1</a:t>
+              <a:rPr lang="en-US" sz="3000" b="1" dirty="0">
+                <a:solidFill>
+                  <a:schemeClr val="tx2"/>
+                </a:solidFill>
+              </a:rPr>
+              <a:t>9</a:t>
             </a:r>
             <a:pPr indent="0" marL="0">
               <a:buNone/>
             </a:pPr>
             <a:r>
+              <a:rPr lang="en-US" sz="1300" dirty="0">
+                <a:solidFill>
+                  <a:schemeClr val="tx2"/>
+                </a:solidFill>
+              </a:rPr>
+              <a:t> 座</a:t>
+            </a:r>
+            <a:endParaRPr lang="en-US" sz="3000" dirty="0"/>
+          </a:p>
+        </p:txBody>
+      </p:sp>
+      <p:sp>
+        <p:nvSpPr>
+          <p:cNvPr id="14" name="stat label 3"/>
+          <p:cNvSpPr txBox="1"/>
+          <p:nvPr/>
+        </p:nvSpPr>
+        <p:spPr>
+          <a:xfrm>
+            <a:off x="8641080" y="3813048"/>
+            <a:ext cx="1234440" cy="594360"/>
+          </a:xfrm>
+          <a:prstGeom prst="rect">
+            <a:avLst/>
+          </a:prstGeom>
+          <a:noFill/>
+          <a:ln/>
+        </p:spPr>
+        <p:txBody>
+          <a:bodyPr wrap="square" lIns="0" tIns="0" rIns="0" bIns="0" rtlCol="0" anchor="t"/>
+          <a:lstStyle/>
+          <a:p>
+            <a:pPr indent="0" marL="0">
+              <a:buNone/>
+            </a:pPr>
+            <a:r>
               <a:rPr lang="en-US" sz="1200" dirty="0">
                 <a:solidFill>
-                  <a:schemeClr val="accent1"/>
-                </a:solidFill>
-              </a:rPr>
-              <a:t> m²</a:t>
-            </a:r>
-            <a:endParaRPr lang="en-US" sz="2600" dirty="0"/>
-          </a:p>
-        </p:txBody>
-      </p:sp>
-      <p:sp>
-        <p:nvSpPr>
-          <p:cNvPr id="14" name="stat label 3"/>
-          <p:cNvSpPr txBox="1"/>
-          <p:nvPr/>
-        </p:nvSpPr>
-        <p:spPr>
-          <a:xfrm>
-            <a:off x="8522208" y="3273552"/>
-            <a:ext cx="1371600" cy="365760"/>
-          </a:xfrm>
-          <a:prstGeom prst="rect">
-            <a:avLst/>
-          </a:prstGeom>
-          <a:noFill/>
-          <a:ln/>
-        </p:spPr>
-        <p:txBody>
-          <a:bodyPr wrap="square" lIns="0" tIns="0" rIns="0" bIns="0" rtlCol="0" anchor="t"/>
-          <a:lstStyle/>
-          <a:p>
-            <a:pPr indent="0" marL="0">
-              <a:buNone/>
-            </a:pPr>
-            <a:r>
-              <a:rPr lang="en-US" sz="1200" dirty="0">
-                <a:solidFill>
                   <a:schemeClr val="tx1"/>
                 </a:solidFill>
               </a:rPr>
-              <a:t>鬆散材(清碎石)</a:t>
+              <a:t>新設座椅</a:t>
             </a:r>
             <a:endParaRPr lang="en-US" sz="1200" dirty="0"/>
           </a:p>
@@ -3445,16 +3784,18 @@
         </p:nvSpPr>
         <p:spPr>
           <a:xfrm>
-            <a:off x="10104120" y="2633472"/>
-            <a:ext cx="1554480" cy="1115568"/>
+            <a:off x="10104120" y="3035808"/>
+            <a:ext cx="1463040" cy="1481328"/>
           </a:xfrm>
           <a:prstGeom prst="roundRect">
             <a:avLst>
-              <a:gd name="adj" fmla="val 6557"/>
+              <a:gd name="adj" fmla="val 9375"/>
             </a:avLst>
           </a:prstGeom>
           <a:solidFill>
-            <a:schemeClr val="bg2"/>
+            <a:schemeClr val="accent4">
+              <a:alpha val="35000"/>
+            </a:schemeClr>
           </a:solidFill>
           <a:ln/>
         </p:spPr>
@@ -3467,8 +3808,8 @@
         </p:nvSpPr>
         <p:spPr>
           <a:xfrm>
-            <a:off x="10213848" y="2743200"/>
-            <a:ext cx="1371600" cy="502920"/>
+            <a:off x="10241280" y="3200400"/>
+            <a:ext cx="1234440" cy="548640"/>
           </a:xfrm>
           <a:prstGeom prst="rect">
             <a:avLst/>
@@ -3484,59 +3825,59 @@
               <a:buNone/>
             </a:pPr>
             <a:r>
-              <a:rPr lang="en-US" sz="2600" b="1" dirty="0">
-                <a:solidFill>
-                  <a:schemeClr val="accent1"/>
-                </a:solidFill>
-              </a:rPr>
-              <a:t>94.2</a:t>
+              <a:rPr lang="en-US" sz="3000" b="1" dirty="0">
+                <a:solidFill>
+                  <a:schemeClr val="tx2"/>
+                </a:solidFill>
+              </a:rPr>
+              <a:t>6</a:t>
             </a:r>
             <a:pPr indent="0" marL="0">
               <a:buNone/>
             </a:pPr>
             <a:r>
+              <a:rPr lang="en-US" sz="1300" dirty="0">
+                <a:solidFill>
+                  <a:schemeClr val="tx2"/>
+                </a:solidFill>
+              </a:rPr>
+              <a:t> 組</a:t>
+            </a:r>
+            <a:endParaRPr lang="en-US" sz="3000" dirty="0"/>
+          </a:p>
+        </p:txBody>
+      </p:sp>
+      <p:sp>
+        <p:nvSpPr>
+          <p:cNvPr id="17" name="stat label 4"/>
+          <p:cNvSpPr txBox="1"/>
+          <p:nvPr/>
+        </p:nvSpPr>
+        <p:spPr>
+          <a:xfrm>
+            <a:off x="10241280" y="3813048"/>
+            <a:ext cx="1234440" cy="594360"/>
+          </a:xfrm>
+          <a:prstGeom prst="rect">
+            <a:avLst/>
+          </a:prstGeom>
+          <a:noFill/>
+          <a:ln/>
+        </p:spPr>
+        <p:txBody>
+          <a:bodyPr wrap="square" lIns="0" tIns="0" rIns="0" bIns="0" rtlCol="0" anchor="t"/>
+          <a:lstStyle/>
+          <a:p>
+            <a:pPr indent="0" marL="0">
+              <a:buNone/>
+            </a:pPr>
+            <a:r>
               <a:rPr lang="en-US" sz="1200" dirty="0">
                 <a:solidFill>
-                  <a:schemeClr val="accent1"/>
-                </a:solidFill>
-              </a:rPr>
-              <a:t> m</a:t>
-            </a:r>
-            <a:endParaRPr lang="en-US" sz="2600" dirty="0"/>
-          </a:p>
-        </p:txBody>
-      </p:sp>
-      <p:sp>
-        <p:nvSpPr>
-          <p:cNvPr id="17" name="stat label 4"/>
-          <p:cNvSpPr txBox="1"/>
-          <p:nvPr/>
-        </p:nvSpPr>
-        <p:spPr>
-          <a:xfrm>
-            <a:off x="10213848" y="3273552"/>
-            <a:ext cx="1371600" cy="365760"/>
-          </a:xfrm>
-          <a:prstGeom prst="rect">
-            <a:avLst/>
-          </a:prstGeom>
-          <a:noFill/>
-          <a:ln/>
-        </p:spPr>
-        <p:txBody>
-          <a:bodyPr wrap="square" lIns="0" tIns="0" rIns="0" bIns="0" rtlCol="0" anchor="t"/>
-          <a:lstStyle/>
-          <a:p>
-            <a:pPr indent="0" marL="0">
-              <a:buNone/>
-            </a:pPr>
-            <a:r>
-              <a:rPr lang="en-US" sz="1200" dirty="0">
-                <a:solidFill>
                   <a:schemeClr val="tx1"/>
                 </a:solidFill>
               </a:rPr>
-              <a:t>新設排水溝</a:t>
+              <a:t>既有座椅移置</a:t>
             </a:r>
             <a:endParaRPr lang="en-US" sz="1200" dirty="0"/>
           </a:p>
@@ -3550,16 +3891,18 @@
         </p:nvSpPr>
         <p:spPr>
           <a:xfrm>
-            <a:off x="8412480" y="3895344"/>
-            <a:ext cx="1554480" cy="1115568"/>
+            <a:off x="8503920" y="4700016"/>
+            <a:ext cx="1463040" cy="1481328"/>
           </a:xfrm>
           <a:prstGeom prst="roundRect">
             <a:avLst>
-              <a:gd name="adj" fmla="val 6557"/>
+              <a:gd name="adj" fmla="val 9375"/>
             </a:avLst>
           </a:prstGeom>
           <a:solidFill>
-            <a:schemeClr val="bg2"/>
+            <a:schemeClr val="accent5">
+              <a:alpha val="35000"/>
+            </a:schemeClr>
           </a:solidFill>
           <a:ln/>
         </p:spPr>
@@ -3572,8 +3915,8 @@
         </p:nvSpPr>
         <p:spPr>
           <a:xfrm>
-            <a:off x="8522208" y="4005072"/>
-            <a:ext cx="1371600" cy="502920"/>
+            <a:off x="8641080" y="4864608"/>
+            <a:ext cx="1234440" cy="548640"/>
           </a:xfrm>
           <a:prstGeom prst="rect">
             <a:avLst/>
@@ -3589,59 +3932,59 @@
               <a:buNone/>
             </a:pPr>
             <a:r>
-              <a:rPr lang="en-US" sz="2600" b="1" dirty="0">
-                <a:solidFill>
-                  <a:schemeClr val="accent1"/>
-                </a:solidFill>
-              </a:rPr>
-              <a:t>4</a:t>
+              <a:rPr lang="en-US" sz="3000" b="1" dirty="0">
+                <a:solidFill>
+                  <a:schemeClr val="tx2"/>
+                </a:solidFill>
+              </a:rPr>
+              <a:t>55.7</a:t>
             </a:r>
             <a:pPr indent="0" marL="0">
               <a:buNone/>
             </a:pPr>
             <a:r>
+              <a:rPr lang="en-US" sz="1300" dirty="0">
+                <a:solidFill>
+                  <a:schemeClr val="tx2"/>
+                </a:solidFill>
+              </a:rPr>
+              <a:t> m</a:t>
+            </a:r>
+            <a:endParaRPr lang="en-US" sz="3000" dirty="0"/>
+          </a:p>
+        </p:txBody>
+      </p:sp>
+      <p:sp>
+        <p:nvSpPr>
+          <p:cNvPr id="20" name="stat label 5"/>
+          <p:cNvSpPr txBox="1"/>
+          <p:nvPr/>
+        </p:nvSpPr>
+        <p:spPr>
+          <a:xfrm>
+            <a:off x="8641080" y="5477256"/>
+            <a:ext cx="1234440" cy="594360"/>
+          </a:xfrm>
+          <a:prstGeom prst="rect">
+            <a:avLst/>
+          </a:prstGeom>
+          <a:noFill/>
+          <a:ln/>
+        </p:spPr>
+        <p:txBody>
+          <a:bodyPr wrap="square" lIns="0" tIns="0" rIns="0" bIns="0" rtlCol="0" anchor="t"/>
+          <a:lstStyle/>
+          <a:p>
+            <a:pPr indent="0" marL="0">
+              <a:buNone/>
+            </a:pPr>
+            <a:r>
               <a:rPr lang="en-US" sz="1200" dirty="0">
                 <a:solidFill>
-                  <a:schemeClr val="accent1"/>
-                </a:solidFill>
-              </a:rPr>
-              <a:t> 座</a:t>
-            </a:r>
-            <a:endParaRPr lang="en-US" sz="2600" dirty="0"/>
-          </a:p>
-        </p:txBody>
-      </p:sp>
-      <p:sp>
-        <p:nvSpPr>
-          <p:cNvPr id="20" name="stat label 5"/>
-          <p:cNvSpPr txBox="1"/>
-          <p:nvPr/>
-        </p:nvSpPr>
-        <p:spPr>
-          <a:xfrm>
-            <a:off x="8522208" y="4535424"/>
-            <a:ext cx="1371600" cy="365760"/>
-          </a:xfrm>
-          <a:prstGeom prst="rect">
-            <a:avLst/>
-          </a:prstGeom>
-          <a:noFill/>
-          <a:ln/>
-        </p:spPr>
-        <p:txBody>
-          <a:bodyPr wrap="square" lIns="0" tIns="0" rIns="0" bIns="0" rtlCol="0" anchor="t"/>
-          <a:lstStyle/>
-          <a:p>
-            <a:pPr indent="0" marL="0">
-              <a:buNone/>
-            </a:pPr>
-            <a:r>
-              <a:rPr lang="en-US" sz="1200" dirty="0">
-                <a:solidFill>
                   <a:schemeClr val="tx1"/>
                 </a:solidFill>
               </a:rPr>
-              <a:t>新設陰井</a:t>
+              <a:t>草皮分隔板</a:t>
             </a:r>
             <a:endParaRPr lang="en-US" sz="1200" dirty="0"/>
           </a:p>
@@ -3655,16 +3998,18 @@
         </p:nvSpPr>
         <p:spPr>
           <a:xfrm>
-            <a:off x="10104120" y="3895344"/>
-            <a:ext cx="1554480" cy="1115568"/>
+            <a:off x="10104120" y="4700016"/>
+            <a:ext cx="1463040" cy="1481328"/>
           </a:xfrm>
           <a:prstGeom prst="roundRect">
             <a:avLst>
-              <a:gd name="adj" fmla="val 6557"/>
+              <a:gd name="adj" fmla="val 9375"/>
             </a:avLst>
           </a:prstGeom>
           <a:solidFill>
-            <a:schemeClr val="bg2"/>
+            <a:schemeClr val="accent6">
+              <a:alpha val="35000"/>
+            </a:schemeClr>
           </a:solidFill>
           <a:ln/>
         </p:spPr>
@@ -3677,8 +4022,8 @@
         </p:nvSpPr>
         <p:spPr>
           <a:xfrm>
-            <a:off x="10213848" y="4005072"/>
-            <a:ext cx="1371600" cy="502920"/>
+            <a:off x="10241280" y="4864608"/>
+            <a:ext cx="1234440" cy="548640"/>
           </a:xfrm>
           <a:prstGeom prst="rect">
             <a:avLst/>
@@ -3694,48 +4039,62 @@
               <a:buNone/>
             </a:pPr>
             <a:r>
-              <a:rPr lang="en-US" sz="2600" b="1" dirty="0">
-                <a:solidFill>
-                  <a:schemeClr val="accent1"/>
-                </a:solidFill>
-              </a:rPr>
-              <a:t>90.8</a:t>
+              <a:rPr lang="en-US" sz="3000" b="1" dirty="0">
+                <a:solidFill>
+                  <a:schemeClr val="tx2"/>
+                </a:solidFill>
+              </a:rPr>
+              <a:t>1</a:t>
             </a:r>
             <a:pPr indent="0" marL="0">
               <a:buNone/>
             </a:pPr>
             <a:r>
+              <a:rPr lang="en-US" sz="1300" dirty="0">
+                <a:solidFill>
+                  <a:schemeClr val="tx2"/>
+                </a:solidFill>
+              </a:rPr>
+              <a:t> 株</a:t>
+            </a:r>
+            <a:endParaRPr lang="en-US" sz="3000" dirty="0"/>
+          </a:p>
+        </p:txBody>
+      </p:sp>
+      <p:sp>
+        <p:nvSpPr>
+          <p:cNvPr id="23" name="stat label 6"/>
+          <p:cNvSpPr txBox="1"/>
+          <p:nvPr/>
+        </p:nvSpPr>
+        <p:spPr>
+          <a:xfrm>
+            <a:off x="10241280" y="5477256"/>
+            <a:ext cx="1234440" cy="594360"/>
+          </a:xfrm>
+          <a:prstGeom prst="rect">
+            <a:avLst/>
+          </a:prstGeom>
+          <a:noFill/>
+          <a:ln/>
+        </p:spPr>
+        <p:txBody>
+          <a:bodyPr wrap="square" lIns="0" tIns="0" rIns="0" bIns="0" rtlCol="0" anchor="t"/>
+          <a:lstStyle/>
+          <a:p>
+            <a:pPr indent="0" marL="0">
+              <a:buNone/>
+            </a:pPr>
+            <a:r>
               <a:rPr lang="en-US" sz="1200" dirty="0">
                 <a:solidFill>
-                  <a:schemeClr val="accent1"/>
-                </a:solidFill>
-              </a:rPr>
-              <a:t> m</a:t>
-            </a:r>
-            <a:endParaRPr lang="en-US" sz="2600" dirty="0"/>
-          </a:p>
-        </p:txBody>
-      </p:sp>
-      <p:sp>
-        <p:nvSpPr>
-          <p:cNvPr id="23" name="stat label 6"/>
-          <p:cNvSpPr txBox="1"/>
-          <p:nvPr/>
-        </p:nvSpPr>
-        <p:spPr>
-          <a:xfrm>
-            <a:off x="10213848" y="4535424"/>
-            <a:ext cx="1371600" cy="365760"/>
-          </a:xfrm>
-          <a:prstGeom prst="rect">
-            <a:avLst/>
-          </a:prstGeom>
-          <a:noFill/>
-          <a:ln/>
-        </p:spPr>
-        <p:txBody>
-          <a:bodyPr wrap="square" lIns="0" tIns="0" rIns="0" bIns="0" rtlCol="0" anchor="t"/>
-          <a:lstStyle/>
+                  <a:schemeClr val="tx1"/>
+                </a:solidFill>
+              </a:rPr>
+              <a:t>保留珍貴樹木</a:t>
+            </a:r>
+            <a:endParaRPr lang="en-US" sz="1200" dirty="0"/>
+          </a:p>
           <a:p>
             <a:pPr indent="0" marL="0">
               <a:buNone/>
@@ -3746,217 +4105,7 @@
                   <a:schemeClr val="tx1"/>
                 </a:solidFill>
               </a:rPr>
-              <a:t>界石</a:t>
-            </a:r>
-            <a:endParaRPr lang="en-US" sz="1200" dirty="0"/>
-          </a:p>
-        </p:txBody>
-      </p:sp>
-      <p:sp>
-        <p:nvSpPr>
-          <p:cNvPr id="24" name="stat card 7"/>
-          <p:cNvSpPr/>
-          <p:nvPr/>
-        </p:nvSpPr>
-        <p:spPr>
-          <a:xfrm>
-            <a:off x="8412480" y="5157216"/>
-            <a:ext cx="1554480" cy="1115568"/>
-          </a:xfrm>
-          <a:prstGeom prst="roundRect">
-            <a:avLst>
-              <a:gd name="adj" fmla="val 6557"/>
-            </a:avLst>
-          </a:prstGeom>
-          <a:solidFill>
-            <a:schemeClr val="bg2"/>
-          </a:solidFill>
-          <a:ln/>
-        </p:spPr>
-      </p:sp>
-      <p:sp>
-        <p:nvSpPr>
-          <p:cNvPr id="25" name="stat value 7"/>
-          <p:cNvSpPr txBox="1"/>
-          <p:nvPr/>
-        </p:nvSpPr>
-        <p:spPr>
-          <a:xfrm>
-            <a:off x="8522208" y="5266944"/>
-            <a:ext cx="1371600" cy="502920"/>
-          </a:xfrm>
-          <a:prstGeom prst="rect">
-            <a:avLst/>
-          </a:prstGeom>
-          <a:noFill/>
-          <a:ln/>
-        </p:spPr>
-        <p:txBody>
-          <a:bodyPr wrap="square" lIns="0" tIns="0" rIns="0" bIns="0" rtlCol="0" anchor="ctr"/>
-          <a:lstStyle/>
-          <a:p>
-            <a:pPr indent="0" marL="0">
-              <a:buNone/>
-            </a:pPr>
-            <a:r>
-              <a:rPr lang="en-US" sz="2600" b="1" dirty="0">
-                <a:solidFill>
-                  <a:schemeClr val="accent1"/>
-                </a:solidFill>
-              </a:rPr>
-              <a:t>6</a:t>
-            </a:r>
-            <a:pPr indent="0" marL="0">
-              <a:buNone/>
-            </a:pPr>
-            <a:r>
-              <a:rPr lang="en-US" sz="1200" dirty="0">
-                <a:solidFill>
-                  <a:schemeClr val="accent1"/>
-                </a:solidFill>
-              </a:rPr>
-              <a:t> 組</a:t>
-            </a:r>
-            <a:endParaRPr lang="en-US" sz="2600" dirty="0"/>
-          </a:p>
-        </p:txBody>
-      </p:sp>
-      <p:sp>
-        <p:nvSpPr>
-          <p:cNvPr id="26" name="stat label 7"/>
-          <p:cNvSpPr txBox="1"/>
-          <p:nvPr/>
-        </p:nvSpPr>
-        <p:spPr>
-          <a:xfrm>
-            <a:off x="8522208" y="5797296"/>
-            <a:ext cx="1371600" cy="365760"/>
-          </a:xfrm>
-          <a:prstGeom prst="rect">
-            <a:avLst/>
-          </a:prstGeom>
-          <a:noFill/>
-          <a:ln/>
-        </p:spPr>
-        <p:txBody>
-          <a:bodyPr wrap="square" lIns="0" tIns="0" rIns="0" bIns="0" rtlCol="0" anchor="t"/>
-          <a:lstStyle/>
-          <a:p>
-            <a:pPr indent="0" marL="0">
-              <a:buNone/>
-            </a:pPr>
-            <a:r>
-              <a:rPr lang="en-US" sz="1200" dirty="0">
-                <a:solidFill>
-                  <a:schemeClr val="tx1"/>
-                </a:solidFill>
-              </a:rPr>
-              <a:t>體健設施新設/更新</a:t>
-            </a:r>
-            <a:endParaRPr lang="en-US" sz="1200" dirty="0"/>
-          </a:p>
-        </p:txBody>
-      </p:sp>
-      <p:sp>
-        <p:nvSpPr>
-          <p:cNvPr id="27" name="stat card 8"/>
-          <p:cNvSpPr/>
-          <p:nvPr/>
-        </p:nvSpPr>
-        <p:spPr>
-          <a:xfrm>
-            <a:off x="10104120" y="5157216"/>
-            <a:ext cx="1554480" cy="1115568"/>
-          </a:xfrm>
-          <a:prstGeom prst="roundRect">
-            <a:avLst>
-              <a:gd name="adj" fmla="val 6557"/>
-            </a:avLst>
-          </a:prstGeom>
-          <a:solidFill>
-            <a:schemeClr val="bg2"/>
-          </a:solidFill>
-          <a:ln/>
-        </p:spPr>
-      </p:sp>
-      <p:sp>
-        <p:nvSpPr>
-          <p:cNvPr id="28" name="stat value 8"/>
-          <p:cNvSpPr txBox="1"/>
-          <p:nvPr/>
-        </p:nvSpPr>
-        <p:spPr>
-          <a:xfrm>
-            <a:off x="10213848" y="5266944"/>
-            <a:ext cx="1371600" cy="502920"/>
-          </a:xfrm>
-          <a:prstGeom prst="rect">
-            <a:avLst/>
-          </a:prstGeom>
-          <a:noFill/>
-          <a:ln/>
-        </p:spPr>
-        <p:txBody>
-          <a:bodyPr wrap="square" lIns="0" tIns="0" rIns="0" bIns="0" rtlCol="0" anchor="ctr"/>
-          <a:lstStyle/>
-          <a:p>
-            <a:pPr indent="0" marL="0">
-              <a:buNone/>
-            </a:pPr>
-            <a:r>
-              <a:rPr lang="en-US" sz="2600" b="1" dirty="0">
-                <a:solidFill>
-                  <a:schemeClr val="accent1"/>
-                </a:solidFill>
-              </a:rPr>
-              <a:t>10</a:t>
-            </a:r>
-            <a:pPr indent="0" marL="0">
-              <a:buNone/>
-            </a:pPr>
-            <a:r>
-              <a:rPr lang="en-US" sz="1200" dirty="0">
-                <a:solidFill>
-                  <a:schemeClr val="accent1"/>
-                </a:solidFill>
-              </a:rPr>
-              <a:t> 座</a:t>
-            </a:r>
-            <a:endParaRPr lang="en-US" sz="2600" dirty="0"/>
-          </a:p>
-        </p:txBody>
-      </p:sp>
-      <p:sp>
-        <p:nvSpPr>
-          <p:cNvPr id="29" name="stat label 8"/>
-          <p:cNvSpPr txBox="1"/>
-          <p:nvPr/>
-        </p:nvSpPr>
-        <p:spPr>
-          <a:xfrm>
-            <a:off x="10213848" y="5797296"/>
-            <a:ext cx="1371600" cy="365760"/>
-          </a:xfrm>
-          <a:prstGeom prst="rect">
-            <a:avLst/>
-          </a:prstGeom>
-          <a:noFill/>
-          <a:ln/>
-        </p:spPr>
-        <p:txBody>
-          <a:bodyPr wrap="square" lIns="0" tIns="0" rIns="0" bIns="0" rtlCol="0" anchor="t"/>
-          <a:lstStyle/>
-          <a:p>
-            <a:pPr indent="0" marL="0">
-              <a:buNone/>
-            </a:pPr>
-            <a:r>
-              <a:rPr lang="en-US" sz="1200" dirty="0">
-                <a:solidFill>
-                  <a:schemeClr val="tx1"/>
-                </a:solidFill>
-              </a:rPr>
-              <a:t>既有座椅移置</a:t>
+              <a:t>榕樹(編號259)</a:t>
             </a:r>
             <a:endParaRPr lang="en-US" sz="1200" dirty="0"/>
           </a:p>
@@ -3992,7 +4141,7 @@
             <a:lvl1pPr>
               <a:defRPr sz="1000">
                 <a:solidFill>
-                  <a:schemeClr val="accent4"/>
+                  <a:schemeClr val="tx1"/>
                 </a:solidFill>
               </a:defRPr>
             </a:lvl1pPr>
@@ -4121,7 +4270,7 @@
             <a:r>
               <a:rPr lang="en-US" sz="1200" dirty="0">
                 <a:solidFill>
-                  <a:schemeClr val="accent4"/>
+                  <a:schemeClr val="tx1"/>
                 </a:solidFill>
               </a:rPr>
               <a:t>完工空拍</a:t>
@@ -4132,14 +4281,38 @@
       </p:sp>
       <p:sp>
         <p:nvSpPr>
-          <p:cNvPr id="5" name="works header"/>
-          <p:cNvSpPr txBox="1"/>
-          <p:nvPr/>
-        </p:nvSpPr>
-        <p:spPr>
-          <a:xfrm>
-            <a:off x="7955280" y="1371600"/>
-            <a:ext cx="3657600" cy="411480"/>
+          <p:cNvPr id="5" name="works card"/>
+          <p:cNvSpPr/>
+          <p:nvPr/>
+        </p:nvSpPr>
+        <p:spPr>
+          <a:xfrm>
+            <a:off x="7772400" y="1371600"/>
+            <a:ext cx="3840480" cy="3922776"/>
+          </a:xfrm>
+          <a:prstGeom prst="roundRect">
+            <a:avLst>
+              <a:gd name="adj" fmla="val 4762"/>
+            </a:avLst>
+          </a:prstGeom>
+          <a:solidFill>
+            <a:schemeClr val="accent4">
+              <a:alpha val="20000"/>
+            </a:schemeClr>
+          </a:solidFill>
+          <a:ln/>
+        </p:spPr>
+      </p:sp>
+      <p:sp>
+        <p:nvSpPr>
+          <p:cNvPr id="6" name="works header"/>
+          <p:cNvSpPr txBox="1"/>
+          <p:nvPr/>
+        </p:nvSpPr>
+        <p:spPr>
+          <a:xfrm>
+            <a:off x="8046720" y="1600200"/>
+            <a:ext cx="3383280" cy="411480"/>
           </a:xfrm>
           <a:prstGeom prst="rect">
             <a:avLst/>
@@ -4168,14 +4341,14 @@
       </p:sp>
       <p:sp>
         <p:nvSpPr>
-          <p:cNvPr id="6" name="num circle 1"/>
+          <p:cNvPr id="7" name="num circle 1"/>
           <p:cNvSpPr/>
           <p:nvPr/>
         </p:nvSpPr>
         <p:spPr>
           <a:xfrm>
-            <a:off x="7955280" y="1965960"/>
-            <a:ext cx="457200" cy="457200"/>
+            <a:off x="8046720" y="2103120"/>
+            <a:ext cx="420624" cy="420624"/>
           </a:xfrm>
           <a:prstGeom prst="ellipse">
             <a:avLst/>
@@ -4188,14 +4361,14 @@
       </p:sp>
       <p:sp>
         <p:nvSpPr>
-          <p:cNvPr id="7" name="num 1"/>
-          <p:cNvSpPr txBox="1"/>
-          <p:nvPr/>
-        </p:nvSpPr>
-        <p:spPr>
-          <a:xfrm>
-            <a:off x="7955280" y="1965960"/>
-            <a:ext cx="457200" cy="457200"/>
+          <p:cNvPr id="8" name="num 1"/>
+          <p:cNvSpPr txBox="1"/>
+          <p:nvPr/>
+        </p:nvSpPr>
+        <p:spPr>
+          <a:xfrm>
+            <a:off x="8046720" y="2103120"/>
+            <a:ext cx="420624" cy="420624"/>
           </a:xfrm>
           <a:prstGeom prst="rect">
             <a:avLst/>
@@ -4211,27 +4384,27 @@
               <a:buNone/>
             </a:pPr>
             <a:r>
-              <a:rPr lang="en-US" sz="1600" b="1" dirty="0">
-                <a:solidFill>
-                  <a:schemeClr val="bg1"/>
+              <a:rPr lang="en-US" sz="1500" b="1" dirty="0">
+                <a:solidFill>
+                  <a:schemeClr val="tx1"/>
                 </a:solidFill>
               </a:rPr>
               <a:t>1</a:t>
             </a:r>
-            <a:endParaRPr lang="en-US" sz="1600" dirty="0"/>
-          </a:p>
-        </p:txBody>
-      </p:sp>
-      <p:sp>
-        <p:nvSpPr>
-          <p:cNvPr id="8" name="work 1"/>
-          <p:cNvSpPr txBox="1"/>
-          <p:nvPr/>
-        </p:nvSpPr>
-        <p:spPr>
-          <a:xfrm>
-            <a:off x="8595360" y="1965960"/>
-            <a:ext cx="3108960" cy="457200"/>
+            <a:endParaRPr lang="en-US" sz="1500" dirty="0"/>
+          </a:p>
+        </p:txBody>
+      </p:sp>
+      <p:sp>
+        <p:nvSpPr>
+          <p:cNvPr id="9" name="work 1"/>
+          <p:cNvSpPr txBox="1"/>
+          <p:nvPr/>
+        </p:nvSpPr>
+        <p:spPr>
+          <a:xfrm>
+            <a:off x="8641080" y="2103120"/>
+            <a:ext cx="2880360" cy="420624"/>
           </a:xfrm>
           <a:prstGeom prst="rect">
             <a:avLst/>
@@ -4247,47 +4420,47 @@
               <a:buNone/>
             </a:pPr>
             <a:r>
-              <a:rPr lang="en-US" sz="1600" dirty="0">
+              <a:rPr lang="en-US" sz="1500" dirty="0">
                 <a:solidFill>
                   <a:schemeClr val="tx1"/>
                 </a:solidFill>
               </a:rPr>
               <a:t>排水改善</a:t>
             </a:r>
-            <a:endParaRPr lang="en-US" sz="1600" dirty="0"/>
-          </a:p>
-        </p:txBody>
-      </p:sp>
-      <p:sp>
-        <p:nvSpPr>
-          <p:cNvPr id="9" name="num circle 2"/>
+            <a:endParaRPr lang="en-US" sz="1500" dirty="0"/>
+          </a:p>
+        </p:txBody>
+      </p:sp>
+      <p:sp>
+        <p:nvSpPr>
+          <p:cNvPr id="10" name="num circle 2"/>
           <p:cNvSpPr/>
           <p:nvPr/>
         </p:nvSpPr>
         <p:spPr>
           <a:xfrm>
-            <a:off x="7955280" y="2679192"/>
-            <a:ext cx="457200" cy="457200"/>
+            <a:off x="8046720" y="2624328"/>
+            <a:ext cx="420624" cy="420624"/>
           </a:xfrm>
           <a:prstGeom prst="ellipse">
             <a:avLst/>
           </a:prstGeom>
           <a:solidFill>
-            <a:schemeClr val="accent1"/>
+            <a:schemeClr val="accent2"/>
           </a:solidFill>
           <a:ln/>
         </p:spPr>
       </p:sp>
       <p:sp>
         <p:nvSpPr>
-          <p:cNvPr id="10" name="num 2"/>
-          <p:cNvSpPr txBox="1"/>
-          <p:nvPr/>
-        </p:nvSpPr>
-        <p:spPr>
-          <a:xfrm>
-            <a:off x="7955280" y="2679192"/>
-            <a:ext cx="457200" cy="457200"/>
+          <p:cNvPr id="11" name="num 2"/>
+          <p:cNvSpPr txBox="1"/>
+          <p:nvPr/>
+        </p:nvSpPr>
+        <p:spPr>
+          <a:xfrm>
+            <a:off x="8046720" y="2624328"/>
+            <a:ext cx="420624" cy="420624"/>
           </a:xfrm>
           <a:prstGeom prst="rect">
             <a:avLst/>
@@ -4303,27 +4476,27 @@
               <a:buNone/>
             </a:pPr>
             <a:r>
-              <a:rPr lang="en-US" sz="1600" b="1" dirty="0">
-                <a:solidFill>
-                  <a:schemeClr val="bg1"/>
+              <a:rPr lang="en-US" sz="1500" b="1" dirty="0">
+                <a:solidFill>
+                  <a:schemeClr val="tx1"/>
                 </a:solidFill>
               </a:rPr>
               <a:t>2</a:t>
             </a:r>
-            <a:endParaRPr lang="en-US" sz="1600" dirty="0"/>
-          </a:p>
-        </p:txBody>
-      </p:sp>
-      <p:sp>
-        <p:nvSpPr>
-          <p:cNvPr id="11" name="work 2"/>
-          <p:cNvSpPr txBox="1"/>
-          <p:nvPr/>
-        </p:nvSpPr>
-        <p:spPr>
-          <a:xfrm>
-            <a:off x="8595360" y="2679192"/>
-            <a:ext cx="3108960" cy="457200"/>
+            <a:endParaRPr lang="en-US" sz="1500" dirty="0"/>
+          </a:p>
+        </p:txBody>
+      </p:sp>
+      <p:sp>
+        <p:nvSpPr>
+          <p:cNvPr id="12" name="work 2"/>
+          <p:cNvSpPr txBox="1"/>
+          <p:nvPr/>
+        </p:nvSpPr>
+        <p:spPr>
+          <a:xfrm>
+            <a:off x="8641080" y="2624328"/>
+            <a:ext cx="2880360" cy="420624"/>
           </a:xfrm>
           <a:prstGeom prst="rect">
             <a:avLst/>
@@ -4339,47 +4512,47 @@
               <a:buNone/>
             </a:pPr>
             <a:r>
-              <a:rPr lang="en-US" sz="1600" dirty="0">
+              <a:rPr lang="en-US" sz="1500" dirty="0">
                 <a:solidFill>
                   <a:schemeClr val="tx1"/>
                 </a:solidFill>
               </a:rPr>
               <a:t>新設休憩廣場</a:t>
             </a:r>
-            <a:endParaRPr lang="en-US" sz="1600" dirty="0"/>
-          </a:p>
-        </p:txBody>
-      </p:sp>
-      <p:sp>
-        <p:nvSpPr>
-          <p:cNvPr id="12" name="num circle 3"/>
+            <a:endParaRPr lang="en-US" sz="1500" dirty="0"/>
+          </a:p>
+        </p:txBody>
+      </p:sp>
+      <p:sp>
+        <p:nvSpPr>
+          <p:cNvPr id="13" name="num circle 3"/>
           <p:cNvSpPr/>
           <p:nvPr/>
         </p:nvSpPr>
         <p:spPr>
           <a:xfrm>
-            <a:off x="7955280" y="3392424"/>
-            <a:ext cx="457200" cy="457200"/>
+            <a:off x="8046720" y="3145536"/>
+            <a:ext cx="420624" cy="420624"/>
           </a:xfrm>
           <a:prstGeom prst="ellipse">
             <a:avLst/>
           </a:prstGeom>
           <a:solidFill>
-            <a:schemeClr val="accent1"/>
+            <a:schemeClr val="accent3"/>
           </a:solidFill>
           <a:ln/>
         </p:spPr>
       </p:sp>
       <p:sp>
         <p:nvSpPr>
-          <p:cNvPr id="13" name="num 3"/>
-          <p:cNvSpPr txBox="1"/>
-          <p:nvPr/>
-        </p:nvSpPr>
-        <p:spPr>
-          <a:xfrm>
-            <a:off x="7955280" y="3392424"/>
-            <a:ext cx="457200" cy="457200"/>
+          <p:cNvPr id="14" name="num 3"/>
+          <p:cNvSpPr txBox="1"/>
+          <p:nvPr/>
+        </p:nvSpPr>
+        <p:spPr>
+          <a:xfrm>
+            <a:off x="8046720" y="3145536"/>
+            <a:ext cx="420624" cy="420624"/>
           </a:xfrm>
           <a:prstGeom prst="rect">
             <a:avLst/>
@@ -4395,27 +4568,27 @@
               <a:buNone/>
             </a:pPr>
             <a:r>
-              <a:rPr lang="en-US" sz="1600" b="1" dirty="0">
-                <a:solidFill>
-                  <a:schemeClr val="bg1"/>
+              <a:rPr lang="en-US" sz="1500" b="1" dirty="0">
+                <a:solidFill>
+                  <a:schemeClr val="tx1"/>
                 </a:solidFill>
               </a:rPr>
               <a:t>3</a:t>
             </a:r>
-            <a:endParaRPr lang="en-US" sz="1600" dirty="0"/>
-          </a:p>
-        </p:txBody>
-      </p:sp>
-      <p:sp>
-        <p:nvSpPr>
-          <p:cNvPr id="14" name="work 3"/>
-          <p:cNvSpPr txBox="1"/>
-          <p:nvPr/>
-        </p:nvSpPr>
-        <p:spPr>
-          <a:xfrm>
-            <a:off x="8595360" y="3392424"/>
-            <a:ext cx="3108960" cy="457200"/>
+            <a:endParaRPr lang="en-US" sz="1500" dirty="0"/>
+          </a:p>
+        </p:txBody>
+      </p:sp>
+      <p:sp>
+        <p:nvSpPr>
+          <p:cNvPr id="15" name="work 3"/>
+          <p:cNvSpPr txBox="1"/>
+          <p:nvPr/>
+        </p:nvSpPr>
+        <p:spPr>
+          <a:xfrm>
+            <a:off x="8641080" y="3145536"/>
+            <a:ext cx="2880360" cy="420624"/>
           </a:xfrm>
           <a:prstGeom prst="rect">
             <a:avLst/>
@@ -4431,47 +4604,47 @@
               <a:buNone/>
             </a:pPr>
             <a:r>
-              <a:rPr lang="en-US" sz="1600" dirty="0">
+              <a:rPr lang="en-US" sz="1500" dirty="0">
                 <a:solidFill>
                   <a:schemeClr val="tx1"/>
                 </a:solidFill>
               </a:rPr>
               <a:t>增設園內人行步道</a:t>
             </a:r>
-            <a:endParaRPr lang="en-US" sz="1600" dirty="0"/>
-          </a:p>
-        </p:txBody>
-      </p:sp>
-      <p:sp>
-        <p:nvSpPr>
-          <p:cNvPr id="15" name="num circle 4"/>
+            <a:endParaRPr lang="en-US" sz="1500" dirty="0"/>
+          </a:p>
+        </p:txBody>
+      </p:sp>
+      <p:sp>
+        <p:nvSpPr>
+          <p:cNvPr id="16" name="num circle 4"/>
           <p:cNvSpPr/>
           <p:nvPr/>
         </p:nvSpPr>
         <p:spPr>
           <a:xfrm>
-            <a:off x="7955280" y="4105656"/>
-            <a:ext cx="457200" cy="457200"/>
+            <a:off x="8046720" y="3666744"/>
+            <a:ext cx="420624" cy="420624"/>
           </a:xfrm>
           <a:prstGeom prst="ellipse">
             <a:avLst/>
           </a:prstGeom>
           <a:solidFill>
-            <a:schemeClr val="accent1"/>
+            <a:schemeClr val="accent4"/>
           </a:solidFill>
           <a:ln/>
         </p:spPr>
       </p:sp>
       <p:sp>
         <p:nvSpPr>
-          <p:cNvPr id="16" name="num 4"/>
-          <p:cNvSpPr txBox="1"/>
-          <p:nvPr/>
-        </p:nvSpPr>
-        <p:spPr>
-          <a:xfrm>
-            <a:off x="7955280" y="4105656"/>
-            <a:ext cx="457200" cy="457200"/>
+          <p:cNvPr id="17" name="num 4"/>
+          <p:cNvSpPr txBox="1"/>
+          <p:nvPr/>
+        </p:nvSpPr>
+        <p:spPr>
+          <a:xfrm>
+            <a:off x="8046720" y="3666744"/>
+            <a:ext cx="420624" cy="420624"/>
           </a:xfrm>
           <a:prstGeom prst="rect">
             <a:avLst/>
@@ -4487,27 +4660,27 @@
               <a:buNone/>
             </a:pPr>
             <a:r>
-              <a:rPr lang="en-US" sz="1600" b="1" dirty="0">
-                <a:solidFill>
-                  <a:schemeClr val="bg1"/>
+              <a:rPr lang="en-US" sz="1500" b="1" dirty="0">
+                <a:solidFill>
+                  <a:schemeClr val="tx1"/>
                 </a:solidFill>
               </a:rPr>
               <a:t>4</a:t>
             </a:r>
-            <a:endParaRPr lang="en-US" sz="1600" dirty="0"/>
-          </a:p>
-        </p:txBody>
-      </p:sp>
-      <p:sp>
-        <p:nvSpPr>
-          <p:cNvPr id="17" name="work 4"/>
-          <p:cNvSpPr txBox="1"/>
-          <p:nvPr/>
-        </p:nvSpPr>
-        <p:spPr>
-          <a:xfrm>
-            <a:off x="8595360" y="4105656"/>
-            <a:ext cx="3108960" cy="457200"/>
+            <a:endParaRPr lang="en-US" sz="1500" dirty="0"/>
+          </a:p>
+        </p:txBody>
+      </p:sp>
+      <p:sp>
+        <p:nvSpPr>
+          <p:cNvPr id="18" name="work 4"/>
+          <p:cNvSpPr txBox="1"/>
+          <p:nvPr/>
+        </p:nvSpPr>
+        <p:spPr>
+          <a:xfrm>
+            <a:off x="8641080" y="3666744"/>
+            <a:ext cx="2880360" cy="420624"/>
           </a:xfrm>
           <a:prstGeom prst="rect">
             <a:avLst/>
@@ -4523,14 +4696,198 @@
               <a:buNone/>
             </a:pPr>
             <a:r>
-              <a:rPr lang="en-US" sz="1600" dirty="0">
+              <a:rPr lang="en-US" sz="1500" dirty="0">
                 <a:solidFill>
                   <a:schemeClr val="tx1"/>
                 </a:solidFill>
               </a:rPr>
               <a:t>既有綠地整地鋪設草皮</a:t>
             </a:r>
-            <a:endParaRPr lang="en-US" sz="1600" dirty="0"/>
+            <a:endParaRPr lang="en-US" sz="1500" dirty="0"/>
+          </a:p>
+        </p:txBody>
+      </p:sp>
+      <p:sp>
+        <p:nvSpPr>
+          <p:cNvPr id="19" name="num circle 5"/>
+          <p:cNvSpPr/>
+          <p:nvPr/>
+        </p:nvSpPr>
+        <p:spPr>
+          <a:xfrm>
+            <a:off x="8046720" y="4187952"/>
+            <a:ext cx="420624" cy="420624"/>
+          </a:xfrm>
+          <a:prstGeom prst="ellipse">
+            <a:avLst/>
+          </a:prstGeom>
+          <a:solidFill>
+            <a:schemeClr val="accent5"/>
+          </a:solidFill>
+          <a:ln/>
+        </p:spPr>
+      </p:sp>
+      <p:sp>
+        <p:nvSpPr>
+          <p:cNvPr id="20" name="num 5"/>
+          <p:cNvSpPr txBox="1"/>
+          <p:nvPr/>
+        </p:nvSpPr>
+        <p:spPr>
+          <a:xfrm>
+            <a:off x="8046720" y="4187952"/>
+            <a:ext cx="420624" cy="420624"/>
+          </a:xfrm>
+          <a:prstGeom prst="rect">
+            <a:avLst/>
+          </a:prstGeom>
+          <a:noFill/>
+          <a:ln/>
+        </p:spPr>
+        <p:txBody>
+          <a:bodyPr wrap="square" lIns="0" tIns="0" rIns="0" bIns="0" rtlCol="0" anchor="ctr"/>
+          <a:lstStyle/>
+          <a:p>
+            <a:pPr algn="ctr" indent="0" marL="0">
+              <a:buNone/>
+            </a:pPr>
+            <a:r>
+              <a:rPr lang="en-US" sz="1500" b="1" dirty="0">
+                <a:solidFill>
+                  <a:schemeClr val="tx1"/>
+                </a:solidFill>
+              </a:rPr>
+              <a:t>5</a:t>
+            </a:r>
+            <a:endParaRPr lang="en-US" sz="1500" dirty="0"/>
+          </a:p>
+        </p:txBody>
+      </p:sp>
+      <p:sp>
+        <p:nvSpPr>
+          <p:cNvPr id="21" name="work 5"/>
+          <p:cNvSpPr txBox="1"/>
+          <p:nvPr/>
+        </p:nvSpPr>
+        <p:spPr>
+          <a:xfrm>
+            <a:off x="8641080" y="4187952"/>
+            <a:ext cx="2880360" cy="420624"/>
+          </a:xfrm>
+          <a:prstGeom prst="rect">
+            <a:avLst/>
+          </a:prstGeom>
+          <a:noFill/>
+          <a:ln/>
+        </p:spPr>
+        <p:txBody>
+          <a:bodyPr wrap="square" lIns="0" tIns="0" rIns="0" bIns="0" rtlCol="0" anchor="ctr"/>
+          <a:lstStyle/>
+          <a:p>
+            <a:pPr indent="0" marL="0">
+              <a:buNone/>
+            </a:pPr>
+            <a:r>
+              <a:rPr lang="en-US" sz="1500" dirty="0">
+                <a:solidFill>
+                  <a:schemeClr val="tx1"/>
+                </a:solidFill>
+              </a:rPr>
+              <a:t>新植喬木、設置造型座椅</a:t>
+            </a:r>
+            <a:endParaRPr lang="en-US" sz="1500" dirty="0"/>
+          </a:p>
+        </p:txBody>
+      </p:sp>
+      <p:sp>
+        <p:nvSpPr>
+          <p:cNvPr id="22" name="num circle 6"/>
+          <p:cNvSpPr/>
+          <p:nvPr/>
+        </p:nvSpPr>
+        <p:spPr>
+          <a:xfrm>
+            <a:off x="8046720" y="4709160"/>
+            <a:ext cx="420624" cy="420624"/>
+          </a:xfrm>
+          <a:prstGeom prst="ellipse">
+            <a:avLst/>
+          </a:prstGeom>
+          <a:solidFill>
+            <a:schemeClr val="accent6"/>
+          </a:solidFill>
+          <a:ln/>
+        </p:spPr>
+      </p:sp>
+      <p:sp>
+        <p:nvSpPr>
+          <p:cNvPr id="23" name="num 6"/>
+          <p:cNvSpPr txBox="1"/>
+          <p:nvPr/>
+        </p:nvSpPr>
+        <p:spPr>
+          <a:xfrm>
+            <a:off x="8046720" y="4709160"/>
+            <a:ext cx="420624" cy="420624"/>
+          </a:xfrm>
+          <a:prstGeom prst="rect">
+            <a:avLst/>
+          </a:prstGeom>
+          <a:noFill/>
+          <a:ln/>
+        </p:spPr>
+        <p:txBody>
+          <a:bodyPr wrap="square" lIns="0" tIns="0" rIns="0" bIns="0" rtlCol="0" anchor="ctr"/>
+          <a:lstStyle/>
+          <a:p>
+            <a:pPr algn="ctr" indent="0" marL="0">
+              <a:buNone/>
+            </a:pPr>
+            <a:r>
+              <a:rPr lang="en-US" sz="1500" b="1" dirty="0">
+                <a:solidFill>
+                  <a:schemeClr val="tx1"/>
+                </a:solidFill>
+              </a:rPr>
+              <a:t>6</a:t>
+            </a:r>
+            <a:endParaRPr lang="en-US" sz="1500" dirty="0"/>
+          </a:p>
+        </p:txBody>
+      </p:sp>
+      <p:sp>
+        <p:nvSpPr>
+          <p:cNvPr id="24" name="work 6"/>
+          <p:cNvSpPr txBox="1"/>
+          <p:nvPr/>
+        </p:nvSpPr>
+        <p:spPr>
+          <a:xfrm>
+            <a:off x="8641080" y="4709160"/>
+            <a:ext cx="2880360" cy="420624"/>
+          </a:xfrm>
+          <a:prstGeom prst="rect">
+            <a:avLst/>
+          </a:prstGeom>
+          <a:noFill/>
+          <a:ln/>
+        </p:spPr>
+        <p:txBody>
+          <a:bodyPr wrap="square" lIns="0" tIns="0" rIns="0" bIns="0" rtlCol="0" anchor="ctr"/>
+          <a:lstStyle/>
+          <a:p>
+            <a:pPr indent="0" marL="0">
+              <a:buNone/>
+            </a:pPr>
+            <a:r>
+              <a:rPr lang="en-US" sz="1500" dirty="0">
+                <a:solidFill>
+                  <a:schemeClr val="tx1"/>
+                </a:solidFill>
+              </a:rPr>
+              <a:t>汲水設施改設造型花台</a:t>
+            </a:r>
+            <a:endParaRPr lang="en-US" sz="1500" dirty="0"/>
           </a:p>
         </p:txBody>
       </p:sp>
@@ -4564,7 +4921,7 @@
             <a:lvl1pPr>
               <a:defRPr sz="1000">
                 <a:solidFill>
-                  <a:schemeClr val="accent4"/>
+                  <a:schemeClr val="tx1"/>
                 </a:solidFill>
               </a:defRPr>
             </a:lvl1pPr>
@@ -4636,7 +4993,7 @@
                   <a:schemeClr val="tx2"/>
                 </a:solidFill>
               </a:rPr>
-              <a:t>工區二 兒一公園｜平面配置與施作數量</a:t>
+              <a:t>工區二 兒一公園｜平面配置與施作項目</a:t>
             </a:r>
             <a:endParaRPr lang="en-US" sz="3200" dirty="0"/>
           </a:p>
@@ -4651,25 +5008,63 @@
         <p:spPr>
           <a:xfrm>
             <a:off x="548640" y="1371600"/>
-            <a:ext cx="7498080" cy="4846320"/>
-          </a:xfrm>
-          <a:prstGeom prst="rect">
-            <a:avLst/>
+            <a:ext cx="7680960" cy="4846320"/>
+          </a:xfrm>
+          <a:prstGeom prst="roundRect">
+            <a:avLst>
+              <a:gd name="adj" fmla="val 2830"/>
+            </a:avLst>
           </a:prstGeom>
           <a:solidFill>
             <a:schemeClr val="bg1"/>
           </a:solidFill>
-          <a:ln w="12700">
+          <a:ln w="19050">
             <a:solidFill>
-              <a:schemeClr val="accent5"/>
+              <a:schemeClr val="accent4"/>
             </a:solidFill>
             <a:prstDash val="solid"/>
           </a:ln>
         </p:spPr>
       </p:sp>
+      <p:sp>
+        <p:nvSpPr>
+          <p:cNvPr id="4" name="plan caption"/>
+          <p:cNvSpPr txBox="1"/>
+          <p:nvPr/>
+        </p:nvSpPr>
+        <p:spPr>
+          <a:xfrm>
+            <a:off x="731520" y="1481328"/>
+            <a:ext cx="3657600" cy="320040"/>
+          </a:xfrm>
+          <a:prstGeom prst="rect">
+            <a:avLst/>
+          </a:prstGeom>
+          <a:noFill/>
+          <a:ln/>
+        </p:spPr>
+        <p:txBody>
+          <a:bodyPr wrap="square" lIns="0" tIns="0" rIns="0" bIns="0" rtlCol="0" anchor="ctr"/>
+          <a:lstStyle/>
+          <a:p>
+            <a:pPr indent="0" marL="0">
+              <a:buNone/>
+            </a:pPr>
+            <a:r>
+              <a:rPr lang="en-US" sz="1200" b="1" dirty="0">
+                <a:solidFill>
+                  <a:schemeClr val="tx2"/>
+                </a:solidFill>
+              </a:rPr>
+              <a:t>平面配置圖（修正版）</a:t>
+            </a:r>
+            <a:endParaRPr lang="en-US" sz="1200" dirty="0"/>
+          </a:p>
+        </p:txBody>
+      </p:sp>
       <p:pic>
         <p:nvPicPr>
-          <p:cNvPr id="4" name="plan drawing" descr="/tmp/claude-0/-home-user-WORK/17061699-df28-586b-9ead-2ea441853089/scratchpad/img/d-2-plan.jpg">    </p:cNvPr>
+          <p:cNvPr id="5" name="plan drawing" descr="/tmp/claude-0/-home-user-WORK/17061699-df28-586b-9ead-2ea441853089/scratchpad/img/rev-2-plan.png">    </p:cNvPr>
           <p:cNvPicPr>
             <a:picLocks noChangeAspect="1"/>
           </p:cNvPicPr>
@@ -4683,50 +5078,14 @@
         </p:blipFill>
         <p:spPr>
           <a:xfrm>
-            <a:off x="640080" y="2194560"/>
-            <a:ext cx="7315200" cy="3310128"/>
+            <a:off x="685800" y="2531362"/>
+            <a:ext cx="7406640" cy="2846836"/>
           </a:xfrm>
           <a:prstGeom prst="rect">
             <a:avLst/>
           </a:prstGeom>
         </p:spPr>
       </p:pic>
-      <p:sp>
-        <p:nvSpPr>
-          <p:cNvPr id="5" name="plan caption"/>
-          <p:cNvSpPr txBox="1"/>
-          <p:nvPr/>
-        </p:nvSpPr>
-        <p:spPr>
-          <a:xfrm>
-            <a:off x="685800" y="1463040"/>
-            <a:ext cx="3657600" cy="320040"/>
-          </a:xfrm>
-          <a:prstGeom prst="rect">
-            <a:avLst/>
-          </a:prstGeom>
-          <a:noFill/>
-          <a:ln/>
-        </p:spPr>
-        <p:txBody>
-          <a:bodyPr wrap="square" lIns="0" tIns="0" rIns="0" bIns="0" rtlCol="0" anchor="ctr"/>
-          <a:lstStyle/>
-          <a:p>
-            <a:pPr indent="0" marL="0">
-              <a:buNone/>
-            </a:pPr>
-            <a:r>
-              <a:rPr lang="en-US" sz="1200" dirty="0">
-                <a:solidFill>
-                  <a:schemeClr val="accent4"/>
-                </a:solidFill>
-              </a:rPr>
-              <a:t>平面配置示意圖</a:t>
-            </a:r>
-            <a:endParaRPr lang="en-US" sz="1200" dirty="0"/>
-          </a:p>
-        </p:txBody>
-      </p:sp>
       <p:sp>
         <p:nvSpPr>
           <p:cNvPr id="6" name="stat card 1"/>
@@ -4735,16 +5094,18 @@
         </p:nvSpPr>
         <p:spPr>
           <a:xfrm>
-            <a:off x="8412480" y="1371600"/>
-            <a:ext cx="1554480" cy="1115568"/>
+            <a:off x="8503920" y="1371600"/>
+            <a:ext cx="1463040" cy="1481328"/>
           </a:xfrm>
           <a:prstGeom prst="roundRect">
             <a:avLst>
-              <a:gd name="adj" fmla="val 6557"/>
+              <a:gd name="adj" fmla="val 9375"/>
             </a:avLst>
           </a:prstGeom>
           <a:solidFill>
-            <a:schemeClr val="bg2"/>
+            <a:schemeClr val="accent4">
+              <a:alpha val="35000"/>
+            </a:schemeClr>
           </a:solidFill>
           <a:ln/>
         </p:spPr>
@@ -4757,8 +5118,8 @@
         </p:nvSpPr>
         <p:spPr>
           <a:xfrm>
-            <a:off x="8522208" y="1481328"/>
-            <a:ext cx="1371600" cy="502920"/>
+            <a:off x="8641080" y="1536192"/>
+            <a:ext cx="1234440" cy="548640"/>
           </a:xfrm>
           <a:prstGeom prst="rect">
             <a:avLst/>
@@ -4774,48 +5135,62 @@
               <a:buNone/>
             </a:pPr>
             <a:r>
-              <a:rPr lang="en-US" sz="2600" b="1" dirty="0">
-                <a:solidFill>
-                  <a:schemeClr val="accent1"/>
-                </a:solidFill>
-              </a:rPr>
-              <a:t>114</a:t>
+              <a:rPr lang="en-US" sz="3000" b="1" dirty="0">
+                <a:solidFill>
+                  <a:schemeClr val="tx2"/>
+                </a:solidFill>
+              </a:rPr>
+              <a:t>4</a:t>
             </a:r>
             <a:pPr indent="0" marL="0">
               <a:buNone/>
             </a:pPr>
             <a:r>
+              <a:rPr lang="en-US" sz="1300" dirty="0">
+                <a:solidFill>
+                  <a:schemeClr val="tx2"/>
+                </a:solidFill>
+              </a:rPr>
+              <a:t> 株</a:t>
+            </a:r>
+            <a:endParaRPr lang="en-US" sz="3000" dirty="0"/>
+          </a:p>
+        </p:txBody>
+      </p:sp>
+      <p:sp>
+        <p:nvSpPr>
+          <p:cNvPr id="8" name="stat label 1"/>
+          <p:cNvSpPr txBox="1"/>
+          <p:nvPr/>
+        </p:nvSpPr>
+        <p:spPr>
+          <a:xfrm>
+            <a:off x="8641080" y="2148840"/>
+            <a:ext cx="1234440" cy="594360"/>
+          </a:xfrm>
+          <a:prstGeom prst="rect">
+            <a:avLst/>
+          </a:prstGeom>
+          <a:noFill/>
+          <a:ln/>
+        </p:spPr>
+        <p:txBody>
+          <a:bodyPr wrap="square" lIns="0" tIns="0" rIns="0" bIns="0" rtlCol="0" anchor="t"/>
+          <a:lstStyle/>
+          <a:p>
+            <a:pPr indent="0" marL="0">
+              <a:buNone/>
+            </a:pPr>
+            <a:r>
               <a:rPr lang="en-US" sz="1200" dirty="0">
                 <a:solidFill>
-                  <a:schemeClr val="accent1"/>
-                </a:solidFill>
-              </a:rPr>
-              <a:t> m²</a:t>
-            </a:r>
-            <a:endParaRPr lang="en-US" sz="2600" dirty="0"/>
-          </a:p>
-        </p:txBody>
-      </p:sp>
-      <p:sp>
-        <p:nvSpPr>
-          <p:cNvPr id="8" name="stat label 1"/>
-          <p:cNvSpPr txBox="1"/>
-          <p:nvPr/>
-        </p:nvSpPr>
-        <p:spPr>
-          <a:xfrm>
-            <a:off x="8522208" y="2011680"/>
-            <a:ext cx="1371600" cy="365760"/>
-          </a:xfrm>
-          <a:prstGeom prst="rect">
-            <a:avLst/>
-          </a:prstGeom>
-          <a:noFill/>
-          <a:ln/>
-        </p:spPr>
-        <p:txBody>
-          <a:bodyPr wrap="square" lIns="0" tIns="0" rIns="0" bIns="0" rtlCol="0" anchor="t"/>
-          <a:lstStyle/>
+                  <a:schemeClr val="tx1"/>
+                </a:solidFill>
+              </a:rPr>
+              <a:t>新植喬木</a:t>
+            </a:r>
+            <a:endParaRPr lang="en-US" sz="1200" dirty="0"/>
+          </a:p>
           <a:p>
             <a:pPr indent="0" marL="0">
               <a:buNone/>
@@ -4826,7 +5201,7 @@
                   <a:schemeClr val="tx1"/>
                 </a:solidFill>
               </a:rPr>
-              <a:t>噴花地坪</a:t>
+              <a:t>緬梔1、光臘樹3</a:t>
             </a:r>
             <a:endParaRPr lang="en-US" sz="1200" dirty="0"/>
           </a:p>
@@ -4841,15 +5216,17 @@
         <p:spPr>
           <a:xfrm>
             <a:off x="10104120" y="1371600"/>
-            <a:ext cx="1554480" cy="1115568"/>
+            <a:ext cx="1463040" cy="1481328"/>
           </a:xfrm>
           <a:prstGeom prst="roundRect">
             <a:avLst>
-              <a:gd name="adj" fmla="val 6557"/>
+              <a:gd name="adj" fmla="val 9375"/>
             </a:avLst>
           </a:prstGeom>
           <a:solidFill>
-            <a:schemeClr val="bg2"/>
+            <a:schemeClr val="accent5">
+              <a:alpha val="35000"/>
+            </a:schemeClr>
           </a:solidFill>
           <a:ln/>
         </p:spPr>
@@ -4862,8 +5239,8 @@
         </p:nvSpPr>
         <p:spPr>
           <a:xfrm>
-            <a:off x="10213848" y="1481328"/>
-            <a:ext cx="1371600" cy="502920"/>
+            <a:off x="10241280" y="1536192"/>
+            <a:ext cx="1234440" cy="548640"/>
           </a:xfrm>
           <a:prstGeom prst="rect">
             <a:avLst/>
@@ -4879,59 +5256,59 @@
               <a:buNone/>
             </a:pPr>
             <a:r>
-              <a:rPr lang="en-US" sz="2600" b="1" dirty="0">
-                <a:solidFill>
-                  <a:schemeClr val="accent1"/>
-                </a:solidFill>
-              </a:rPr>
-              <a:t>100.1</a:t>
+              <a:rPr lang="en-US" sz="3000" b="1" dirty="0">
+                <a:solidFill>
+                  <a:schemeClr val="tx2"/>
+                </a:solidFill>
+              </a:rPr>
+              <a:t>1</a:t>
             </a:r>
             <a:pPr indent="0" marL="0">
               <a:buNone/>
             </a:pPr>
             <a:r>
+              <a:rPr lang="en-US" sz="1300" dirty="0">
+                <a:solidFill>
+                  <a:schemeClr val="tx2"/>
+                </a:solidFill>
+              </a:rPr>
+              <a:t> 組</a:t>
+            </a:r>
+            <a:endParaRPr lang="en-US" sz="3000" dirty="0"/>
+          </a:p>
+        </p:txBody>
+      </p:sp>
+      <p:sp>
+        <p:nvSpPr>
+          <p:cNvPr id="11" name="stat label 2"/>
+          <p:cNvSpPr txBox="1"/>
+          <p:nvPr/>
+        </p:nvSpPr>
+        <p:spPr>
+          <a:xfrm>
+            <a:off x="10241280" y="2148840"/>
+            <a:ext cx="1234440" cy="594360"/>
+          </a:xfrm>
+          <a:prstGeom prst="rect">
+            <a:avLst/>
+          </a:prstGeom>
+          <a:noFill/>
+          <a:ln/>
+        </p:spPr>
+        <p:txBody>
+          <a:bodyPr wrap="square" lIns="0" tIns="0" rIns="0" bIns="0" rtlCol="0" anchor="t"/>
+          <a:lstStyle/>
+          <a:p>
+            <a:pPr indent="0" marL="0">
+              <a:buNone/>
+            </a:pPr>
+            <a:r>
               <a:rPr lang="en-US" sz="1200" dirty="0">
                 <a:solidFill>
-                  <a:schemeClr val="accent1"/>
-                </a:solidFill>
-              </a:rPr>
-              <a:t> m²</a:t>
-            </a:r>
-            <a:endParaRPr lang="en-US" sz="2600" dirty="0"/>
-          </a:p>
-        </p:txBody>
-      </p:sp>
-      <p:sp>
-        <p:nvSpPr>
-          <p:cNvPr id="11" name="stat label 2"/>
-          <p:cNvSpPr txBox="1"/>
-          <p:nvPr/>
-        </p:nvSpPr>
-        <p:spPr>
-          <a:xfrm>
-            <a:off x="10213848" y="2011680"/>
-            <a:ext cx="1371600" cy="365760"/>
-          </a:xfrm>
-          <a:prstGeom prst="rect">
-            <a:avLst/>
-          </a:prstGeom>
-          <a:noFill/>
-          <a:ln/>
-        </p:spPr>
-        <p:txBody>
-          <a:bodyPr wrap="square" lIns="0" tIns="0" rIns="0" bIns="0" rtlCol="0" anchor="t"/>
-          <a:lstStyle/>
-          <a:p>
-            <a:pPr indent="0" marL="0">
-              <a:buNone/>
-            </a:pPr>
-            <a:r>
-              <a:rPr lang="en-US" sz="1200" dirty="0">
-                <a:solidFill>
                   <a:schemeClr val="tx1"/>
                 </a:solidFill>
               </a:rPr>
-              <a:t>混凝土地坪</a:t>
+              <a:t>新設造型座椅</a:t>
             </a:r>
             <a:endParaRPr lang="en-US" sz="1200" dirty="0"/>
           </a:p>
@@ -4945,16 +5322,18 @@
         </p:nvSpPr>
         <p:spPr>
           <a:xfrm>
-            <a:off x="8412480" y="2633472"/>
-            <a:ext cx="1554480" cy="1115568"/>
+            <a:off x="8503920" y="3035808"/>
+            <a:ext cx="1463040" cy="1481328"/>
           </a:xfrm>
           <a:prstGeom prst="roundRect">
             <a:avLst>
-              <a:gd name="adj" fmla="val 6557"/>
+              <a:gd name="adj" fmla="val 9375"/>
             </a:avLst>
           </a:prstGeom>
           <a:solidFill>
-            <a:schemeClr val="bg2"/>
+            <a:schemeClr val="accent6">
+              <a:alpha val="35000"/>
+            </a:schemeClr>
           </a:solidFill>
           <a:ln/>
         </p:spPr>
@@ -4967,8 +5346,8 @@
         </p:nvSpPr>
         <p:spPr>
           <a:xfrm>
-            <a:off x="8522208" y="2743200"/>
-            <a:ext cx="1371600" cy="502920"/>
+            <a:off x="8641080" y="3200400"/>
+            <a:ext cx="1234440" cy="548640"/>
           </a:xfrm>
           <a:prstGeom prst="rect">
             <a:avLst/>
@@ -4984,59 +5363,59 @@
               <a:buNone/>
             </a:pPr>
             <a:r>
-              <a:rPr lang="en-US" sz="2600" b="1" dirty="0">
-                <a:solidFill>
-                  <a:schemeClr val="accent1"/>
-                </a:solidFill>
-              </a:rPr>
-              <a:t>121.9</a:t>
+              <a:rPr lang="en-US" sz="3000" b="1" dirty="0">
+                <a:solidFill>
+                  <a:schemeClr val="tx2"/>
+                </a:solidFill>
+              </a:rPr>
+              <a:t>1</a:t>
             </a:r>
             <a:pPr indent="0" marL="0">
               <a:buNone/>
             </a:pPr>
             <a:r>
+              <a:rPr lang="en-US" sz="1300" dirty="0">
+                <a:solidFill>
+                  <a:schemeClr val="tx2"/>
+                </a:solidFill>
+              </a:rPr>
+              <a:t> 座</a:t>
+            </a:r>
+            <a:endParaRPr lang="en-US" sz="3000" dirty="0"/>
+          </a:p>
+        </p:txBody>
+      </p:sp>
+      <p:sp>
+        <p:nvSpPr>
+          <p:cNvPr id="14" name="stat label 3"/>
+          <p:cNvSpPr txBox="1"/>
+          <p:nvPr/>
+        </p:nvSpPr>
+        <p:spPr>
+          <a:xfrm>
+            <a:off x="8641080" y="3813048"/>
+            <a:ext cx="1234440" cy="594360"/>
+          </a:xfrm>
+          <a:prstGeom prst="rect">
+            <a:avLst/>
+          </a:prstGeom>
+          <a:noFill/>
+          <a:ln/>
+        </p:spPr>
+        <p:txBody>
+          <a:bodyPr wrap="square" lIns="0" tIns="0" rIns="0" bIns="0" rtlCol="0" anchor="t"/>
+          <a:lstStyle/>
+          <a:p>
+            <a:pPr indent="0" marL="0">
+              <a:buNone/>
+            </a:pPr>
+            <a:r>
               <a:rPr lang="en-US" sz="1200" dirty="0">
                 <a:solidFill>
-                  <a:schemeClr val="accent1"/>
-                </a:solidFill>
-              </a:rPr>
-              <a:t> m²</a:t>
-            </a:r>
-            <a:endParaRPr lang="en-US" sz="2600" dirty="0"/>
-          </a:p>
-        </p:txBody>
-      </p:sp>
-      <p:sp>
-        <p:nvSpPr>
-          <p:cNvPr id="14" name="stat label 3"/>
-          <p:cNvSpPr txBox="1"/>
-          <p:nvPr/>
-        </p:nvSpPr>
-        <p:spPr>
-          <a:xfrm>
-            <a:off x="8522208" y="3273552"/>
-            <a:ext cx="1371600" cy="365760"/>
-          </a:xfrm>
-          <a:prstGeom prst="rect">
-            <a:avLst/>
-          </a:prstGeom>
-          <a:noFill/>
-          <a:ln/>
-        </p:spPr>
-        <p:txBody>
-          <a:bodyPr wrap="square" lIns="0" tIns="0" rIns="0" bIns="0" rtlCol="0" anchor="t"/>
-          <a:lstStyle/>
-          <a:p>
-            <a:pPr indent="0" marL="0">
-              <a:buNone/>
-            </a:pPr>
-            <a:r>
-              <a:rPr lang="en-US" sz="1200" dirty="0">
-                <a:solidFill>
                   <a:schemeClr val="tx1"/>
                 </a:solidFill>
               </a:rPr>
-              <a:t>新設草皮</a:t>
+              <a:t>清水磚造型花台</a:t>
             </a:r>
             <a:endParaRPr lang="en-US" sz="1200" dirty="0"/>
           </a:p>
@@ -5050,16 +5429,18 @@
         </p:nvSpPr>
         <p:spPr>
           <a:xfrm>
-            <a:off x="10104120" y="2633472"/>
-            <a:ext cx="1554480" cy="1115568"/>
+            <a:off x="10104120" y="3035808"/>
+            <a:ext cx="1463040" cy="1481328"/>
           </a:xfrm>
           <a:prstGeom prst="roundRect">
             <a:avLst>
-              <a:gd name="adj" fmla="val 6557"/>
+              <a:gd name="adj" fmla="val 9375"/>
             </a:avLst>
           </a:prstGeom>
           <a:solidFill>
-            <a:schemeClr val="bg2"/>
+            <a:schemeClr val="accent1">
+              <a:alpha val="35000"/>
+            </a:schemeClr>
           </a:solidFill>
           <a:ln/>
         </p:spPr>
@@ -5072,8 +5453,8 @@
         </p:nvSpPr>
         <p:spPr>
           <a:xfrm>
-            <a:off x="10213848" y="2743200"/>
-            <a:ext cx="1371600" cy="502920"/>
+            <a:off x="10241280" y="3200400"/>
+            <a:ext cx="1234440" cy="548640"/>
           </a:xfrm>
           <a:prstGeom prst="rect">
             <a:avLst/>
@@ -5089,59 +5470,59 @@
               <a:buNone/>
             </a:pPr>
             <a:r>
-              <a:rPr lang="en-US" sz="2600" b="1" dirty="0">
-                <a:solidFill>
-                  <a:schemeClr val="accent1"/>
-                </a:solidFill>
-              </a:rPr>
-              <a:t>33.9</a:t>
+              <a:rPr lang="en-US" sz="3000" b="1" dirty="0">
+                <a:solidFill>
+                  <a:schemeClr val="tx2"/>
+                </a:solidFill>
+              </a:rPr>
+              <a:t>1</a:t>
             </a:r>
             <a:pPr indent="0" marL="0">
               <a:buNone/>
             </a:pPr>
             <a:r>
+              <a:rPr lang="en-US" sz="1300" dirty="0">
+                <a:solidFill>
+                  <a:schemeClr val="tx2"/>
+                </a:solidFill>
+              </a:rPr>
+              <a:t> 式</a:t>
+            </a:r>
+            <a:endParaRPr lang="en-US" sz="3000" dirty="0"/>
+          </a:p>
+        </p:txBody>
+      </p:sp>
+      <p:sp>
+        <p:nvSpPr>
+          <p:cNvPr id="17" name="stat label 4"/>
+          <p:cNvSpPr txBox="1"/>
+          <p:nvPr/>
+        </p:nvSpPr>
+        <p:spPr>
+          <a:xfrm>
+            <a:off x="10241280" y="3813048"/>
+            <a:ext cx="1234440" cy="594360"/>
+          </a:xfrm>
+          <a:prstGeom prst="rect">
+            <a:avLst/>
+          </a:prstGeom>
+          <a:noFill/>
+          <a:ln/>
+        </p:spPr>
+        <p:txBody>
+          <a:bodyPr wrap="square" lIns="0" tIns="0" rIns="0" bIns="0" rtlCol="0" anchor="t"/>
+          <a:lstStyle/>
+          <a:p>
+            <a:pPr indent="0" marL="0">
+              <a:buNone/>
+            </a:pPr>
+            <a:r>
               <a:rPr lang="en-US" sz="1200" dirty="0">
                 <a:solidFill>
-                  <a:schemeClr val="accent1"/>
-                </a:solidFill>
-              </a:rPr>
-              <a:t> m</a:t>
-            </a:r>
-            <a:endParaRPr lang="en-US" sz="2600" dirty="0"/>
-          </a:p>
-        </p:txBody>
-      </p:sp>
-      <p:sp>
-        <p:nvSpPr>
-          <p:cNvPr id="17" name="stat label 4"/>
-          <p:cNvSpPr txBox="1"/>
-          <p:nvPr/>
-        </p:nvSpPr>
-        <p:spPr>
-          <a:xfrm>
-            <a:off x="10213848" y="3273552"/>
-            <a:ext cx="1371600" cy="365760"/>
-          </a:xfrm>
-          <a:prstGeom prst="rect">
-            <a:avLst/>
-          </a:prstGeom>
-          <a:noFill/>
-          <a:ln/>
-        </p:spPr>
-        <p:txBody>
-          <a:bodyPr wrap="square" lIns="0" tIns="0" rIns="0" bIns="0" rtlCol="0" anchor="t"/>
-          <a:lstStyle/>
-          <a:p>
-            <a:pPr indent="0" marL="0">
-              <a:buNone/>
-            </a:pPr>
-            <a:r>
-              <a:rPr lang="en-US" sz="1200" dirty="0">
-                <a:solidFill>
                   <a:schemeClr val="tx1"/>
                 </a:solidFill>
               </a:rPr>
-              <a:t>新設透水溝</a:t>
+              <a:t>樹穴系統</a:t>
             </a:r>
             <a:endParaRPr lang="en-US" sz="1200" dirty="0"/>
           </a:p>
@@ -5155,16 +5536,18 @@
         </p:nvSpPr>
         <p:spPr>
           <a:xfrm>
-            <a:off x="8412480" y="3895344"/>
-            <a:ext cx="1554480" cy="1115568"/>
+            <a:off x="8503920" y="4700016"/>
+            <a:ext cx="1463040" cy="1481328"/>
           </a:xfrm>
           <a:prstGeom prst="roundRect">
             <a:avLst>
-              <a:gd name="adj" fmla="val 6557"/>
+              <a:gd name="adj" fmla="val 9375"/>
             </a:avLst>
           </a:prstGeom>
           <a:solidFill>
-            <a:schemeClr val="bg2"/>
+            <a:schemeClr val="accent2">
+              <a:alpha val="35000"/>
+            </a:schemeClr>
           </a:solidFill>
           <a:ln/>
         </p:spPr>
@@ -5177,8 +5560,8 @@
         </p:nvSpPr>
         <p:spPr>
           <a:xfrm>
-            <a:off x="8522208" y="4005072"/>
-            <a:ext cx="1371600" cy="502920"/>
+            <a:off x="8641080" y="4864608"/>
+            <a:ext cx="1234440" cy="548640"/>
           </a:xfrm>
           <a:prstGeom prst="rect">
             <a:avLst/>
@@ -5194,48 +5577,62 @@
               <a:buNone/>
             </a:pPr>
             <a:r>
-              <a:rPr lang="en-US" sz="2600" b="1" dirty="0">
-                <a:solidFill>
-                  <a:schemeClr val="accent1"/>
-                </a:solidFill>
-              </a:rPr>
-              <a:t>10</a:t>
+              <a:rPr lang="en-US" sz="3000" b="1" dirty="0">
+                <a:solidFill>
+                  <a:schemeClr val="tx2"/>
+                </a:solidFill>
+              </a:rPr>
+              <a:t>3</a:t>
             </a:r>
             <a:pPr indent="0" marL="0">
               <a:buNone/>
             </a:pPr>
             <a:r>
+              <a:rPr lang="en-US" sz="1300" dirty="0">
+                <a:solidFill>
+                  <a:schemeClr val="tx2"/>
+                </a:solidFill>
+              </a:rPr>
+              <a:t> 型</a:t>
+            </a:r>
+            <a:endParaRPr lang="en-US" sz="3000" dirty="0"/>
+          </a:p>
+        </p:txBody>
+      </p:sp>
+      <p:sp>
+        <p:nvSpPr>
+          <p:cNvPr id="20" name="stat label 5"/>
+          <p:cNvSpPr txBox="1"/>
+          <p:nvPr/>
+        </p:nvSpPr>
+        <p:spPr>
+          <a:xfrm>
+            <a:off x="8641080" y="5477256"/>
+            <a:ext cx="1234440" cy="594360"/>
+          </a:xfrm>
+          <a:prstGeom prst="rect">
+            <a:avLst/>
+          </a:prstGeom>
+          <a:noFill/>
+          <a:ln/>
+        </p:spPr>
+        <p:txBody>
+          <a:bodyPr wrap="square" lIns="0" tIns="0" rIns="0" bIns="0" rtlCol="0" anchor="t"/>
+          <a:lstStyle/>
+          <a:p>
+            <a:pPr indent="0" marL="0">
+              <a:buNone/>
+            </a:pPr>
+            <a:r>
               <a:rPr lang="en-US" sz="1200" dirty="0">
                 <a:solidFill>
-                  <a:schemeClr val="accent1"/>
-                </a:solidFill>
-              </a:rPr>
-              <a:t> m</a:t>
-            </a:r>
-            <a:endParaRPr lang="en-US" sz="2600" dirty="0"/>
-          </a:p>
-        </p:txBody>
-      </p:sp>
-      <p:sp>
-        <p:nvSpPr>
-          <p:cNvPr id="20" name="stat label 5"/>
-          <p:cNvSpPr txBox="1"/>
-          <p:nvPr/>
-        </p:nvSpPr>
-        <p:spPr>
-          <a:xfrm>
-            <a:off x="8522208" y="4535424"/>
-            <a:ext cx="1371600" cy="365760"/>
-          </a:xfrm>
-          <a:prstGeom prst="rect">
-            <a:avLst/>
-          </a:prstGeom>
-          <a:noFill/>
-          <a:ln/>
-        </p:spPr>
-        <p:txBody>
-          <a:bodyPr wrap="square" lIns="0" tIns="0" rIns="0" bIns="0" rtlCol="0" anchor="t"/>
-          <a:lstStyle/>
+                  <a:schemeClr val="tx1"/>
+                </a:solidFill>
+              </a:rPr>
+              <a:t>新設木圍籬</a:t>
+            </a:r>
+            <a:endParaRPr lang="en-US" sz="1200" dirty="0"/>
+          </a:p>
           <a:p>
             <a:pPr indent="0" marL="0">
               <a:buNone/>
@@ -5246,7 +5643,7 @@
                   <a:schemeClr val="tx1"/>
                 </a:solidFill>
               </a:rPr>
-              <a:t>排水暗溝</a:t>
+              <a:t>TYPE-A/B/C</a:t>
             </a:r>
             <a:endParaRPr lang="en-US" sz="1200" dirty="0"/>
           </a:p>
@@ -5260,16 +5657,18 @@
         </p:nvSpPr>
         <p:spPr>
           <a:xfrm>
-            <a:off x="10104120" y="3895344"/>
-            <a:ext cx="1554480" cy="1115568"/>
+            <a:off x="10104120" y="4700016"/>
+            <a:ext cx="1463040" cy="1481328"/>
           </a:xfrm>
           <a:prstGeom prst="roundRect">
             <a:avLst>
-              <a:gd name="adj" fmla="val 6557"/>
+              <a:gd name="adj" fmla="val 9375"/>
             </a:avLst>
           </a:prstGeom>
           <a:solidFill>
-            <a:schemeClr val="bg2"/>
+            <a:schemeClr val="accent3">
+              <a:alpha val="35000"/>
+            </a:schemeClr>
           </a:solidFill>
           <a:ln/>
         </p:spPr>
@@ -5282,8 +5681,8 @@
         </p:nvSpPr>
         <p:spPr>
           <a:xfrm>
-            <a:off x="10213848" y="4005072"/>
-            <a:ext cx="1371600" cy="502920"/>
+            <a:off x="10241280" y="4864608"/>
+            <a:ext cx="1234440" cy="548640"/>
           </a:xfrm>
           <a:prstGeom prst="rect">
             <a:avLst/>
@@ -5299,269 +5698,59 @@
               <a:buNone/>
             </a:pPr>
             <a:r>
-              <a:rPr lang="en-US" sz="2600" b="1" dirty="0">
-                <a:solidFill>
-                  <a:schemeClr val="accent1"/>
-                </a:solidFill>
-              </a:rPr>
-              <a:t>3</a:t>
+              <a:rPr lang="en-US" sz="3000" b="1" dirty="0">
+                <a:solidFill>
+                  <a:schemeClr val="tx2"/>
+                </a:solidFill>
+              </a:rPr>
+              <a:t>1</a:t>
             </a:r>
             <a:pPr indent="0" marL="0">
               <a:buNone/>
             </a:pPr>
             <a:r>
+              <a:rPr lang="en-US" sz="1300" dirty="0">
+                <a:solidFill>
+                  <a:schemeClr val="tx2"/>
+                </a:solidFill>
+              </a:rPr>
+              <a:t> 處</a:t>
+            </a:r>
+            <a:endParaRPr lang="en-US" sz="3000" dirty="0"/>
+          </a:p>
+        </p:txBody>
+      </p:sp>
+      <p:sp>
+        <p:nvSpPr>
+          <p:cNvPr id="23" name="stat label 6"/>
+          <p:cNvSpPr txBox="1"/>
+          <p:nvPr/>
+        </p:nvSpPr>
+        <p:spPr>
+          <a:xfrm>
+            <a:off x="10241280" y="5477256"/>
+            <a:ext cx="1234440" cy="594360"/>
+          </a:xfrm>
+          <a:prstGeom prst="rect">
+            <a:avLst/>
+          </a:prstGeom>
+          <a:noFill/>
+          <a:ln/>
+        </p:spPr>
+        <p:txBody>
+          <a:bodyPr wrap="square" lIns="0" tIns="0" rIns="0" bIns="0" rtlCol="0" anchor="t"/>
+          <a:lstStyle/>
+          <a:p>
+            <a:pPr indent="0" marL="0">
+              <a:buNone/>
+            </a:pPr>
+            <a:r>
               <a:rPr lang="en-US" sz="1200" dirty="0">
                 <a:solidFill>
-                  <a:schemeClr val="accent1"/>
-                </a:solidFill>
-              </a:rPr>
-              <a:t> 座</a:t>
-            </a:r>
-            <a:endParaRPr lang="en-US" sz="2600" dirty="0"/>
-          </a:p>
-        </p:txBody>
-      </p:sp>
-      <p:sp>
-        <p:nvSpPr>
-          <p:cNvPr id="23" name="stat label 6"/>
-          <p:cNvSpPr txBox="1"/>
-          <p:nvPr/>
-        </p:nvSpPr>
-        <p:spPr>
-          <a:xfrm>
-            <a:off x="10213848" y="4535424"/>
-            <a:ext cx="1371600" cy="365760"/>
-          </a:xfrm>
-          <a:prstGeom prst="rect">
-            <a:avLst/>
-          </a:prstGeom>
-          <a:noFill/>
-          <a:ln/>
-        </p:spPr>
-        <p:txBody>
-          <a:bodyPr wrap="square" lIns="0" tIns="0" rIns="0" bIns="0" rtlCol="0" anchor="t"/>
-          <a:lstStyle/>
-          <a:p>
-            <a:pPr indent="0" marL="0">
-              <a:buNone/>
-            </a:pPr>
-            <a:r>
-              <a:rPr lang="en-US" sz="1200" dirty="0">
-                <a:solidFill>
                   <a:schemeClr val="tx1"/>
                 </a:solidFill>
               </a:rPr>
-              <a:t>新設陰井</a:t>
-            </a:r>
-            <a:endParaRPr lang="en-US" sz="1200" dirty="0"/>
-          </a:p>
-        </p:txBody>
-      </p:sp>
-      <p:sp>
-        <p:nvSpPr>
-          <p:cNvPr id="24" name="stat card 7"/>
-          <p:cNvSpPr/>
-          <p:nvPr/>
-        </p:nvSpPr>
-        <p:spPr>
-          <a:xfrm>
-            <a:off x="8412480" y="5157216"/>
-            <a:ext cx="1554480" cy="1115568"/>
-          </a:xfrm>
-          <a:prstGeom prst="roundRect">
-            <a:avLst>
-              <a:gd name="adj" fmla="val 6557"/>
-            </a:avLst>
-          </a:prstGeom>
-          <a:solidFill>
-            <a:schemeClr val="bg2"/>
-          </a:solidFill>
-          <a:ln/>
-        </p:spPr>
-      </p:sp>
-      <p:sp>
-        <p:nvSpPr>
-          <p:cNvPr id="25" name="stat value 7"/>
-          <p:cNvSpPr txBox="1"/>
-          <p:nvPr/>
-        </p:nvSpPr>
-        <p:spPr>
-          <a:xfrm>
-            <a:off x="8522208" y="5266944"/>
-            <a:ext cx="1371600" cy="502920"/>
-          </a:xfrm>
-          <a:prstGeom prst="rect">
-            <a:avLst/>
-          </a:prstGeom>
-          <a:noFill/>
-          <a:ln/>
-        </p:spPr>
-        <p:txBody>
-          <a:bodyPr wrap="square" lIns="0" tIns="0" rIns="0" bIns="0" rtlCol="0" anchor="ctr"/>
-          <a:lstStyle/>
-          <a:p>
-            <a:pPr indent="0" marL="0">
-              <a:buNone/>
-            </a:pPr>
-            <a:r>
-              <a:rPr lang="en-US" sz="2600" b="1" dirty="0">
-                <a:solidFill>
-                  <a:schemeClr val="accent1"/>
-                </a:solidFill>
-              </a:rPr>
-              <a:t>62</a:t>
-            </a:r>
-            <a:pPr indent="0" marL="0">
-              <a:buNone/>
-            </a:pPr>
-            <a:r>
-              <a:rPr lang="en-US" sz="1200" dirty="0">
-                <a:solidFill>
-                  <a:schemeClr val="accent1"/>
-                </a:solidFill>
-              </a:rPr>
-              <a:t> m</a:t>
-            </a:r>
-            <a:endParaRPr lang="en-US" sz="2600" dirty="0"/>
-          </a:p>
-        </p:txBody>
-      </p:sp>
-      <p:sp>
-        <p:nvSpPr>
-          <p:cNvPr id="26" name="stat label 7"/>
-          <p:cNvSpPr txBox="1"/>
-          <p:nvPr/>
-        </p:nvSpPr>
-        <p:spPr>
-          <a:xfrm>
-            <a:off x="8522208" y="5797296"/>
-            <a:ext cx="1371600" cy="365760"/>
-          </a:xfrm>
-          <a:prstGeom prst="rect">
-            <a:avLst/>
-          </a:prstGeom>
-          <a:noFill/>
-          <a:ln/>
-        </p:spPr>
-        <p:txBody>
-          <a:bodyPr wrap="square" lIns="0" tIns="0" rIns="0" bIns="0" rtlCol="0" anchor="t"/>
-          <a:lstStyle/>
-          <a:p>
-            <a:pPr indent="0" marL="0">
-              <a:buNone/>
-            </a:pPr>
-            <a:r>
-              <a:rPr lang="en-US" sz="1200" dirty="0">
-                <a:solidFill>
-                  <a:schemeClr val="tx1"/>
-                </a:solidFill>
-              </a:rPr>
-              <a:t>新設木圍籬</a:t>
-            </a:r>
-            <a:endParaRPr lang="en-US" sz="1200" dirty="0"/>
-          </a:p>
-        </p:txBody>
-      </p:sp>
-      <p:sp>
-        <p:nvSpPr>
-          <p:cNvPr id="27" name="stat card 8"/>
-          <p:cNvSpPr/>
-          <p:nvPr/>
-        </p:nvSpPr>
-        <p:spPr>
-          <a:xfrm>
-            <a:off x="10104120" y="5157216"/>
-            <a:ext cx="1554480" cy="1115568"/>
-          </a:xfrm>
-          <a:prstGeom prst="roundRect">
-            <a:avLst>
-              <a:gd name="adj" fmla="val 6557"/>
-            </a:avLst>
-          </a:prstGeom>
-          <a:solidFill>
-            <a:schemeClr val="bg2"/>
-          </a:solidFill>
-          <a:ln/>
-        </p:spPr>
-      </p:sp>
-      <p:sp>
-        <p:nvSpPr>
-          <p:cNvPr id="28" name="stat value 8"/>
-          <p:cNvSpPr txBox="1"/>
-          <p:nvPr/>
-        </p:nvSpPr>
-        <p:spPr>
-          <a:xfrm>
-            <a:off x="10213848" y="5266944"/>
-            <a:ext cx="1371600" cy="502920"/>
-          </a:xfrm>
-          <a:prstGeom prst="rect">
-            <a:avLst/>
-          </a:prstGeom>
-          <a:noFill/>
-          <a:ln/>
-        </p:spPr>
-        <p:txBody>
-          <a:bodyPr wrap="square" lIns="0" tIns="0" rIns="0" bIns="0" rtlCol="0" anchor="ctr"/>
-          <a:lstStyle/>
-          <a:p>
-            <a:pPr indent="0" marL="0">
-              <a:buNone/>
-            </a:pPr>
-            <a:r>
-              <a:rPr lang="en-US" sz="2600" b="1" dirty="0">
-                <a:solidFill>
-                  <a:schemeClr val="accent1"/>
-                </a:solidFill>
-              </a:rPr>
-              <a:t>2</a:t>
-            </a:r>
-            <a:pPr indent="0" marL="0">
-              <a:buNone/>
-            </a:pPr>
-            <a:r>
-              <a:rPr lang="en-US" sz="1200" dirty="0">
-                <a:solidFill>
-                  <a:schemeClr val="accent1"/>
-                </a:solidFill>
-              </a:rPr>
-              <a:t> 株</a:t>
-            </a:r>
-            <a:endParaRPr lang="en-US" sz="2600" dirty="0"/>
-          </a:p>
-        </p:txBody>
-      </p:sp>
-      <p:sp>
-        <p:nvSpPr>
-          <p:cNvPr id="29" name="stat label 8"/>
-          <p:cNvSpPr txBox="1"/>
-          <p:nvPr/>
-        </p:nvSpPr>
-        <p:spPr>
-          <a:xfrm>
-            <a:off x="10213848" y="5797296"/>
-            <a:ext cx="1371600" cy="365760"/>
-          </a:xfrm>
-          <a:prstGeom prst="rect">
-            <a:avLst/>
-          </a:prstGeom>
-          <a:noFill/>
-          <a:ln/>
-        </p:spPr>
-        <p:txBody>
-          <a:bodyPr wrap="square" lIns="0" tIns="0" rIns="0" bIns="0" rtlCol="0" anchor="t"/>
-          <a:lstStyle/>
-          <a:p>
-            <a:pPr indent="0" marL="0">
-              <a:buNone/>
-            </a:pPr>
-            <a:r>
-              <a:rPr lang="en-US" sz="1200" dirty="0">
-                <a:solidFill>
-                  <a:schemeClr val="tx1"/>
-                </a:solidFill>
-              </a:rPr>
-              <a:t>新設喬木</a:t>
+              <a:t>體健區混凝土地坪</a:t>
             </a:r>
             <a:endParaRPr lang="en-US" sz="1200" dirty="0"/>
           </a:p>
@@ -5597,7 +5786,7 @@
             <a:lvl1pPr>
               <a:defRPr sz="1000">
                 <a:solidFill>
-                  <a:schemeClr val="accent4"/>
+                  <a:schemeClr val="tx1"/>
                 </a:solidFill>
               </a:defRPr>
             </a:lvl1pPr>
@@ -5637,9 +5826,82 @@
           <a:chExt cx="0" cy="0"/>
         </a:xfrm>
       </p:grpSpPr>
+      <p:sp>
+        <p:nvSpPr>
+          <p:cNvPr id="2" name="bubble 1"/>
+          <p:cNvSpPr/>
+          <p:nvPr/>
+        </p:nvSpPr>
+        <p:spPr>
+          <a:xfrm>
+            <a:off x="6949440" y="-731520"/>
+            <a:ext cx="2377440" cy="2377440"/>
+          </a:xfrm>
+          <a:prstGeom prst="ellipse">
+            <a:avLst/>
+          </a:prstGeom>
+          <a:solidFill>
+            <a:schemeClr val="accent2">
+              <a:alpha val="80000"/>
+            </a:schemeClr>
+          </a:solidFill>
+          <a:ln/>
+        </p:spPr>
+      </p:sp>
+      <p:sp>
+        <p:nvSpPr>
+          <p:cNvPr id="3" name="bubble 2"/>
+          <p:cNvSpPr/>
+          <p:nvPr/>
+        </p:nvSpPr>
+        <p:spPr>
+          <a:xfrm>
+            <a:off x="6309360" y="5120640"/>
+            <a:ext cx="1645920" cy="1645920"/>
+          </a:xfrm>
+          <a:prstGeom prst="ellipse">
+            <a:avLst/>
+          </a:prstGeom>
+          <a:solidFill>
+            <a:schemeClr val="accent3">
+              <a:alpha val="80000"/>
+            </a:schemeClr>
+          </a:solidFill>
+          <a:ln/>
+        </p:spPr>
+      </p:sp>
+      <p:sp>
+        <p:nvSpPr>
+          <p:cNvPr id="4" name="photo frame"/>
+          <p:cNvSpPr/>
+          <p:nvPr/>
+        </p:nvSpPr>
+        <p:spPr>
+          <a:xfrm>
+            <a:off x="7498080" y="822960"/>
+            <a:ext cx="4114800" cy="5212080"/>
+          </a:xfrm>
+          <a:prstGeom prst="roundRect">
+            <a:avLst>
+              <a:gd name="adj" fmla="val 6667"/>
+            </a:avLst>
+          </a:prstGeom>
+          <a:solidFill>
+            <a:schemeClr val="bg1"/>
+          </a:solidFill>
+          <a:ln/>
+          <a:effectLst>
+            <a:outerShdw sx="100000" sy="100000" kx="0" ky="0" algn="bl" rotWithShape="0" blurRad="152400" dist="50800" dir="5400000">
+              <a:srgbClr val="C3A6FF">
+                <a:alpha val="35000"/>
+              </a:srgbClr>
+            </a:outerShdw>
+          </a:effectLst>
+        </p:spPr>
+      </p:sp>
       <p:pic>
         <p:nvPicPr>
-          <p:cNvPr id="2" name="closing photo" descr="/tmp/claude-0/-home-user-WORK/17061699-df28-586b-9ead-2ea441853089/scratchpad/img/photo2.jpg">    </p:cNvPr>
+          <p:cNvPr id="5" name="photo" descr="/tmp/claude-0/-home-user-WORK/17061699-df28-586b-9ead-2ea441853089/scratchpad/img/photo2.jpg">    </p:cNvPr>
           <p:cNvPicPr>
             <a:picLocks noChangeAspect="1"/>
           </p:cNvPicPr>
@@ -5652,8 +5914,8 @@
         </p:blipFill>
         <p:spPr>
           <a:xfrm>
-            <a:off x="7680960" y="0"/>
-            <a:ext cx="4507992" cy="6858000"/>
+            <a:off x="7680960" y="1005840"/>
+            <a:ext cx="3749040" cy="4846320"/>
           </a:xfrm>
           <a:prstGeom prst="rect">
             <a:avLst/>
@@ -5662,7 +5924,51 @@
       </p:pic>
       <p:sp>
         <p:nvSpPr>
-          <p:cNvPr id="3" name="Text 0"/>
+          <p:cNvPr id="6" name="bubble 1"/>
+          <p:cNvSpPr/>
+          <p:nvPr/>
+        </p:nvSpPr>
+        <p:spPr>
+          <a:xfrm>
+            <a:off x="-548640" y="-548640"/>
+            <a:ext cx="1645920" cy="1645920"/>
+          </a:xfrm>
+          <a:prstGeom prst="ellipse">
+            <a:avLst/>
+          </a:prstGeom>
+          <a:solidFill>
+            <a:schemeClr val="accent3">
+              <a:alpha val="70000"/>
+            </a:schemeClr>
+          </a:solidFill>
+          <a:ln/>
+        </p:spPr>
+      </p:sp>
+      <p:sp>
+        <p:nvSpPr>
+          <p:cNvPr id="7" name="bubble 2"/>
+          <p:cNvSpPr/>
+          <p:nvPr/>
+        </p:nvSpPr>
+        <p:spPr>
+          <a:xfrm>
+            <a:off x="5303520" y="5852160"/>
+            <a:ext cx="1097280" cy="1097280"/>
+          </a:xfrm>
+          <a:prstGeom prst="ellipse">
+            <a:avLst/>
+          </a:prstGeom>
+          <a:solidFill>
+            <a:schemeClr val="accent1">
+              <a:alpha val="70000"/>
+            </a:schemeClr>
+          </a:solidFill>
+          <a:ln/>
+        </p:spPr>
+      </p:sp>
+      <p:sp>
+        <p:nvSpPr>
+          <p:cNvPr id="8" name="Text 0"/>
           <p:cNvSpPr/>
           <p:nvPr>
             <p:ph idx="100" type="title" hasCustomPrompt="1"/>
@@ -5689,7 +5995,7 @@
             <a:r>
               <a:rPr lang="en-US" sz="3600" b="1" dirty="0">
                 <a:solidFill>
-                  <a:schemeClr val="bg1"/>
+                  <a:schemeClr val="tx2"/>
                 </a:solidFill>
               </a:rPr>
               <a:t>完工效益</a:t>
@@ -5700,14 +6006,36 @@
       </p:sp>
       <p:sp>
         <p:nvSpPr>
-          <p:cNvPr id="4" name="benefit 1"/>
-          <p:cNvSpPr txBox="1"/>
-          <p:nvPr/>
-        </p:nvSpPr>
-        <p:spPr>
-          <a:xfrm>
-            <a:off x="640080" y="3063240"/>
-            <a:ext cx="6766560" cy="548640"/>
+          <p:cNvPr id="9" name="benefit pill 1"/>
+          <p:cNvSpPr/>
+          <p:nvPr/>
+        </p:nvSpPr>
+        <p:spPr>
+          <a:xfrm>
+            <a:off x="640080" y="3090672"/>
+            <a:ext cx="1188720" cy="402336"/>
+          </a:xfrm>
+          <a:prstGeom prst="roundRect">
+            <a:avLst>
+              <a:gd name="adj" fmla="val 50000"/>
+            </a:avLst>
+          </a:prstGeom>
+          <a:solidFill>
+            <a:schemeClr val="accent1"/>
+          </a:solidFill>
+          <a:ln/>
+        </p:spPr>
+      </p:sp>
+      <p:sp>
+        <p:nvSpPr>
+          <p:cNvPr id="10" name="benefit tag 1"/>
+          <p:cNvSpPr txBox="1"/>
+          <p:nvPr/>
+        </p:nvSpPr>
+        <p:spPr>
+          <a:xfrm>
+            <a:off x="640080" y="3090672"/>
+            <a:ext cx="1188720" cy="402336"/>
           </a:xfrm>
           <a:prstGeom prst="rect">
             <a:avLst/>
@@ -5719,42 +6047,183 @@
           <a:bodyPr wrap="square" lIns="0" tIns="0" rIns="0" bIns="0" rtlCol="0" anchor="ctr"/>
           <a:lstStyle/>
           <a:p>
+            <a:pPr algn="ctr" indent="0" marL="0">
+              <a:buNone/>
+            </a:pPr>
+            <a:r>
+              <a:rPr lang="en-US" sz="1500" b="1" dirty="0">
+                <a:solidFill>
+                  <a:schemeClr val="tx1"/>
+                </a:solidFill>
+              </a:rPr>
+              <a:t>排水順暢</a:t>
+            </a:r>
+            <a:endParaRPr lang="en-US" sz="1500" dirty="0"/>
+          </a:p>
+        </p:txBody>
+      </p:sp>
+      <p:sp>
+        <p:nvSpPr>
+          <p:cNvPr id="11" name="benefit 1"/>
+          <p:cNvSpPr txBox="1"/>
+          <p:nvPr/>
+        </p:nvSpPr>
+        <p:spPr>
+          <a:xfrm>
+            <a:off x="2011680" y="3017520"/>
+            <a:ext cx="5120640" cy="548640"/>
+          </a:xfrm>
+          <a:prstGeom prst="rect">
+            <a:avLst/>
+          </a:prstGeom>
+          <a:noFill/>
+          <a:ln/>
+        </p:spPr>
+        <p:txBody>
+          <a:bodyPr wrap="square" lIns="0" tIns="0" rIns="0" bIns="0" rtlCol="0" anchor="ctr"/>
+          <a:lstStyle/>
+          <a:p>
             <a:pPr indent="0" marL="0">
               <a:buNone/>
             </a:pPr>
             <a:r>
-              <a:rPr lang="en-US" sz="1800" b="1" dirty="0">
-                <a:solidFill>
-                  <a:schemeClr val="accent3"/>
-                </a:solidFill>
-              </a:rPr>
-              <a:t>排水順暢　</a:t>
-            </a:r>
+              <a:rPr lang="en-US" sz="1600" dirty="0">
+                <a:solidFill>
+                  <a:schemeClr val="tx1"/>
+                </a:solidFill>
+              </a:rPr>
+              <a:t>新設排水溝、透水管與陰井，改善園內積水</a:t>
+            </a:r>
+            <a:endParaRPr lang="en-US" sz="1600" dirty="0"/>
+          </a:p>
+        </p:txBody>
+      </p:sp>
+      <p:sp>
+        <p:nvSpPr>
+          <p:cNvPr id="12" name="benefit pill 2"/>
+          <p:cNvSpPr/>
+          <p:nvPr/>
+        </p:nvSpPr>
+        <p:spPr>
+          <a:xfrm>
+            <a:off x="640080" y="3867912"/>
+            <a:ext cx="1188720" cy="402336"/>
+          </a:xfrm>
+          <a:prstGeom prst="roundRect">
+            <a:avLst>
+              <a:gd name="adj" fmla="val 50000"/>
+            </a:avLst>
+          </a:prstGeom>
+          <a:solidFill>
+            <a:schemeClr val="accent2"/>
+          </a:solidFill>
+          <a:ln/>
+        </p:spPr>
+      </p:sp>
+      <p:sp>
+        <p:nvSpPr>
+          <p:cNvPr id="13" name="benefit tag 2"/>
+          <p:cNvSpPr txBox="1"/>
+          <p:nvPr/>
+        </p:nvSpPr>
+        <p:spPr>
+          <a:xfrm>
+            <a:off x="640080" y="3867912"/>
+            <a:ext cx="1188720" cy="402336"/>
+          </a:xfrm>
+          <a:prstGeom prst="rect">
+            <a:avLst/>
+          </a:prstGeom>
+          <a:noFill/>
+          <a:ln/>
+        </p:spPr>
+        <p:txBody>
+          <a:bodyPr wrap="square" lIns="0" tIns="0" rIns="0" bIns="0" rtlCol="0" anchor="ctr"/>
+          <a:lstStyle/>
+          <a:p>
+            <a:pPr algn="ctr" indent="0" marL="0">
+              <a:buNone/>
+            </a:pPr>
+            <a:r>
+              <a:rPr lang="en-US" sz="1500" b="1" dirty="0">
+                <a:solidFill>
+                  <a:schemeClr val="tx1"/>
+                </a:solidFill>
+              </a:rPr>
+              <a:t>休憩空間</a:t>
+            </a:r>
+            <a:endParaRPr lang="en-US" sz="1500" dirty="0"/>
+          </a:p>
+        </p:txBody>
+      </p:sp>
+      <p:sp>
+        <p:nvSpPr>
+          <p:cNvPr id="14" name="benefit 2"/>
+          <p:cNvSpPr txBox="1"/>
+          <p:nvPr/>
+        </p:nvSpPr>
+        <p:spPr>
+          <a:xfrm>
+            <a:off x="2011680" y="3794760"/>
+            <a:ext cx="5120640" cy="548640"/>
+          </a:xfrm>
+          <a:prstGeom prst="rect">
+            <a:avLst/>
+          </a:prstGeom>
+          <a:noFill/>
+          <a:ln/>
+        </p:spPr>
+        <p:txBody>
+          <a:bodyPr wrap="square" lIns="0" tIns="0" rIns="0" bIns="0" rtlCol="0" anchor="ctr"/>
+          <a:lstStyle/>
+          <a:p>
             <a:pPr indent="0" marL="0">
               <a:buNone/>
             </a:pPr>
             <a:r>
               <a:rPr lang="en-US" sz="1600" dirty="0">
                 <a:solidFill>
-                  <a:schemeClr val="bg1"/>
-                </a:solidFill>
-              </a:rPr>
-              <a:t>新設排水溝、透水管與陰井，改善園內積水</a:t>
-            </a:r>
-            <a:endParaRPr lang="en-US" sz="1800" dirty="0"/>
-          </a:p>
-        </p:txBody>
-      </p:sp>
-      <p:sp>
-        <p:nvSpPr>
-          <p:cNvPr id="5" name="benefit 2"/>
-          <p:cNvSpPr txBox="1"/>
-          <p:nvPr/>
-        </p:nvSpPr>
-        <p:spPr>
-          <a:xfrm>
-            <a:off x="640080" y="3840480"/>
-            <a:ext cx="6766560" cy="548640"/>
+                  <a:schemeClr val="tx1"/>
+                </a:solidFill>
+              </a:rPr>
+              <a:t>新設休憩廣場與座椅，提供民眾停留使用</a:t>
+            </a:r>
+            <a:endParaRPr lang="en-US" sz="1600" dirty="0"/>
+          </a:p>
+        </p:txBody>
+      </p:sp>
+      <p:sp>
+        <p:nvSpPr>
+          <p:cNvPr id="15" name="benefit pill 3"/>
+          <p:cNvSpPr/>
+          <p:nvPr/>
+        </p:nvSpPr>
+        <p:spPr>
+          <a:xfrm>
+            <a:off x="640080" y="4645152"/>
+            <a:ext cx="1188720" cy="402336"/>
+          </a:xfrm>
+          <a:prstGeom prst="roundRect">
+            <a:avLst>
+              <a:gd name="adj" fmla="val 50000"/>
+            </a:avLst>
+          </a:prstGeom>
+          <a:solidFill>
+            <a:schemeClr val="accent3"/>
+          </a:solidFill>
+          <a:ln/>
+        </p:spPr>
+      </p:sp>
+      <p:sp>
+        <p:nvSpPr>
+          <p:cNvPr id="16" name="benefit tag 3"/>
+          <p:cNvSpPr txBox="1"/>
+          <p:nvPr/>
+        </p:nvSpPr>
+        <p:spPr>
+          <a:xfrm>
+            <a:off x="640080" y="4645152"/>
+            <a:ext cx="1188720" cy="402336"/>
           </a:xfrm>
           <a:prstGeom prst="rect">
             <a:avLst/>
@@ -5766,129 +6235,154 @@
           <a:bodyPr wrap="square" lIns="0" tIns="0" rIns="0" bIns="0" rtlCol="0" anchor="ctr"/>
           <a:lstStyle/>
           <a:p>
+            <a:pPr algn="ctr" indent="0" marL="0">
+              <a:buNone/>
+            </a:pPr>
+            <a:r>
+              <a:rPr lang="en-US" sz="1500" b="1" dirty="0">
+                <a:solidFill>
+                  <a:schemeClr val="tx1"/>
+                </a:solidFill>
+              </a:rPr>
+              <a:t>通行友善</a:t>
+            </a:r>
+            <a:endParaRPr lang="en-US" sz="1500" dirty="0"/>
+          </a:p>
+        </p:txBody>
+      </p:sp>
+      <p:sp>
+        <p:nvSpPr>
+          <p:cNvPr id="17" name="benefit 3"/>
+          <p:cNvSpPr txBox="1"/>
+          <p:nvPr/>
+        </p:nvSpPr>
+        <p:spPr>
+          <a:xfrm>
+            <a:off x="2011680" y="4572000"/>
+            <a:ext cx="5120640" cy="548640"/>
+          </a:xfrm>
+          <a:prstGeom prst="rect">
+            <a:avLst/>
+          </a:prstGeom>
+          <a:noFill/>
+          <a:ln/>
+        </p:spPr>
+        <p:txBody>
+          <a:bodyPr wrap="square" lIns="0" tIns="0" rIns="0" bIns="0" rtlCol="0" anchor="ctr"/>
+          <a:lstStyle/>
+          <a:p>
             <a:pPr indent="0" marL="0">
               <a:buNone/>
             </a:pPr>
             <a:r>
-              <a:rPr lang="en-US" sz="1800" b="1" dirty="0">
-                <a:solidFill>
-                  <a:schemeClr val="accent3"/>
-                </a:solidFill>
-              </a:rPr>
-              <a:t>休憩空間　</a:t>
-            </a:r>
+              <a:rPr lang="en-US" sz="1600" dirty="0">
+                <a:solidFill>
+                  <a:schemeClr val="tx1"/>
+                </a:solidFill>
+              </a:rPr>
+              <a:t>拓寬及增設人行步道，動線更安全平順</a:t>
+            </a:r>
+            <a:endParaRPr lang="en-US" sz="1600" dirty="0"/>
+          </a:p>
+        </p:txBody>
+      </p:sp>
+      <p:sp>
+        <p:nvSpPr>
+          <p:cNvPr id="18" name="benefit pill 4"/>
+          <p:cNvSpPr/>
+          <p:nvPr/>
+        </p:nvSpPr>
+        <p:spPr>
+          <a:xfrm>
+            <a:off x="640080" y="5422392"/>
+            <a:ext cx="1188720" cy="402336"/>
+          </a:xfrm>
+          <a:prstGeom prst="roundRect">
+            <a:avLst>
+              <a:gd name="adj" fmla="val 50000"/>
+            </a:avLst>
+          </a:prstGeom>
+          <a:solidFill>
+            <a:schemeClr val="accent4"/>
+          </a:solidFill>
+          <a:ln/>
+        </p:spPr>
+      </p:sp>
+      <p:sp>
+        <p:nvSpPr>
+          <p:cNvPr id="19" name="benefit tag 4"/>
+          <p:cNvSpPr txBox="1"/>
+          <p:nvPr/>
+        </p:nvSpPr>
+        <p:spPr>
+          <a:xfrm>
+            <a:off x="640080" y="5422392"/>
+            <a:ext cx="1188720" cy="402336"/>
+          </a:xfrm>
+          <a:prstGeom prst="rect">
+            <a:avLst/>
+          </a:prstGeom>
+          <a:noFill/>
+          <a:ln/>
+        </p:spPr>
+        <p:txBody>
+          <a:bodyPr wrap="square" lIns="0" tIns="0" rIns="0" bIns="0" rtlCol="0" anchor="ctr"/>
+          <a:lstStyle/>
+          <a:p>
+            <a:pPr algn="ctr" indent="0" marL="0">
+              <a:buNone/>
+            </a:pPr>
+            <a:r>
+              <a:rPr lang="en-US" sz="1500" b="1" dirty="0">
+                <a:solidFill>
+                  <a:schemeClr val="tx1"/>
+                </a:solidFill>
+              </a:rPr>
+              <a:t>綠意運動</a:t>
+            </a:r>
+            <a:endParaRPr lang="en-US" sz="1500" dirty="0"/>
+          </a:p>
+        </p:txBody>
+      </p:sp>
+      <p:sp>
+        <p:nvSpPr>
+          <p:cNvPr id="20" name="benefit 4"/>
+          <p:cNvSpPr txBox="1"/>
+          <p:nvPr/>
+        </p:nvSpPr>
+        <p:spPr>
+          <a:xfrm>
+            <a:off x="2011680" y="5349240"/>
+            <a:ext cx="5120640" cy="548640"/>
+          </a:xfrm>
+          <a:prstGeom prst="rect">
+            <a:avLst/>
+          </a:prstGeom>
+          <a:noFill/>
+          <a:ln/>
+        </p:spPr>
+        <p:txBody>
+          <a:bodyPr wrap="square" lIns="0" tIns="0" rIns="0" bIns="0" rtlCol="0" anchor="ctr"/>
+          <a:lstStyle/>
+          <a:p>
             <a:pPr indent="0" marL="0">
               <a:buNone/>
             </a:pPr>
             <a:r>
               <a:rPr lang="en-US" sz="1600" dirty="0">
                 <a:solidFill>
-                  <a:schemeClr val="bg1"/>
-                </a:solidFill>
-              </a:rPr>
-              <a:t>新設休憩廣場與座椅，提供民眾停留使用</a:t>
-            </a:r>
-            <a:endParaRPr lang="en-US" sz="1800" dirty="0"/>
-          </a:p>
-        </p:txBody>
-      </p:sp>
-      <p:sp>
-        <p:nvSpPr>
-          <p:cNvPr id="6" name="benefit 3"/>
-          <p:cNvSpPr txBox="1"/>
-          <p:nvPr/>
-        </p:nvSpPr>
-        <p:spPr>
-          <a:xfrm>
-            <a:off x="640080" y="4617720"/>
-            <a:ext cx="6766560" cy="548640"/>
-          </a:xfrm>
-          <a:prstGeom prst="rect">
-            <a:avLst/>
-          </a:prstGeom>
-          <a:noFill/>
-          <a:ln/>
-        </p:spPr>
-        <p:txBody>
-          <a:bodyPr wrap="square" lIns="0" tIns="0" rIns="0" bIns="0" rtlCol="0" anchor="ctr"/>
-          <a:lstStyle/>
-          <a:p>
-            <a:pPr indent="0" marL="0">
-              <a:buNone/>
-            </a:pPr>
-            <a:r>
-              <a:rPr lang="en-US" sz="1800" b="1" dirty="0">
-                <a:solidFill>
-                  <a:schemeClr val="accent3"/>
-                </a:solidFill>
-              </a:rPr>
-              <a:t>通行友善　</a:t>
-            </a:r>
-            <a:pPr indent="0" marL="0">
-              <a:buNone/>
-            </a:pPr>
-            <a:r>
-              <a:rPr lang="en-US" sz="1600" dirty="0">
-                <a:solidFill>
-                  <a:schemeClr val="bg1"/>
-                </a:solidFill>
-              </a:rPr>
-              <a:t>拓寬及增設人行步道，動線更安全平順</a:t>
-            </a:r>
-            <a:endParaRPr lang="en-US" sz="1800" dirty="0"/>
-          </a:p>
-        </p:txBody>
-      </p:sp>
-      <p:sp>
-        <p:nvSpPr>
-          <p:cNvPr id="7" name="benefit 4"/>
-          <p:cNvSpPr txBox="1"/>
-          <p:nvPr/>
-        </p:nvSpPr>
-        <p:spPr>
-          <a:xfrm>
-            <a:off x="640080" y="5394960"/>
-            <a:ext cx="6766560" cy="548640"/>
-          </a:xfrm>
-          <a:prstGeom prst="rect">
-            <a:avLst/>
-          </a:prstGeom>
-          <a:noFill/>
-          <a:ln/>
-        </p:spPr>
-        <p:txBody>
-          <a:bodyPr wrap="square" lIns="0" tIns="0" rIns="0" bIns="0" rtlCol="0" anchor="ctr"/>
-          <a:lstStyle/>
-          <a:p>
-            <a:pPr indent="0" marL="0">
-              <a:buNone/>
-            </a:pPr>
-            <a:r>
-              <a:rPr lang="en-US" sz="1800" b="1" dirty="0">
-                <a:solidFill>
-                  <a:schemeClr val="accent3"/>
-                </a:solidFill>
-              </a:rPr>
-              <a:t>綠意運動　</a:t>
-            </a:r>
-            <a:pPr indent="0" marL="0">
-              <a:buNone/>
-            </a:pPr>
-            <a:r>
-              <a:rPr lang="en-US" sz="1600" dirty="0">
-                <a:solidFill>
-                  <a:schemeClr val="bg1"/>
-                </a:solidFill>
-              </a:rPr>
-              <a:t>整地鋪設草皮、增設及更新體健設施</a:t>
-            </a:r>
-            <a:endParaRPr lang="en-US" sz="1800" dirty="0"/>
-          </a:p>
-        </p:txBody>
-      </p:sp>
-      <p:sp>
-        <p:nvSpPr>
-          <p:cNvPr id="8" name="Text 0"/>
+                  <a:schemeClr val="tx1"/>
+                </a:solidFill>
+              </a:rPr>
+              <a:t>整地鋪設草皮、新植喬木、增設及更新體健設施</a:t>
+            </a:r>
+            <a:endParaRPr lang="en-US" sz="1600" dirty="0"/>
+          </a:p>
+        </p:txBody>
+      </p:sp>
+      <p:sp>
+        <p:nvSpPr>
+          <p:cNvPr id="21" name="Text 0"/>
           <p:cNvSpPr/>
           <p:nvPr>
             <p:ph idx="101" type="body" hasCustomPrompt="1"/>
@@ -5925,47 +6419,47 @@
 </file>
 
 <file path=ppt/theme/theme1.xml><?xml version="1.0" encoding="utf-8"?>
-<a:theme xmlns:a="http://schemas.openxmlformats.org/drawingml/2006/main" name="Park Green">
+<a:theme xmlns:a="http://schemas.openxmlformats.org/drawingml/2006/main" name="Dopamine Pastel">
   <a:themeElements>
-    <a:clrScheme name="Park Green">
+    <a:clrScheme name="Dopamine Pastel">
       <a:dk1>
-        <a:srgbClr val="1F2A1F"/>
+        <a:srgbClr val="3A3150"/>
       </a:dk1>
       <a:lt1>
         <a:srgbClr val="FFFFFF"/>
       </a:lt1>
       <a:dk2>
-        <a:srgbClr val="24502A"/>
+        <a:srgbClr val="5B3F8C"/>
       </a:dk2>
       <a:lt2>
-        <a:srgbClr val="EEF4EA"/>
+        <a:srgbClr val="FFF0F6"/>
       </a:lt2>
       <a:accent1>
-        <a:srgbClr val="2F6B35"/>
+        <a:srgbClr val="FF8FB1"/>
       </a:accent1>
       <a:accent2>
-        <a:srgbClr val="8DBB5A"/>
+        <a:srgbClr val="FFD166"/>
       </a:accent2>
       <a:accent3>
-        <a:srgbClr val="D9772B"/>
+        <a:srgbClr val="7FD8BE"/>
       </a:accent3>
       <a:accent4>
-        <a:srgbClr val="5E7C64"/>
+        <a:srgbClr val="8EC5FF"/>
       </a:accent4>
       <a:accent5>
-        <a:srgbClr val="B9D49A"/>
+        <a:srgbClr val="C3A6FF"/>
       </a:accent5>
       <a:accent6>
-        <a:srgbClr val="7A5A3A"/>
+        <a:srgbClr val="FFB38A"/>
       </a:accent6>
       <a:hlink>
-        <a:srgbClr val="2F6B35"/>
+        <a:srgbClr val="5B3F8C"/>
       </a:hlink>
       <a:folHlink>
-        <a:srgbClr val="5E7C64"/>
+        <a:srgbClr val="C3A6FF"/>
       </a:folHlink>
     </a:clrScheme>
-    <a:fontScheme name="Park Green">
+    <a:fontScheme name="Dopamine Pastel">
       <a:majorFont>
         <a:latin typeface="Microsoft JhengHei"/>
         <a:ea typeface=""/>

--- a/115年度蘆洲區公園廣場基礎設施整建工程_完工成果說明.pptx
+++ b/115年度蘆洲區公園廣場基礎設施整建工程_完工成果說明.pptx
@@ -113,29 +113,29 @@
   <p:extLst>
     <p:ext uri="{521415D9-36F7-43E2-AB2F-B90AF26B5E84}">
       <p14:sectionLst xmlns:p14="http://schemas.microsoft.com/office/powerpoint/2010/main">
-        <p14:section name="封面" id="{d98df7e3-dd71-b9cc-719a-fcab97e81bb2}">
+        <p14:section name="封面" id="{05c9bda1-7073-bfba-75e9-3e1028be2049}">
           <p14:sldIdLst>
             <p14:sldId id="256"/>
           </p14:sldIdLst>
         </p14:section>
-        <p14:section name="工程概要" id="{c1275d01-8318-0df9-0d52-050ff7517cac}">
+        <p14:section name="工程概要" id="{5314e8f2-9407-f93e-89b8-83774888a992}">
           <p14:sldIdLst>
             <p14:sldId id="257"/>
           </p14:sldIdLst>
         </p14:section>
-        <p14:section name="工區一 永安兒童公園" id="{d6509b20-f59d-81c5-995a-afbf06ed9450}">
+        <p14:section name="工區一 永安兒童公園" id="{34949e62-791a-b93e-695d-40c475ead990}">
           <p14:sldIdLst>
             <p14:sldId id="258"/>
             <p14:sldId id="259"/>
           </p14:sldIdLst>
         </p14:section>
-        <p14:section name="工區二 兒一公園" id="{01ffd536-1f0d-e1b0-3b79-07ba9bcfe710}">
+        <p14:section name="工區二 兒一公園" id="{d5525942-ceb5-82c0-cd7b-f2711f0404cf}">
           <p14:sldIdLst>
             <p14:sldId id="260"/>
             <p14:sldId id="261"/>
           </p14:sldIdLst>
         </p14:section>
-        <p14:section name="完工效益" id="{abc3890e-5567-450b-e9ea-7bd77c353745}">
+        <p14:section name="完工效益" id="{cee9b081-805f-a194-f620-0cdffdfb32b5}">
           <p14:sldIdLst>
             <p14:sldId id="262"/>
           </p14:sldIdLst>
@@ -1777,8 +1777,8 @@
           <a:ln/>
           <a:effectLst>
             <a:outerShdw sx="100000" sy="100000" kx="0" ky="0" algn="bl" rotWithShape="0" blurRad="152400" dist="50800" dir="5400000">
-              <a:srgbClr val="C3A6FF">
-                <a:alpha val="35000"/>
+              <a:srgbClr val="A8D5A2">
+                <a:alpha val="40000"/>
               </a:srgbClr>
             </a:outerShdw>
           </a:effectLst>
@@ -2284,7 +2284,7 @@
             </a:avLst>
           </a:prstGeom>
           <a:solidFill>
-            <a:schemeClr val="accent4">
+            <a:schemeClr val="accent3">
               <a:alpha val="22000"/>
             </a:schemeClr>
           </a:solidFill>
@@ -2331,7 +2331,7 @@
             </a:avLst>
           </a:prstGeom>
           <a:solidFill>
-            <a:schemeClr val="accent4"/>
+            <a:schemeClr val="accent3"/>
           </a:solidFill>
           <a:ln/>
         </p:spPr>
@@ -3254,7 +3254,7 @@
                   <a:schemeClr val="tx1"/>
                 </a:solidFill>
               </a:rPr>
-              <a:t>廁所外牆重新粉刷</a:t>
+              <a:t>新設座椅、廁所外牆粉刷</a:t>
             </a:r>
             <a:endParaRPr lang="en-US" sz="1500" dirty="0"/>
           </a:p>
@@ -3362,7 +3362,7 @@
                   <a:schemeClr val="tx2"/>
                 </a:solidFill>
               </a:rPr>
-              <a:t>工區一 永安兒童公園｜平面配置與施作項目</a:t>
+              <a:t>工區一 永安兒童公園｜平面配置與施作數量</a:t>
             </a:r>
             <a:endParaRPr lang="en-US" sz="3200" dirty="0"/>
           </a:p>
@@ -3464,11 +3464,11 @@
         <p:spPr>
           <a:xfrm>
             <a:off x="8503920" y="1371600"/>
-            <a:ext cx="1463040" cy="1481328"/>
+            <a:ext cx="1463040" cy="1115568"/>
           </a:xfrm>
           <a:prstGeom prst="roundRect">
             <a:avLst>
-              <a:gd name="adj" fmla="val 9375"/>
+              <a:gd name="adj" fmla="val 12295"/>
             </a:avLst>
           </a:prstGeom>
           <a:solidFill>
@@ -3487,8 +3487,8 @@
         </p:nvSpPr>
         <p:spPr>
           <a:xfrm>
-            <a:off x="8641080" y="1536192"/>
-            <a:ext cx="1234440" cy="548640"/>
+            <a:off x="8613648" y="1499616"/>
+            <a:ext cx="1280160" cy="502920"/>
           </a:xfrm>
           <a:prstGeom prst="rect">
             <a:avLst/>
@@ -3504,12 +3504,12 @@
               <a:buNone/>
             </a:pPr>
             <a:r>
-              <a:rPr lang="en-US" sz="3000" b="1" dirty="0">
+              <a:rPr lang="en-US" sz="2600" b="1" dirty="0">
                 <a:solidFill>
                   <a:schemeClr val="tx2"/>
                 </a:solidFill>
               </a:rPr>
-              <a:t>4</a:t>
+              <a:t>290.1</a:t>
             </a:r>
             <a:pPr indent="0" marL="0">
               <a:buNone/>
@@ -3520,9 +3520,9 @@
                   <a:schemeClr val="tx2"/>
                 </a:solidFill>
               </a:rPr>
-              <a:t> 組</a:t>
-            </a:r>
-            <a:endParaRPr lang="en-US" sz="3000" dirty="0"/>
+              <a:t> m²</a:t>
+            </a:r>
+            <a:endParaRPr lang="en-US" sz="2600" dirty="0"/>
           </a:p>
         </p:txBody>
       </p:sp>
@@ -3534,8 +3534,8 @@
         </p:nvSpPr>
         <p:spPr>
           <a:xfrm>
-            <a:off x="8641080" y="2148840"/>
-            <a:ext cx="1234440" cy="594360"/>
+            <a:off x="8613648" y="2048256"/>
+            <a:ext cx="1280160" cy="347472"/>
           </a:xfrm>
           <a:prstGeom prst="rect">
             <a:avLst/>
@@ -3556,7 +3556,7 @@
                   <a:schemeClr val="tx1"/>
                 </a:solidFill>
               </a:rPr>
-              <a:t>體健設施新設</a:t>
+              <a:t>混凝土鋪面</a:t>
             </a:r>
             <a:endParaRPr lang="en-US" sz="1200" dirty="0"/>
           </a:p>
@@ -3571,11 +3571,11 @@
         <p:spPr>
           <a:xfrm>
             <a:off x="10104120" y="1371600"/>
-            <a:ext cx="1463040" cy="1481328"/>
+            <a:ext cx="1463040" cy="1115568"/>
           </a:xfrm>
           <a:prstGeom prst="roundRect">
             <a:avLst>
-              <a:gd name="adj" fmla="val 9375"/>
+              <a:gd name="adj" fmla="val 12295"/>
             </a:avLst>
           </a:prstGeom>
           <a:solidFill>
@@ -3594,8 +3594,8 @@
         </p:nvSpPr>
         <p:spPr>
           <a:xfrm>
-            <a:off x="10241280" y="1536192"/>
-            <a:ext cx="1234440" cy="548640"/>
+            <a:off x="10213848" y="1499616"/>
+            <a:ext cx="1280160" cy="502920"/>
           </a:xfrm>
           <a:prstGeom prst="rect">
             <a:avLst/>
@@ -3611,12 +3611,12 @@
               <a:buNone/>
             </a:pPr>
             <a:r>
-              <a:rPr lang="en-US" sz="3000" b="1" dirty="0">
+              <a:rPr lang="en-US" sz="2600" b="1" dirty="0">
                 <a:solidFill>
                   <a:schemeClr val="tx2"/>
                 </a:solidFill>
               </a:rPr>
-              <a:t>3</a:t>
+              <a:t>300.6</a:t>
             </a:r>
             <a:pPr indent="0" marL="0">
               <a:buNone/>
@@ -3627,9 +3627,9 @@
                   <a:schemeClr val="tx2"/>
                 </a:solidFill>
               </a:rPr>
-              <a:t> 組</a:t>
-            </a:r>
-            <a:endParaRPr lang="en-US" sz="3000" dirty="0"/>
+              <a:t> m²</a:t>
+            </a:r>
+            <a:endParaRPr lang="en-US" sz="2600" dirty="0"/>
           </a:p>
         </p:txBody>
       </p:sp>
@@ -3641,8 +3641,8 @@
         </p:nvSpPr>
         <p:spPr>
           <a:xfrm>
-            <a:off x="10241280" y="2148840"/>
-            <a:ext cx="1234440" cy="594360"/>
+            <a:off x="10213848" y="2048256"/>
+            <a:ext cx="1280160" cy="347472"/>
           </a:xfrm>
           <a:prstGeom prst="rect">
             <a:avLst/>
@@ -3663,7 +3663,7 @@
                   <a:schemeClr val="tx1"/>
                 </a:solidFill>
               </a:rPr>
-              <a:t>體健設施更新</a:t>
+              <a:t>鋪設地毯草</a:t>
             </a:r>
             <a:endParaRPr lang="en-US" sz="1200" dirty="0"/>
           </a:p>
@@ -3677,12 +3677,12 @@
         </p:nvSpPr>
         <p:spPr>
           <a:xfrm>
-            <a:off x="8503920" y="3035808"/>
-            <a:ext cx="1463040" cy="1481328"/>
+            <a:off x="8503920" y="2624328"/>
+            <a:ext cx="1463040" cy="1115568"/>
           </a:xfrm>
           <a:prstGeom prst="roundRect">
             <a:avLst>
-              <a:gd name="adj" fmla="val 9375"/>
+              <a:gd name="adj" fmla="val 12295"/>
             </a:avLst>
           </a:prstGeom>
           <a:solidFill>
@@ -3701,8 +3701,8 @@
         </p:nvSpPr>
         <p:spPr>
           <a:xfrm>
-            <a:off x="8641080" y="3200400"/>
-            <a:ext cx="1234440" cy="548640"/>
+            <a:off x="8613648" y="2752344"/>
+            <a:ext cx="1280160" cy="502920"/>
           </a:xfrm>
           <a:prstGeom prst="rect">
             <a:avLst/>
@@ -3718,12 +3718,12 @@
               <a:buNone/>
             </a:pPr>
             <a:r>
-              <a:rPr lang="en-US" sz="3000" b="1" dirty="0">
+              <a:rPr lang="en-US" sz="2600" b="1" dirty="0">
                 <a:solidFill>
                   <a:schemeClr val="tx2"/>
                 </a:solidFill>
               </a:rPr>
-              <a:t>9</a:t>
+              <a:t>53.4</a:t>
             </a:r>
             <a:pPr indent="0" marL="0">
               <a:buNone/>
@@ -3734,9 +3734,9 @@
                   <a:schemeClr val="tx2"/>
                 </a:solidFill>
               </a:rPr>
-              <a:t> 座</a:t>
-            </a:r>
-            <a:endParaRPr lang="en-US" sz="3000" dirty="0"/>
+              <a:t> m</a:t>
+            </a:r>
+            <a:endParaRPr lang="en-US" sz="2600" dirty="0"/>
           </a:p>
         </p:txBody>
       </p:sp>
@@ -3748,8 +3748,8 @@
         </p:nvSpPr>
         <p:spPr>
           <a:xfrm>
-            <a:off x="8641080" y="3813048"/>
-            <a:ext cx="1234440" cy="594360"/>
+            <a:off x="8613648" y="3300984"/>
+            <a:ext cx="1280160" cy="347472"/>
           </a:xfrm>
           <a:prstGeom prst="rect">
             <a:avLst/>
@@ -3770,7 +3770,7 @@
                   <a:schemeClr val="tx1"/>
                 </a:solidFill>
               </a:rPr>
-              <a:t>新設座椅</a:t>
+              <a:t>混凝土排水溝</a:t>
             </a:r>
             <a:endParaRPr lang="en-US" sz="1200" dirty="0"/>
           </a:p>
@@ -3784,12 +3784,12 @@
         </p:nvSpPr>
         <p:spPr>
           <a:xfrm>
-            <a:off x="10104120" y="3035808"/>
-            <a:ext cx="1463040" cy="1481328"/>
+            <a:off x="10104120" y="2624328"/>
+            <a:ext cx="1463040" cy="1115568"/>
           </a:xfrm>
           <a:prstGeom prst="roundRect">
             <a:avLst>
-              <a:gd name="adj" fmla="val 9375"/>
+              <a:gd name="adj" fmla="val 12295"/>
             </a:avLst>
           </a:prstGeom>
           <a:solidFill>
@@ -3808,8 +3808,8 @@
         </p:nvSpPr>
         <p:spPr>
           <a:xfrm>
-            <a:off x="10241280" y="3200400"/>
-            <a:ext cx="1234440" cy="548640"/>
+            <a:off x="10213848" y="2752344"/>
+            <a:ext cx="1280160" cy="502920"/>
           </a:xfrm>
           <a:prstGeom prst="rect">
             <a:avLst/>
@@ -3825,12 +3825,12 @@
               <a:buNone/>
             </a:pPr>
             <a:r>
-              <a:rPr lang="en-US" sz="3000" b="1" dirty="0">
+              <a:rPr lang="en-US" sz="2600" b="1" dirty="0">
                 <a:solidFill>
                   <a:schemeClr val="tx2"/>
                 </a:solidFill>
               </a:rPr>
-              <a:t>6</a:t>
+              <a:t>108.9</a:t>
             </a:r>
             <a:pPr indent="0" marL="0">
               <a:buNone/>
@@ -3841,9 +3841,9 @@
                   <a:schemeClr val="tx2"/>
                 </a:solidFill>
               </a:rPr>
-              <a:t> 組</a:t>
-            </a:r>
-            <a:endParaRPr lang="en-US" sz="3000" dirty="0"/>
+              <a:t> m</a:t>
+            </a:r>
+            <a:endParaRPr lang="en-US" sz="2600" dirty="0"/>
           </a:p>
         </p:txBody>
       </p:sp>
@@ -3855,8 +3855,8 @@
         </p:nvSpPr>
         <p:spPr>
           <a:xfrm>
-            <a:off x="10241280" y="3813048"/>
-            <a:ext cx="1234440" cy="594360"/>
+            <a:off x="10213848" y="3300984"/>
+            <a:ext cx="1280160" cy="347472"/>
           </a:xfrm>
           <a:prstGeom prst="rect">
             <a:avLst/>
@@ -3877,7 +3877,7 @@
                   <a:schemeClr val="tx1"/>
                 </a:solidFill>
               </a:rPr>
-              <a:t>既有座椅移置</a:t>
+              <a:t>HDPE透水網管</a:t>
             </a:r>
             <a:endParaRPr lang="en-US" sz="1200" dirty="0"/>
           </a:p>
@@ -3891,12 +3891,12 @@
         </p:nvSpPr>
         <p:spPr>
           <a:xfrm>
-            <a:off x="8503920" y="4700016"/>
-            <a:ext cx="1463040" cy="1481328"/>
+            <a:off x="8503920" y="3877056"/>
+            <a:ext cx="1463040" cy="1115568"/>
           </a:xfrm>
           <a:prstGeom prst="roundRect">
             <a:avLst>
-              <a:gd name="adj" fmla="val 9375"/>
+              <a:gd name="adj" fmla="val 12295"/>
             </a:avLst>
           </a:prstGeom>
           <a:solidFill>
@@ -3915,8 +3915,8 @@
         </p:nvSpPr>
         <p:spPr>
           <a:xfrm>
-            <a:off x="8641080" y="4864608"/>
-            <a:ext cx="1234440" cy="548640"/>
+            <a:off x="8613648" y="4005072"/>
+            <a:ext cx="1280160" cy="502920"/>
           </a:xfrm>
           <a:prstGeom prst="rect">
             <a:avLst/>
@@ -3932,12 +3932,12 @@
               <a:buNone/>
             </a:pPr>
             <a:r>
-              <a:rPr lang="en-US" sz="3000" b="1" dirty="0">
+              <a:rPr lang="en-US" sz="2600" b="1" dirty="0">
                 <a:solidFill>
                   <a:schemeClr val="tx2"/>
                 </a:solidFill>
               </a:rPr>
-              <a:t>55.7</a:t>
+              <a:t>4</a:t>
             </a:r>
             <a:pPr indent="0" marL="0">
               <a:buNone/>
@@ -3948,9 +3948,9 @@
                   <a:schemeClr val="tx2"/>
                 </a:solidFill>
               </a:rPr>
-              <a:t> m</a:t>
-            </a:r>
-            <a:endParaRPr lang="en-US" sz="3000" dirty="0"/>
+              <a:t> 座</a:t>
+            </a:r>
+            <a:endParaRPr lang="en-US" sz="2600" dirty="0"/>
           </a:p>
         </p:txBody>
       </p:sp>
@@ -3962,8 +3962,8 @@
         </p:nvSpPr>
         <p:spPr>
           <a:xfrm>
-            <a:off x="8641080" y="5477256"/>
-            <a:ext cx="1234440" cy="594360"/>
+            <a:off x="8613648" y="4553712"/>
+            <a:ext cx="1280160" cy="347472"/>
           </a:xfrm>
           <a:prstGeom prst="rect">
             <a:avLst/>
@@ -3984,7 +3984,7 @@
                   <a:schemeClr val="tx1"/>
                 </a:solidFill>
               </a:rPr>
-              <a:t>草皮分隔板</a:t>
+              <a:t>預鑄陰井</a:t>
             </a:r>
             <a:endParaRPr lang="en-US" sz="1200" dirty="0"/>
           </a:p>
@@ -3998,12 +3998,12 @@
         </p:nvSpPr>
         <p:spPr>
           <a:xfrm>
-            <a:off x="10104120" y="4700016"/>
-            <a:ext cx="1463040" cy="1481328"/>
+            <a:off x="10104120" y="3877056"/>
+            <a:ext cx="1463040" cy="1115568"/>
           </a:xfrm>
           <a:prstGeom prst="roundRect">
             <a:avLst>
-              <a:gd name="adj" fmla="val 9375"/>
+              <a:gd name="adj" fmla="val 12295"/>
             </a:avLst>
           </a:prstGeom>
           <a:solidFill>
@@ -4022,8 +4022,8 @@
         </p:nvSpPr>
         <p:spPr>
           <a:xfrm>
-            <a:off x="10241280" y="4864608"/>
-            <a:ext cx="1234440" cy="548640"/>
+            <a:off x="10213848" y="4005072"/>
+            <a:ext cx="1280160" cy="502920"/>
           </a:xfrm>
           <a:prstGeom prst="rect">
             <a:avLst/>
@@ -4039,12 +4039,12 @@
               <a:buNone/>
             </a:pPr>
             <a:r>
-              <a:rPr lang="en-US" sz="3000" b="1" dirty="0">
+              <a:rPr lang="en-US" sz="2600" b="1" dirty="0">
                 <a:solidFill>
                   <a:schemeClr val="tx2"/>
                 </a:solidFill>
               </a:rPr>
-              <a:t>1</a:t>
+              <a:t>7</a:t>
             </a:r>
             <a:pPr indent="0" marL="0">
               <a:buNone/>
@@ -4055,9 +4055,9 @@
                   <a:schemeClr val="tx2"/>
                 </a:solidFill>
               </a:rPr>
-              <a:t> 株</a:t>
-            </a:r>
-            <a:endParaRPr lang="en-US" sz="3000" dirty="0"/>
+              <a:t> 組</a:t>
+            </a:r>
+            <a:endParaRPr lang="en-US" sz="2600" dirty="0"/>
           </a:p>
         </p:txBody>
       </p:sp>
@@ -4069,8 +4069,8 @@
         </p:nvSpPr>
         <p:spPr>
           <a:xfrm>
-            <a:off x="10241280" y="5477256"/>
-            <a:ext cx="1234440" cy="594360"/>
+            <a:off x="10213848" y="4553712"/>
+            <a:ext cx="1280160" cy="347472"/>
           </a:xfrm>
           <a:prstGeom prst="rect">
             <a:avLst/>
@@ -4091,10 +4091,103 @@
                   <a:schemeClr val="tx1"/>
                 </a:solidFill>
               </a:rPr>
-              <a:t>保留珍貴樹木</a:t>
+              <a:t>體健設施</a:t>
             </a:r>
             <a:endParaRPr lang="en-US" sz="1200" dirty="0"/>
           </a:p>
+        </p:txBody>
+      </p:sp>
+      <p:sp>
+        <p:nvSpPr>
+          <p:cNvPr id="24" name="stat card 7"/>
+          <p:cNvSpPr/>
+          <p:nvPr/>
+        </p:nvSpPr>
+        <p:spPr>
+          <a:xfrm>
+            <a:off x="8503920" y="5129784"/>
+            <a:ext cx="1463040" cy="1115568"/>
+          </a:xfrm>
+          <a:prstGeom prst="roundRect">
+            <a:avLst>
+              <a:gd name="adj" fmla="val 12295"/>
+            </a:avLst>
+          </a:prstGeom>
+          <a:solidFill>
+            <a:schemeClr val="accent1">
+              <a:alpha val="35000"/>
+            </a:schemeClr>
+          </a:solidFill>
+          <a:ln/>
+        </p:spPr>
+      </p:sp>
+      <p:sp>
+        <p:nvSpPr>
+          <p:cNvPr id="25" name="stat value 7"/>
+          <p:cNvSpPr txBox="1"/>
+          <p:nvPr/>
+        </p:nvSpPr>
+        <p:spPr>
+          <a:xfrm>
+            <a:off x="8613648" y="5257800"/>
+            <a:ext cx="1280160" cy="502920"/>
+          </a:xfrm>
+          <a:prstGeom prst="rect">
+            <a:avLst/>
+          </a:prstGeom>
+          <a:noFill/>
+          <a:ln/>
+        </p:spPr>
+        <p:txBody>
+          <a:bodyPr wrap="square" lIns="0" tIns="0" rIns="0" bIns="0" rtlCol="0" anchor="ctr"/>
+          <a:lstStyle/>
+          <a:p>
+            <a:pPr indent="0" marL="0">
+              <a:buNone/>
+            </a:pPr>
+            <a:r>
+              <a:rPr lang="en-US" sz="2600" b="1" dirty="0">
+                <a:solidFill>
+                  <a:schemeClr val="tx2"/>
+                </a:solidFill>
+              </a:rPr>
+              <a:t>9</a:t>
+            </a:r>
+            <a:pPr indent="0" marL="0">
+              <a:buNone/>
+            </a:pPr>
+            <a:r>
+              <a:rPr lang="en-US" sz="1300" dirty="0">
+                <a:solidFill>
+                  <a:schemeClr val="tx2"/>
+                </a:solidFill>
+              </a:rPr>
+              <a:t> 座</a:t>
+            </a:r>
+            <a:endParaRPr lang="en-US" sz="2600" dirty="0"/>
+          </a:p>
+        </p:txBody>
+      </p:sp>
+      <p:sp>
+        <p:nvSpPr>
+          <p:cNvPr id="26" name="stat label 7"/>
+          <p:cNvSpPr txBox="1"/>
+          <p:nvPr/>
+        </p:nvSpPr>
+        <p:spPr>
+          <a:xfrm>
+            <a:off x="8613648" y="5806440"/>
+            <a:ext cx="1280160" cy="347472"/>
+          </a:xfrm>
+          <a:prstGeom prst="rect">
+            <a:avLst/>
+          </a:prstGeom>
+          <a:noFill/>
+          <a:ln/>
+        </p:spPr>
+        <p:txBody>
+          <a:bodyPr wrap="square" lIns="0" tIns="0" rIns="0" bIns="0" rtlCol="0" anchor="t"/>
+          <a:lstStyle/>
           <a:p>
             <a:pPr indent="0" marL="0">
               <a:buNone/>
@@ -4105,7 +4198,114 @@
                   <a:schemeClr val="tx1"/>
                 </a:solidFill>
               </a:rPr>
-              <a:t>榕樹(編號259)</a:t>
+              <a:t>塑木靠背座椅</a:t>
+            </a:r>
+            <a:endParaRPr lang="en-US" sz="1200" dirty="0"/>
+          </a:p>
+        </p:txBody>
+      </p:sp>
+      <p:sp>
+        <p:nvSpPr>
+          <p:cNvPr id="27" name="stat card 8"/>
+          <p:cNvSpPr/>
+          <p:nvPr/>
+        </p:nvSpPr>
+        <p:spPr>
+          <a:xfrm>
+            <a:off x="10104120" y="5129784"/>
+            <a:ext cx="1463040" cy="1115568"/>
+          </a:xfrm>
+          <a:prstGeom prst="roundRect">
+            <a:avLst>
+              <a:gd name="adj" fmla="val 12295"/>
+            </a:avLst>
+          </a:prstGeom>
+          <a:solidFill>
+            <a:schemeClr val="accent2">
+              <a:alpha val="35000"/>
+            </a:schemeClr>
+          </a:solidFill>
+          <a:ln/>
+        </p:spPr>
+      </p:sp>
+      <p:sp>
+        <p:nvSpPr>
+          <p:cNvPr id="28" name="stat value 8"/>
+          <p:cNvSpPr txBox="1"/>
+          <p:nvPr/>
+        </p:nvSpPr>
+        <p:spPr>
+          <a:xfrm>
+            <a:off x="10213848" y="5257800"/>
+            <a:ext cx="1280160" cy="502920"/>
+          </a:xfrm>
+          <a:prstGeom prst="rect">
+            <a:avLst/>
+          </a:prstGeom>
+          <a:noFill/>
+          <a:ln/>
+        </p:spPr>
+        <p:txBody>
+          <a:bodyPr wrap="square" lIns="0" tIns="0" rIns="0" bIns="0" rtlCol="0" anchor="ctr"/>
+          <a:lstStyle/>
+          <a:p>
+            <a:pPr indent="0" marL="0">
+              <a:buNone/>
+            </a:pPr>
+            <a:r>
+              <a:rPr lang="en-US" sz="2600" b="1" dirty="0">
+                <a:solidFill>
+                  <a:schemeClr val="tx2"/>
+                </a:solidFill>
+              </a:rPr>
+              <a:t>48.5</a:t>
+            </a:r>
+            <a:pPr indent="0" marL="0">
+              <a:buNone/>
+            </a:pPr>
+            <a:r>
+              <a:rPr lang="en-US" sz="1300" dirty="0">
+                <a:solidFill>
+                  <a:schemeClr val="tx2"/>
+                </a:solidFill>
+              </a:rPr>
+              <a:t> m²</a:t>
+            </a:r>
+            <a:endParaRPr lang="en-US" sz="2600" dirty="0"/>
+          </a:p>
+        </p:txBody>
+      </p:sp>
+      <p:sp>
+        <p:nvSpPr>
+          <p:cNvPr id="29" name="stat label 8"/>
+          <p:cNvSpPr txBox="1"/>
+          <p:nvPr/>
+        </p:nvSpPr>
+        <p:spPr>
+          <a:xfrm>
+            <a:off x="10213848" y="5806440"/>
+            <a:ext cx="1280160" cy="347472"/>
+          </a:xfrm>
+          <a:prstGeom prst="rect">
+            <a:avLst/>
+          </a:prstGeom>
+          <a:noFill/>
+          <a:ln/>
+        </p:spPr>
+        <p:txBody>
+          <a:bodyPr wrap="square" lIns="0" tIns="0" rIns="0" bIns="0" rtlCol="0" anchor="t"/>
+          <a:lstStyle/>
+          <a:p>
+            <a:pPr indent="0" marL="0">
+              <a:buNone/>
+            </a:pPr>
+            <a:r>
+              <a:rPr lang="en-US" sz="1200" dirty="0">
+                <a:solidFill>
+                  <a:schemeClr val="tx1"/>
+                </a:solidFill>
+              </a:rPr>
+              <a:t>廁所外牆油漆</a:t>
             </a:r>
             <a:endParaRPr lang="en-US" sz="1200" dirty="0"/>
           </a:p>
@@ -4296,7 +4496,7 @@
             </a:avLst>
           </a:prstGeom>
           <a:solidFill>
-            <a:schemeClr val="accent4">
+            <a:schemeClr val="accent3">
               <a:alpha val="20000"/>
             </a:schemeClr>
           </a:solidFill>
@@ -4793,7 +4993,7 @@
                   <a:schemeClr val="tx1"/>
                 </a:solidFill>
               </a:rPr>
-              <a:t>新植喬木、設置造型座椅</a:t>
+              <a:t>新植喬木、新設造型座椅</a:t>
             </a:r>
             <a:endParaRPr lang="en-US" sz="1500" dirty="0"/>
           </a:p>
@@ -4885,7 +5085,7 @@
                   <a:schemeClr val="tx1"/>
                 </a:solidFill>
               </a:rPr>
-              <a:t>汲水設施改設造型花台</a:t>
+              <a:t>新設清水紅磚造型花台</a:t>
             </a:r>
             <a:endParaRPr lang="en-US" sz="1500" dirty="0"/>
           </a:p>
@@ -4993,7 +5193,7 @@
                   <a:schemeClr val="tx2"/>
                 </a:solidFill>
               </a:rPr>
-              <a:t>工區二 兒一公園｜平面配置與施作項目</a:t>
+              <a:t>工區二 兒一公園｜平面配置與施作數量</a:t>
             </a:r>
             <a:endParaRPr lang="en-US" sz="3200" dirty="0"/>
           </a:p>
@@ -5020,7 +5220,7 @@
           </a:solidFill>
           <a:ln w="19050">
             <a:solidFill>
-              <a:schemeClr val="accent4"/>
+              <a:schemeClr val="accent3"/>
             </a:solidFill>
             <a:prstDash val="solid"/>
           </a:ln>
@@ -5095,11 +5295,118 @@
         <p:spPr>
           <a:xfrm>
             <a:off x="8503920" y="1371600"/>
-            <a:ext cx="1463040" cy="1481328"/>
+            <a:ext cx="1463040" cy="1115568"/>
           </a:xfrm>
           <a:prstGeom prst="roundRect">
             <a:avLst>
-              <a:gd name="adj" fmla="val 9375"/>
+              <a:gd name="adj" fmla="val 12295"/>
+            </a:avLst>
+          </a:prstGeom>
+          <a:solidFill>
+            <a:schemeClr val="accent3">
+              <a:alpha val="35000"/>
+            </a:schemeClr>
+          </a:solidFill>
+          <a:ln/>
+        </p:spPr>
+      </p:sp>
+      <p:sp>
+        <p:nvSpPr>
+          <p:cNvPr id="7" name="stat value 1"/>
+          <p:cNvSpPr txBox="1"/>
+          <p:nvPr/>
+        </p:nvSpPr>
+        <p:spPr>
+          <a:xfrm>
+            <a:off x="8613648" y="1499616"/>
+            <a:ext cx="1280160" cy="502920"/>
+          </a:xfrm>
+          <a:prstGeom prst="rect">
+            <a:avLst/>
+          </a:prstGeom>
+          <a:noFill/>
+          <a:ln/>
+        </p:spPr>
+        <p:txBody>
+          <a:bodyPr wrap="square" lIns="0" tIns="0" rIns="0" bIns="0" rtlCol="0" anchor="ctr"/>
+          <a:lstStyle/>
+          <a:p>
+            <a:pPr indent="0" marL="0">
+              <a:buNone/>
+            </a:pPr>
+            <a:r>
+              <a:rPr lang="en-US" sz="2600" b="1" dirty="0">
+                <a:solidFill>
+                  <a:schemeClr val="tx2"/>
+                </a:solidFill>
+              </a:rPr>
+              <a:t>214.1</a:t>
+            </a:r>
+            <a:pPr indent="0" marL="0">
+              <a:buNone/>
+            </a:pPr>
+            <a:r>
+              <a:rPr lang="en-US" sz="1300" dirty="0">
+                <a:solidFill>
+                  <a:schemeClr val="tx2"/>
+                </a:solidFill>
+              </a:rPr>
+              <a:t> m²</a:t>
+            </a:r>
+            <a:endParaRPr lang="en-US" sz="2600" dirty="0"/>
+          </a:p>
+        </p:txBody>
+      </p:sp>
+      <p:sp>
+        <p:nvSpPr>
+          <p:cNvPr id="8" name="stat label 1"/>
+          <p:cNvSpPr txBox="1"/>
+          <p:nvPr/>
+        </p:nvSpPr>
+        <p:spPr>
+          <a:xfrm>
+            <a:off x="8613648" y="2048256"/>
+            <a:ext cx="1280160" cy="347472"/>
+          </a:xfrm>
+          <a:prstGeom prst="rect">
+            <a:avLst/>
+          </a:prstGeom>
+          <a:noFill/>
+          <a:ln/>
+        </p:spPr>
+        <p:txBody>
+          <a:bodyPr wrap="square" lIns="0" tIns="0" rIns="0" bIns="0" rtlCol="0" anchor="t"/>
+          <a:lstStyle/>
+          <a:p>
+            <a:pPr indent="0" marL="0">
+              <a:buNone/>
+            </a:pPr>
+            <a:r>
+              <a:rPr lang="en-US" sz="1200" dirty="0">
+                <a:solidFill>
+                  <a:schemeClr val="tx1"/>
+                </a:solidFill>
+              </a:rPr>
+              <a:t>混凝土鋪面</a:t>
+            </a:r>
+            <a:endParaRPr lang="en-US" sz="1200" dirty="0"/>
+          </a:p>
+        </p:txBody>
+      </p:sp>
+      <p:sp>
+        <p:nvSpPr>
+          <p:cNvPr id="9" name="stat card 2"/>
+          <p:cNvSpPr/>
+          <p:nvPr/>
+        </p:nvSpPr>
+        <p:spPr>
+          <a:xfrm>
+            <a:off x="10104120" y="1371600"/>
+            <a:ext cx="1463040" cy="1115568"/>
+          </a:xfrm>
+          <a:prstGeom prst="roundRect">
+            <a:avLst>
+              <a:gd name="adj" fmla="val 12295"/>
             </a:avLst>
           </a:prstGeom>
           <a:solidFill>
@@ -5112,14 +5419,14 @@
       </p:sp>
       <p:sp>
         <p:nvSpPr>
-          <p:cNvPr id="7" name="stat value 1"/>
-          <p:cNvSpPr txBox="1"/>
-          <p:nvPr/>
-        </p:nvSpPr>
-        <p:spPr>
-          <a:xfrm>
-            <a:off x="8641080" y="1536192"/>
-            <a:ext cx="1234440" cy="548640"/>
+          <p:cNvPr id="10" name="stat value 2"/>
+          <p:cNvSpPr txBox="1"/>
+          <p:nvPr/>
+        </p:nvSpPr>
+        <p:spPr>
+          <a:xfrm>
+            <a:off x="10213848" y="1499616"/>
+            <a:ext cx="1280160" cy="502920"/>
           </a:xfrm>
           <a:prstGeom prst="rect">
             <a:avLst/>
@@ -5135,12 +5442,12 @@
               <a:buNone/>
             </a:pPr>
             <a:r>
-              <a:rPr lang="en-US" sz="3000" b="1" dirty="0">
+              <a:rPr lang="en-US" sz="2600" b="1" dirty="0">
                 <a:solidFill>
                   <a:schemeClr val="tx2"/>
                 </a:solidFill>
               </a:rPr>
-              <a:t>4</a:t>
+              <a:t>114</a:t>
             </a:r>
             <a:pPr indent="0" marL="0">
               <a:buNone/>
@@ -5151,22 +5458,22 @@
                   <a:schemeClr val="tx2"/>
                 </a:solidFill>
               </a:rPr>
-              <a:t> 株</a:t>
-            </a:r>
-            <a:endParaRPr lang="en-US" sz="3000" dirty="0"/>
-          </a:p>
-        </p:txBody>
-      </p:sp>
-      <p:sp>
-        <p:nvSpPr>
-          <p:cNvPr id="8" name="stat label 1"/>
-          <p:cNvSpPr txBox="1"/>
-          <p:nvPr/>
-        </p:nvSpPr>
-        <p:spPr>
-          <a:xfrm>
-            <a:off x="8641080" y="2148840"/>
-            <a:ext cx="1234440" cy="594360"/>
+              <a:t> m²</a:t>
+            </a:r>
+            <a:endParaRPr lang="en-US" sz="2600" dirty="0"/>
+          </a:p>
+        </p:txBody>
+      </p:sp>
+      <p:sp>
+        <p:nvSpPr>
+          <p:cNvPr id="11" name="stat label 2"/>
+          <p:cNvSpPr txBox="1"/>
+          <p:nvPr/>
+        </p:nvSpPr>
+        <p:spPr>
+          <a:xfrm>
+            <a:off x="10213848" y="2048256"/>
+            <a:ext cx="1280160" cy="347472"/>
           </a:xfrm>
           <a:prstGeom prst="rect">
             <a:avLst/>
@@ -5187,40 +5494,26 @@
                   <a:schemeClr val="tx1"/>
                 </a:solidFill>
               </a:rPr>
-              <a:t>新植喬木</a:t>
+              <a:t>噴花地坪</a:t>
             </a:r>
             <a:endParaRPr lang="en-US" sz="1200" dirty="0"/>
           </a:p>
-          <a:p>
-            <a:pPr indent="0" marL="0">
-              <a:buNone/>
-            </a:pPr>
-            <a:r>
-              <a:rPr lang="en-US" sz="1200" dirty="0">
-                <a:solidFill>
-                  <a:schemeClr val="tx1"/>
-                </a:solidFill>
-              </a:rPr>
-              <a:t>緬梔1、光臘樹3</a:t>
-            </a:r>
-            <a:endParaRPr lang="en-US" sz="1200" dirty="0"/>
-          </a:p>
-        </p:txBody>
-      </p:sp>
-      <p:sp>
-        <p:nvSpPr>
-          <p:cNvPr id="9" name="stat card 2"/>
+        </p:txBody>
+      </p:sp>
+      <p:sp>
+        <p:nvSpPr>
+          <p:cNvPr id="12" name="stat card 3"/>
           <p:cNvSpPr/>
           <p:nvPr/>
         </p:nvSpPr>
         <p:spPr>
           <a:xfrm>
-            <a:off x="10104120" y="1371600"/>
-            <a:ext cx="1463040" cy="1481328"/>
+            <a:off x="8503920" y="2624328"/>
+            <a:ext cx="1463040" cy="1115568"/>
           </a:xfrm>
           <a:prstGeom prst="roundRect">
             <a:avLst>
-              <a:gd name="adj" fmla="val 9375"/>
+              <a:gd name="adj" fmla="val 12295"/>
             </a:avLst>
           </a:prstGeom>
           <a:solidFill>
@@ -5233,14 +5526,14 @@
       </p:sp>
       <p:sp>
         <p:nvSpPr>
-          <p:cNvPr id="10" name="stat value 2"/>
-          <p:cNvSpPr txBox="1"/>
-          <p:nvPr/>
-        </p:nvSpPr>
-        <p:spPr>
-          <a:xfrm>
-            <a:off x="10241280" y="1536192"/>
-            <a:ext cx="1234440" cy="548640"/>
+          <p:cNvPr id="13" name="stat value 3"/>
+          <p:cNvSpPr txBox="1"/>
+          <p:nvPr/>
+        </p:nvSpPr>
+        <p:spPr>
+          <a:xfrm>
+            <a:off x="8613648" y="2752344"/>
+            <a:ext cx="1280160" cy="502920"/>
           </a:xfrm>
           <a:prstGeom prst="rect">
             <a:avLst/>
@@ -5256,12 +5549,12 @@
               <a:buNone/>
             </a:pPr>
             <a:r>
-              <a:rPr lang="en-US" sz="3000" b="1" dirty="0">
+              <a:rPr lang="en-US" sz="2600" b="1" dirty="0">
                 <a:solidFill>
                   <a:schemeClr val="tx2"/>
                 </a:solidFill>
               </a:rPr>
-              <a:t>1</a:t>
+              <a:t>121.9</a:t>
             </a:r>
             <a:pPr indent="0" marL="0">
               <a:buNone/>
@@ -5272,22 +5565,22 @@
                   <a:schemeClr val="tx2"/>
                 </a:solidFill>
               </a:rPr>
-              <a:t> 組</a:t>
-            </a:r>
-            <a:endParaRPr lang="en-US" sz="3000" dirty="0"/>
-          </a:p>
-        </p:txBody>
-      </p:sp>
-      <p:sp>
-        <p:nvSpPr>
-          <p:cNvPr id="11" name="stat label 2"/>
-          <p:cNvSpPr txBox="1"/>
-          <p:nvPr/>
-        </p:nvSpPr>
-        <p:spPr>
-          <a:xfrm>
-            <a:off x="10241280" y="2148840"/>
-            <a:ext cx="1234440" cy="594360"/>
+              <a:t> m²</a:t>
+            </a:r>
+            <a:endParaRPr lang="en-US" sz="2600" dirty="0"/>
+          </a:p>
+        </p:txBody>
+      </p:sp>
+      <p:sp>
+        <p:nvSpPr>
+          <p:cNvPr id="14" name="stat label 3"/>
+          <p:cNvSpPr txBox="1"/>
+          <p:nvPr/>
+        </p:nvSpPr>
+        <p:spPr>
+          <a:xfrm>
+            <a:off x="8613648" y="3300984"/>
+            <a:ext cx="1280160" cy="347472"/>
           </a:xfrm>
           <a:prstGeom prst="rect">
             <a:avLst/>
@@ -5308,7 +5601,7 @@
                   <a:schemeClr val="tx1"/>
                 </a:solidFill>
               </a:rPr>
-              <a:t>新設造型座椅</a:t>
+              <a:t>鋪設地毯草</a:t>
             </a:r>
             <a:endParaRPr lang="en-US" sz="1200" dirty="0"/>
           </a:p>
@@ -5316,18 +5609,18 @@
       </p:sp>
       <p:sp>
         <p:nvSpPr>
-          <p:cNvPr id="12" name="stat card 3"/>
+          <p:cNvPr id="15" name="stat card 4"/>
           <p:cNvSpPr/>
           <p:nvPr/>
         </p:nvSpPr>
         <p:spPr>
           <a:xfrm>
-            <a:off x="8503920" y="3035808"/>
-            <a:ext cx="1463040" cy="1481328"/>
+            <a:off x="10104120" y="2624328"/>
+            <a:ext cx="1463040" cy="1115568"/>
           </a:xfrm>
           <a:prstGeom prst="roundRect">
             <a:avLst>
-              <a:gd name="adj" fmla="val 9375"/>
+              <a:gd name="adj" fmla="val 12295"/>
             </a:avLst>
           </a:prstGeom>
           <a:solidFill>
@@ -5340,14 +5633,14 @@
       </p:sp>
       <p:sp>
         <p:nvSpPr>
-          <p:cNvPr id="13" name="stat value 3"/>
-          <p:cNvSpPr txBox="1"/>
-          <p:nvPr/>
-        </p:nvSpPr>
-        <p:spPr>
-          <a:xfrm>
-            <a:off x="8641080" y="3200400"/>
-            <a:ext cx="1234440" cy="548640"/>
+          <p:cNvPr id="16" name="stat value 4"/>
+          <p:cNvSpPr txBox="1"/>
+          <p:nvPr/>
+        </p:nvSpPr>
+        <p:spPr>
+          <a:xfrm>
+            <a:off x="10213848" y="2752344"/>
+            <a:ext cx="1280160" cy="502920"/>
           </a:xfrm>
           <a:prstGeom prst="rect">
             <a:avLst/>
@@ -5363,12 +5656,12 @@
               <a:buNone/>
             </a:pPr>
             <a:r>
-              <a:rPr lang="en-US" sz="3000" b="1" dirty="0">
+              <a:rPr lang="en-US" sz="2600" b="1" dirty="0">
                 <a:solidFill>
                   <a:schemeClr val="tx2"/>
                 </a:solidFill>
               </a:rPr>
-              <a:t>1</a:t>
+              <a:t>57.6</a:t>
             </a:r>
             <a:pPr indent="0" marL="0">
               <a:buNone/>
@@ -5379,22 +5672,22 @@
                   <a:schemeClr val="tx2"/>
                 </a:solidFill>
               </a:rPr>
-              <a:t> 座</a:t>
-            </a:r>
-            <a:endParaRPr lang="en-US" sz="3000" dirty="0"/>
-          </a:p>
-        </p:txBody>
-      </p:sp>
-      <p:sp>
-        <p:nvSpPr>
-          <p:cNvPr id="14" name="stat label 3"/>
-          <p:cNvSpPr txBox="1"/>
-          <p:nvPr/>
-        </p:nvSpPr>
-        <p:spPr>
-          <a:xfrm>
-            <a:off x="8641080" y="3813048"/>
-            <a:ext cx="1234440" cy="594360"/>
+              <a:t> m</a:t>
+            </a:r>
+            <a:endParaRPr lang="en-US" sz="2600" dirty="0"/>
+          </a:p>
+        </p:txBody>
+      </p:sp>
+      <p:sp>
+        <p:nvSpPr>
+          <p:cNvPr id="17" name="stat label 4"/>
+          <p:cNvSpPr txBox="1"/>
+          <p:nvPr/>
+        </p:nvSpPr>
+        <p:spPr>
+          <a:xfrm>
+            <a:off x="10213848" y="3300984"/>
+            <a:ext cx="1280160" cy="347472"/>
           </a:xfrm>
           <a:prstGeom prst="rect">
             <a:avLst/>
@@ -5415,7 +5708,7 @@
                   <a:schemeClr val="tx1"/>
                 </a:solidFill>
               </a:rPr>
-              <a:t>清水磚造型花台</a:t>
+              <a:t>透水溝</a:t>
             </a:r>
             <a:endParaRPr lang="en-US" sz="1200" dirty="0"/>
           </a:p>
@@ -5423,18 +5716,18 @@
       </p:sp>
       <p:sp>
         <p:nvSpPr>
-          <p:cNvPr id="15" name="stat card 4"/>
+          <p:cNvPr id="18" name="stat card 5"/>
           <p:cNvSpPr/>
           <p:nvPr/>
         </p:nvSpPr>
         <p:spPr>
           <a:xfrm>
-            <a:off x="10104120" y="3035808"/>
-            <a:ext cx="1463040" cy="1481328"/>
+            <a:off x="8503920" y="3877056"/>
+            <a:ext cx="1463040" cy="1115568"/>
           </a:xfrm>
           <a:prstGeom prst="roundRect">
             <a:avLst>
-              <a:gd name="adj" fmla="val 9375"/>
+              <a:gd name="adj" fmla="val 12295"/>
             </a:avLst>
           </a:prstGeom>
           <a:solidFill>
@@ -5447,14 +5740,14 @@
       </p:sp>
       <p:sp>
         <p:nvSpPr>
-          <p:cNvPr id="16" name="stat value 4"/>
-          <p:cNvSpPr txBox="1"/>
-          <p:nvPr/>
-        </p:nvSpPr>
-        <p:spPr>
-          <a:xfrm>
-            <a:off x="10241280" y="3200400"/>
-            <a:ext cx="1234440" cy="548640"/>
+          <p:cNvPr id="19" name="stat value 5"/>
+          <p:cNvSpPr txBox="1"/>
+          <p:nvPr/>
+        </p:nvSpPr>
+        <p:spPr>
+          <a:xfrm>
+            <a:off x="8613648" y="4005072"/>
+            <a:ext cx="1280160" cy="502920"/>
           </a:xfrm>
           <a:prstGeom prst="rect">
             <a:avLst/>
@@ -5470,12 +5763,12 @@
               <a:buNone/>
             </a:pPr>
             <a:r>
-              <a:rPr lang="en-US" sz="3000" b="1" dirty="0">
+              <a:rPr lang="en-US" sz="2600" b="1" dirty="0">
                 <a:solidFill>
                   <a:schemeClr val="tx2"/>
                 </a:solidFill>
               </a:rPr>
-              <a:t>1</a:t>
+              <a:t>77.25</a:t>
             </a:r>
             <a:pPr indent="0" marL="0">
               <a:buNone/>
@@ -5486,22 +5779,22 @@
                   <a:schemeClr val="tx2"/>
                 </a:solidFill>
               </a:rPr>
-              <a:t> 式</a:t>
-            </a:r>
-            <a:endParaRPr lang="en-US" sz="3000" dirty="0"/>
-          </a:p>
-        </p:txBody>
-      </p:sp>
-      <p:sp>
-        <p:nvSpPr>
-          <p:cNvPr id="17" name="stat label 4"/>
-          <p:cNvSpPr txBox="1"/>
-          <p:nvPr/>
-        </p:nvSpPr>
-        <p:spPr>
-          <a:xfrm>
-            <a:off x="10241280" y="3813048"/>
-            <a:ext cx="1234440" cy="594360"/>
+              <a:t> m</a:t>
+            </a:r>
+            <a:endParaRPr lang="en-US" sz="2600" dirty="0"/>
+          </a:p>
+        </p:txBody>
+      </p:sp>
+      <p:sp>
+        <p:nvSpPr>
+          <p:cNvPr id="20" name="stat label 5"/>
+          <p:cNvSpPr txBox="1"/>
+          <p:nvPr/>
+        </p:nvSpPr>
+        <p:spPr>
+          <a:xfrm>
+            <a:off x="8613648" y="4553712"/>
+            <a:ext cx="1280160" cy="347472"/>
           </a:xfrm>
           <a:prstGeom prst="rect">
             <a:avLst/>
@@ -5522,7 +5815,7 @@
                   <a:schemeClr val="tx1"/>
                 </a:solidFill>
               </a:rPr>
-              <a:t>樹穴系統</a:t>
+              <a:t>塑木圍籬</a:t>
             </a:r>
             <a:endParaRPr lang="en-US" sz="1200" dirty="0"/>
           </a:p>
@@ -5530,18 +5823,18 @@
       </p:sp>
       <p:sp>
         <p:nvSpPr>
-          <p:cNvPr id="18" name="stat card 5"/>
+          <p:cNvPr id="21" name="stat card 6"/>
           <p:cNvSpPr/>
           <p:nvPr/>
         </p:nvSpPr>
         <p:spPr>
           <a:xfrm>
-            <a:off x="8503920" y="4700016"/>
-            <a:ext cx="1463040" cy="1481328"/>
+            <a:off x="10104120" y="3877056"/>
+            <a:ext cx="1463040" cy="1115568"/>
           </a:xfrm>
           <a:prstGeom prst="roundRect">
             <a:avLst>
-              <a:gd name="adj" fmla="val 9375"/>
+              <a:gd name="adj" fmla="val 12295"/>
             </a:avLst>
           </a:prstGeom>
           <a:solidFill>
@@ -5554,14 +5847,14 @@
       </p:sp>
       <p:sp>
         <p:nvSpPr>
-          <p:cNvPr id="19" name="stat value 5"/>
-          <p:cNvSpPr txBox="1"/>
-          <p:nvPr/>
-        </p:nvSpPr>
-        <p:spPr>
-          <a:xfrm>
-            <a:off x="8641080" y="4864608"/>
-            <a:ext cx="1234440" cy="548640"/>
+          <p:cNvPr id="22" name="stat value 6"/>
+          <p:cNvSpPr txBox="1"/>
+          <p:nvPr/>
+        </p:nvSpPr>
+        <p:spPr>
+          <a:xfrm>
+            <a:off x="10213848" y="4005072"/>
+            <a:ext cx="1280160" cy="502920"/>
           </a:xfrm>
           <a:prstGeom prst="rect">
             <a:avLst/>
@@ -5577,7 +5870,7 @@
               <a:buNone/>
             </a:pPr>
             <a:r>
-              <a:rPr lang="en-US" sz="3000" b="1" dirty="0">
+              <a:rPr lang="en-US" sz="2600" b="1" dirty="0">
                 <a:solidFill>
                   <a:schemeClr val="tx2"/>
                 </a:solidFill>
@@ -5593,22 +5886,22 @@
                   <a:schemeClr val="tx2"/>
                 </a:solidFill>
               </a:rPr>
-              <a:t> 型</a:t>
-            </a:r>
-            <a:endParaRPr lang="en-US" sz="3000" dirty="0"/>
-          </a:p>
-        </p:txBody>
-      </p:sp>
-      <p:sp>
-        <p:nvSpPr>
-          <p:cNvPr id="20" name="stat label 5"/>
-          <p:cNvSpPr txBox="1"/>
-          <p:nvPr/>
-        </p:nvSpPr>
-        <p:spPr>
-          <a:xfrm>
-            <a:off x="8641080" y="5477256"/>
-            <a:ext cx="1234440" cy="594360"/>
+              <a:t> 座</a:t>
+            </a:r>
+            <a:endParaRPr lang="en-US" sz="2600" dirty="0"/>
+          </a:p>
+        </p:txBody>
+      </p:sp>
+      <p:sp>
+        <p:nvSpPr>
+          <p:cNvPr id="23" name="stat label 6"/>
+          <p:cNvSpPr txBox="1"/>
+          <p:nvPr/>
+        </p:nvSpPr>
+        <p:spPr>
+          <a:xfrm>
+            <a:off x="10213848" y="4553712"/>
+            <a:ext cx="1280160" cy="347472"/>
           </a:xfrm>
           <a:prstGeom prst="rect">
             <a:avLst/>
@@ -5629,40 +5922,26 @@
                   <a:schemeClr val="tx1"/>
                 </a:solidFill>
               </a:rPr>
-              <a:t>新設木圍籬</a:t>
+              <a:t>預鑄陰井</a:t>
             </a:r>
             <a:endParaRPr lang="en-US" sz="1200" dirty="0"/>
           </a:p>
-          <a:p>
-            <a:pPr indent="0" marL="0">
-              <a:buNone/>
-            </a:pPr>
-            <a:r>
-              <a:rPr lang="en-US" sz="1200" dirty="0">
-                <a:solidFill>
-                  <a:schemeClr val="tx1"/>
-                </a:solidFill>
-              </a:rPr>
-              <a:t>TYPE-A/B/C</a:t>
-            </a:r>
-            <a:endParaRPr lang="en-US" sz="1200" dirty="0"/>
-          </a:p>
-        </p:txBody>
-      </p:sp>
-      <p:sp>
-        <p:nvSpPr>
-          <p:cNvPr id="21" name="stat card 6"/>
+        </p:txBody>
+      </p:sp>
+      <p:sp>
+        <p:nvSpPr>
+          <p:cNvPr id="24" name="stat card 7"/>
           <p:cNvSpPr/>
           <p:nvPr/>
         </p:nvSpPr>
         <p:spPr>
           <a:xfrm>
-            <a:off x="10104120" y="4700016"/>
-            <a:ext cx="1463040" cy="1481328"/>
+            <a:off x="8503920" y="5129784"/>
+            <a:ext cx="1463040" cy="1115568"/>
           </a:xfrm>
           <a:prstGeom prst="roundRect">
             <a:avLst>
-              <a:gd name="adj" fmla="val 9375"/>
+              <a:gd name="adj" fmla="val 12295"/>
             </a:avLst>
           </a:prstGeom>
           <a:solidFill>
@@ -5675,14 +5954,14 @@
       </p:sp>
       <p:sp>
         <p:nvSpPr>
-          <p:cNvPr id="22" name="stat value 6"/>
-          <p:cNvSpPr txBox="1"/>
-          <p:nvPr/>
-        </p:nvSpPr>
-        <p:spPr>
-          <a:xfrm>
-            <a:off x="10241280" y="4864608"/>
-            <a:ext cx="1234440" cy="548640"/>
+          <p:cNvPr id="25" name="stat value 7"/>
+          <p:cNvSpPr txBox="1"/>
+          <p:nvPr/>
+        </p:nvSpPr>
+        <p:spPr>
+          <a:xfrm>
+            <a:off x="8613648" y="5257800"/>
+            <a:ext cx="1280160" cy="502920"/>
           </a:xfrm>
           <a:prstGeom prst="rect">
             <a:avLst/>
@@ -5698,12 +5977,12 @@
               <a:buNone/>
             </a:pPr>
             <a:r>
-              <a:rPr lang="en-US" sz="3000" b="1" dirty="0">
+              <a:rPr lang="en-US" sz="2600" b="1" dirty="0">
                 <a:solidFill>
                   <a:schemeClr val="tx2"/>
                 </a:solidFill>
               </a:rPr>
-              <a:t>1</a:t>
+              <a:t>4</a:t>
             </a:r>
             <a:pPr indent="0" marL="0">
               <a:buNone/>
@@ -5714,22 +5993,22 @@
                   <a:schemeClr val="tx2"/>
                 </a:solidFill>
               </a:rPr>
-              <a:t> 處</a:t>
-            </a:r>
-            <a:endParaRPr lang="en-US" sz="3000" dirty="0"/>
-          </a:p>
-        </p:txBody>
-      </p:sp>
-      <p:sp>
-        <p:nvSpPr>
-          <p:cNvPr id="23" name="stat label 6"/>
-          <p:cNvSpPr txBox="1"/>
-          <p:nvPr/>
-        </p:nvSpPr>
-        <p:spPr>
-          <a:xfrm>
-            <a:off x="10241280" y="5477256"/>
-            <a:ext cx="1234440" cy="594360"/>
+              <a:t> 株</a:t>
+            </a:r>
+            <a:endParaRPr lang="en-US" sz="2600" dirty="0"/>
+          </a:p>
+        </p:txBody>
+      </p:sp>
+      <p:sp>
+        <p:nvSpPr>
+          <p:cNvPr id="26" name="stat label 7"/>
+          <p:cNvSpPr txBox="1"/>
+          <p:nvPr/>
+        </p:nvSpPr>
+        <p:spPr>
+          <a:xfrm>
+            <a:off x="8613648" y="5806440"/>
+            <a:ext cx="1280160" cy="347472"/>
           </a:xfrm>
           <a:prstGeom prst="rect">
             <a:avLst/>
@@ -5750,7 +6029,114 @@
                   <a:schemeClr val="tx1"/>
                 </a:solidFill>
               </a:rPr>
-              <a:t>體健區混凝土地坪</a:t>
+              <a:t>新植喬木</a:t>
+            </a:r>
+            <a:endParaRPr lang="en-US" sz="1200" dirty="0"/>
+          </a:p>
+        </p:txBody>
+      </p:sp>
+      <p:sp>
+        <p:nvSpPr>
+          <p:cNvPr id="27" name="stat card 8"/>
+          <p:cNvSpPr/>
+          <p:nvPr/>
+        </p:nvSpPr>
+        <p:spPr>
+          <a:xfrm>
+            <a:off x="10104120" y="5129784"/>
+            <a:ext cx="1463040" cy="1115568"/>
+          </a:xfrm>
+          <a:prstGeom prst="roundRect">
+            <a:avLst>
+              <a:gd name="adj" fmla="val 12295"/>
+            </a:avLst>
+          </a:prstGeom>
+          <a:solidFill>
+            <a:schemeClr val="accent4">
+              <a:alpha val="35000"/>
+            </a:schemeClr>
+          </a:solidFill>
+          <a:ln/>
+        </p:spPr>
+      </p:sp>
+      <p:sp>
+        <p:nvSpPr>
+          <p:cNvPr id="28" name="stat value 8"/>
+          <p:cNvSpPr txBox="1"/>
+          <p:nvPr/>
+        </p:nvSpPr>
+        <p:spPr>
+          <a:xfrm>
+            <a:off x="10213848" y="5257800"/>
+            <a:ext cx="1280160" cy="502920"/>
+          </a:xfrm>
+          <a:prstGeom prst="rect">
+            <a:avLst/>
+          </a:prstGeom>
+          <a:noFill/>
+          <a:ln/>
+        </p:spPr>
+        <p:txBody>
+          <a:bodyPr wrap="square" lIns="0" tIns="0" rIns="0" bIns="0" rtlCol="0" anchor="ctr"/>
+          <a:lstStyle/>
+          <a:p>
+            <a:pPr indent="0" marL="0">
+              <a:buNone/>
+            </a:pPr>
+            <a:r>
+              <a:rPr lang="en-US" sz="2600" b="1" dirty="0">
+                <a:solidFill>
+                  <a:schemeClr val="tx2"/>
+                </a:solidFill>
+              </a:rPr>
+              <a:t>9.9</a:t>
+            </a:r>
+            <a:pPr indent="0" marL="0">
+              <a:buNone/>
+            </a:pPr>
+            <a:r>
+              <a:rPr lang="en-US" sz="1300" dirty="0">
+                <a:solidFill>
+                  <a:schemeClr val="tx2"/>
+                </a:solidFill>
+              </a:rPr>
+              <a:t> m²</a:t>
+            </a:r>
+            <a:endParaRPr lang="en-US" sz="2600" dirty="0"/>
+          </a:p>
+        </p:txBody>
+      </p:sp>
+      <p:sp>
+        <p:nvSpPr>
+          <p:cNvPr id="29" name="stat label 8"/>
+          <p:cNvSpPr txBox="1"/>
+          <p:nvPr/>
+        </p:nvSpPr>
+        <p:spPr>
+          <a:xfrm>
+            <a:off x="10213848" y="5806440"/>
+            <a:ext cx="1280160" cy="347472"/>
+          </a:xfrm>
+          <a:prstGeom prst="rect">
+            <a:avLst/>
+          </a:prstGeom>
+          <a:noFill/>
+          <a:ln/>
+        </p:spPr>
+        <p:txBody>
+          <a:bodyPr wrap="square" lIns="0" tIns="0" rIns="0" bIns="0" rtlCol="0" anchor="t"/>
+          <a:lstStyle/>
+          <a:p>
+            <a:pPr indent="0" marL="0">
+              <a:buNone/>
+            </a:pPr>
+            <a:r>
+              <a:rPr lang="en-US" sz="1200" dirty="0">
+                <a:solidFill>
+                  <a:schemeClr val="tx1"/>
+                </a:solidFill>
+              </a:rPr>
+              <a:t>樹穴結構模組</a:t>
             </a:r>
             <a:endParaRPr lang="en-US" sz="1200" dirty="0"/>
           </a:p>
@@ -5892,8 +6278,8 @@
           <a:ln/>
           <a:effectLst>
             <a:outerShdw sx="100000" sy="100000" kx="0" ky="0" algn="bl" rotWithShape="0" blurRad="152400" dist="50800" dir="5400000">
-              <a:srgbClr val="C3A6FF">
-                <a:alpha val="35000"/>
+              <a:srgbClr val="A8D5A2">
+                <a:alpha val="40000"/>
               </a:srgbClr>
             </a:outerShdw>
           </a:effectLst>
@@ -6419,47 +6805,47 @@
 </file>
 
 <file path=ppt/theme/theme1.xml><?xml version="1.0" encoding="utf-8"?>
-<a:theme xmlns:a="http://schemas.openxmlformats.org/drawingml/2006/main" name="Dopamine Pastel">
+<a:theme xmlns:a="http://schemas.openxmlformats.org/drawingml/2006/main" name="Park Pastel">
   <a:themeElements>
-    <a:clrScheme name="Dopamine Pastel">
+    <a:clrScheme name="Park Pastel">
       <a:dk1>
-        <a:srgbClr val="3A3150"/>
+        <a:srgbClr val="33402F"/>
       </a:dk1>
       <a:lt1>
         <a:srgbClr val="FFFFFF"/>
       </a:lt1>
       <a:dk2>
-        <a:srgbClr val="5B3F8C"/>
+        <a:srgbClr val="2F5D3A"/>
       </a:dk2>
       <a:lt2>
-        <a:srgbClr val="FFF0F6"/>
+        <a:srgbClr val="EEF6E8"/>
       </a:lt2>
       <a:accent1>
-        <a:srgbClr val="FF8FB1"/>
+        <a:srgbClr val="A8D5A2"/>
       </a:accent1>
       <a:accent2>
-        <a:srgbClr val="FFD166"/>
+        <a:srgbClr val="FFE08A"/>
       </a:accent2>
       <a:accent3>
-        <a:srgbClr val="7FD8BE"/>
+        <a:srgbClr val="A7D3F2"/>
       </a:accent3>
       <a:accent4>
-        <a:srgbClr val="8EC5FF"/>
+        <a:srgbClr val="F7B7C3"/>
       </a:accent4>
       <a:accent5>
-        <a:srgbClr val="C3A6FF"/>
+        <a:srgbClr val="E8C4A0"/>
       </a:accent5>
       <a:accent6>
-        <a:srgbClr val="FFB38A"/>
+        <a:srgbClr val="C9E4B4"/>
       </a:accent6>
       <a:hlink>
-        <a:srgbClr val="5B3F8C"/>
+        <a:srgbClr val="2F5D3A"/>
       </a:hlink>
       <a:folHlink>
-        <a:srgbClr val="C3A6FF"/>
+        <a:srgbClr val="5E7C64"/>
       </a:folHlink>
     </a:clrScheme>
-    <a:fontScheme name="Dopamine Pastel">
+    <a:fontScheme name="Park Pastel">
       <a:majorFont>
         <a:latin typeface="Microsoft JhengHei"/>
         <a:ea typeface=""/>
